--- a/chapter06/ASE_6_Agile_Process.pptx
+++ b/chapter06/ASE_6_Agile_Process.pptx
@@ -1,53 +1,53 @@
 
 <file path=ppt/presentation.xml><?xml version="1.0" encoding="utf-8"?>
-<p:presentation xmlns:a="http://schemas.openxmlformats.org/drawingml/2006/main" xmlns:r="http://schemas.openxmlformats.org/officeDocument/2006/relationships" xmlns:p="http://schemas.openxmlformats.org/presentationml/2006/main" saveSubsetFonts="1">
+<p:presentation xmlns:a="http://schemas.openxmlformats.org/drawingml/2006/main" xmlns:r="http://schemas.openxmlformats.org/officeDocument/2006/relationships" xmlns:p="http://schemas.openxmlformats.org/presentationml/2006/main">
   <p:sldMasterIdLst>
-    <p:sldMasterId id="2147483875" r:id="rId4"/>
+    <p:sldMasterId id="2147483648" r:id="rId1"/>
   </p:sldMasterIdLst>
   <p:notesMasterIdLst>
-    <p:notesMasterId r:id="rId45"/>
+    <p:notesMasterId r:id="rId5"/>
   </p:notesMasterIdLst>
   <p:sldIdLst>
-    <p:sldId id="256" r:id="rId5"/>
-    <p:sldId id="276" r:id="rId6"/>
-    <p:sldId id="258" r:id="rId7"/>
-    <p:sldId id="278" r:id="rId8"/>
-    <p:sldId id="302" r:id="rId9"/>
-    <p:sldId id="279" r:id="rId10"/>
-    <p:sldId id="280" r:id="rId11"/>
-    <p:sldId id="281" r:id="rId12"/>
-    <p:sldId id="282" r:id="rId13"/>
-    <p:sldId id="283" r:id="rId14"/>
-    <p:sldId id="284" r:id="rId15"/>
-    <p:sldId id="266" r:id="rId16"/>
-    <p:sldId id="263" r:id="rId17"/>
-    <p:sldId id="264" r:id="rId18"/>
-    <p:sldId id="291" r:id="rId19"/>
-    <p:sldId id="292" r:id="rId20"/>
-    <p:sldId id="293" r:id="rId21"/>
-    <p:sldId id="294" r:id="rId22"/>
-    <p:sldId id="298" r:id="rId23"/>
-    <p:sldId id="295" r:id="rId24"/>
-    <p:sldId id="296" r:id="rId25"/>
-    <p:sldId id="305" r:id="rId26"/>
-    <p:sldId id="309" r:id="rId27"/>
-    <p:sldId id="297" r:id="rId28"/>
-    <p:sldId id="304" r:id="rId29"/>
-    <p:sldId id="275" r:id="rId30"/>
-    <p:sldId id="299" r:id="rId31"/>
-    <p:sldId id="300" r:id="rId32"/>
-    <p:sldId id="301" r:id="rId33"/>
-    <p:sldId id="306" r:id="rId34"/>
-    <p:sldId id="308" r:id="rId35"/>
-    <p:sldId id="307" r:id="rId36"/>
-    <p:sldId id="290" r:id="rId37"/>
-    <p:sldId id="267" r:id="rId38"/>
-    <p:sldId id="274" r:id="rId39"/>
-    <p:sldId id="277" r:id="rId40"/>
-    <p:sldId id="310" r:id="rId41"/>
-    <p:sldId id="311" r:id="rId42"/>
-    <p:sldId id="303" r:id="rId43"/>
-    <p:sldId id="374" r:id="rId44"/>
+    <p:sldId id="256" r:id="rId3"/>
+    <p:sldId id="276" r:id="rId4"/>
+    <p:sldId id="258" r:id="rId6"/>
+    <p:sldId id="278" r:id="rId7"/>
+    <p:sldId id="302" r:id="rId8"/>
+    <p:sldId id="279" r:id="rId9"/>
+    <p:sldId id="280" r:id="rId10"/>
+    <p:sldId id="281" r:id="rId11"/>
+    <p:sldId id="282" r:id="rId12"/>
+    <p:sldId id="283" r:id="rId13"/>
+    <p:sldId id="284" r:id="rId14"/>
+    <p:sldId id="266" r:id="rId15"/>
+    <p:sldId id="263" r:id="rId16"/>
+    <p:sldId id="264" r:id="rId17"/>
+    <p:sldId id="291" r:id="rId18"/>
+    <p:sldId id="292" r:id="rId19"/>
+    <p:sldId id="293" r:id="rId20"/>
+    <p:sldId id="294" r:id="rId21"/>
+    <p:sldId id="298" r:id="rId22"/>
+    <p:sldId id="295" r:id="rId23"/>
+    <p:sldId id="296" r:id="rId24"/>
+    <p:sldId id="305" r:id="rId25"/>
+    <p:sldId id="309" r:id="rId26"/>
+    <p:sldId id="297" r:id="rId27"/>
+    <p:sldId id="304" r:id="rId28"/>
+    <p:sldId id="275" r:id="rId29"/>
+    <p:sldId id="299" r:id="rId30"/>
+    <p:sldId id="300" r:id="rId31"/>
+    <p:sldId id="301" r:id="rId32"/>
+    <p:sldId id="306" r:id="rId33"/>
+    <p:sldId id="308" r:id="rId34"/>
+    <p:sldId id="307" r:id="rId35"/>
+    <p:sldId id="290" r:id="rId36"/>
+    <p:sldId id="267" r:id="rId37"/>
+    <p:sldId id="274" r:id="rId38"/>
+    <p:sldId id="277" r:id="rId39"/>
+    <p:sldId id="310" r:id="rId40"/>
+    <p:sldId id="311" r:id="rId41"/>
+    <p:sldId id="303" r:id="rId42"/>
+    <p:sldId id="374" r:id="rId43"/>
   </p:sldIdLst>
   <p:sldSz cx="12192000" cy="6858000"/>
   <p:notesSz cx="6858000" cy="9144000"/>
@@ -149,12 +149,12 @@
   <p:extLst>
     <p:ext uri="{EFAFB233-063F-42B5-8137-9DF3F51BA10A}">
       <p15:sldGuideLst xmlns:p15="http://schemas.microsoft.com/office/powerpoint/2012/main">
-        <p15:guide id="1" orient="horz" pos="2160" userDrawn="1">
+        <p15:guide id="1" orient="horz" pos="2158" userDrawn="1">
           <p15:clr>
             <a:srgbClr val="A4A3A4"/>
           </p15:clr>
         </p15:guide>
-        <p15:guide id="2" pos="3840" userDrawn="1">
+        <p15:guide id="2" pos="3856" userDrawn="1">
           <p15:clr>
             <a:srgbClr val="A4A3A4"/>
           </p15:clr>
@@ -163,1457 +163,6 @@
     </p:ext>
   </p:extLst>
 </p:presentation>
-</file>
-
-<file path=ppt/changesInfos/changesInfo1.xml><?xml version="1.0" encoding="utf-8"?>
-<pc:chgInfo xmlns:a="http://schemas.openxmlformats.org/drawingml/2006/main" xmlns:r="http://schemas.openxmlformats.org/officeDocument/2006/relationships" xmlns:ac="http://schemas.microsoft.com/office/drawing/2013/main/command" xmlns:pc="http://schemas.microsoft.com/office/powerpoint/2013/main/command">
-  <pc:docChgLst>
-    <pc:chgData name="Xin Zou" userId="260b9726081dae15" providerId="LiveId" clId="{372C12A0-4480-49F1-9F16-C2A0383D6A8D}"/>
-    <pc:docChg chg="custSel modSld">
-      <pc:chgData name="Xin Zou" userId="260b9726081dae15" providerId="LiveId" clId="{372C12A0-4480-49F1-9F16-C2A0383D6A8D}" dt="2018-10-24T15:29:26.189" v="4" actId="27636"/>
-      <pc:docMkLst>
-        <pc:docMk/>
-      </pc:docMkLst>
-      <pc:sldChg chg="modSp">
-        <pc:chgData name="Xin Zou" userId="260b9726081dae15" providerId="LiveId" clId="{372C12A0-4480-49F1-9F16-C2A0383D6A8D}" dt="2018-10-24T15:28:38.647" v="1" actId="27636"/>
-        <pc:sldMkLst>
-          <pc:docMk/>
-          <pc:sldMk cId="1833257090" sldId="283"/>
-        </pc:sldMkLst>
-        <pc:spChg chg="mod">
-          <ac:chgData name="Xin Zou" userId="260b9726081dae15" providerId="LiveId" clId="{372C12A0-4480-49F1-9F16-C2A0383D6A8D}" dt="2018-10-24T15:28:38.647" v="1" actId="27636"/>
-          <ac:spMkLst>
-            <pc:docMk/>
-            <pc:sldMk cId="1833257090" sldId="283"/>
-            <ac:spMk id="3" creationId="{00000000-0000-0000-0000-000000000000}"/>
-          </ac:spMkLst>
-        </pc:spChg>
-      </pc:sldChg>
-      <pc:sldChg chg="modSp">
-        <pc:chgData name="Xin Zou" userId="260b9726081dae15" providerId="LiveId" clId="{372C12A0-4480-49F1-9F16-C2A0383D6A8D}" dt="2018-10-24T15:29:26.189" v="4" actId="27636"/>
-        <pc:sldMkLst>
-          <pc:docMk/>
-          <pc:sldMk cId="2263928036" sldId="300"/>
-        </pc:sldMkLst>
-        <pc:spChg chg="mod">
-          <ac:chgData name="Xin Zou" userId="260b9726081dae15" providerId="LiveId" clId="{372C12A0-4480-49F1-9F16-C2A0383D6A8D}" dt="2018-10-24T15:29:26.189" v="4" actId="27636"/>
-          <ac:spMkLst>
-            <pc:docMk/>
-            <pc:sldMk cId="2263928036" sldId="300"/>
-            <ac:spMk id="3" creationId="{00000000-0000-0000-0000-000000000000}"/>
-          </ac:spMkLst>
-        </pc:spChg>
-      </pc:sldChg>
-    </pc:docChg>
-  </pc:docChgLst>
-  <pc:docChgLst>
-    <pc:chgData name="Xin Zou" userId="260b9726081dae15" providerId="LiveId" clId="{4830D34F-2340-49F5-A7DC-801892A92994}"/>
-    <pc:docChg chg="undo custSel addSld delSld modSld modMainMaster">
-      <pc:chgData name="Xin Zou" userId="260b9726081dae15" providerId="LiveId" clId="{4830D34F-2340-49F5-A7DC-801892A92994}" dt="2018-10-08T05:50:10.418" v="1811" actId="27636"/>
-      <pc:docMkLst>
-        <pc:docMk/>
-      </pc:docMkLst>
-      <pc:sldChg chg="modSp">
-        <pc:chgData name="Xin Zou" userId="260b9726081dae15" providerId="LiveId" clId="{4830D34F-2340-49F5-A7DC-801892A92994}" dt="2018-10-08T05:50:10.418" v="1811" actId="27636"/>
-        <pc:sldMkLst>
-          <pc:docMk/>
-          <pc:sldMk cId="1430678027" sldId="256"/>
-        </pc:sldMkLst>
-        <pc:spChg chg="mod">
-          <ac:chgData name="Xin Zou" userId="260b9726081dae15" providerId="LiveId" clId="{4830D34F-2340-49F5-A7DC-801892A92994}" dt="2018-10-08T05:50:10.418" v="1811" actId="27636"/>
-          <ac:spMkLst>
-            <pc:docMk/>
-            <pc:sldMk cId="1430678027" sldId="256"/>
-            <ac:spMk id="3" creationId="{00000000-0000-0000-0000-000000000000}"/>
-          </ac:spMkLst>
-        </pc:spChg>
-      </pc:sldChg>
-      <pc:sldChg chg="modSp">
-        <pc:chgData name="Xin Zou" userId="260b9726081dae15" providerId="LiveId" clId="{4830D34F-2340-49F5-A7DC-801892A92994}" dt="2018-10-08T05:49:36.578" v="1802" actId="27636"/>
-        <pc:sldMkLst>
-          <pc:docMk/>
-          <pc:sldMk cId="3893534347" sldId="258"/>
-        </pc:sldMkLst>
-        <pc:spChg chg="mod">
-          <ac:chgData name="Xin Zou" userId="260b9726081dae15" providerId="LiveId" clId="{4830D34F-2340-49F5-A7DC-801892A92994}" dt="2018-10-08T05:49:36.578" v="1802" actId="27636"/>
-          <ac:spMkLst>
-            <pc:docMk/>
-            <pc:sldMk cId="3893534347" sldId="258"/>
-            <ac:spMk id="2" creationId="{00000000-0000-0000-0000-000000000000}"/>
-          </ac:spMkLst>
-        </pc:spChg>
-        <pc:spChg chg="mod">
-          <ac:chgData name="Xin Zou" userId="260b9726081dae15" providerId="LiveId" clId="{4830D34F-2340-49F5-A7DC-801892A92994}" dt="2018-10-05T04:37:30.203" v="3"/>
-          <ac:spMkLst>
-            <pc:docMk/>
-            <pc:sldMk cId="3893534347" sldId="258"/>
-            <ac:spMk id="40" creationId="{00000000-0000-0000-0000-000000000000}"/>
-          </ac:spMkLst>
-        </pc:spChg>
-        <pc:spChg chg="mod">
-          <ac:chgData name="Xin Zou" userId="260b9726081dae15" providerId="LiveId" clId="{4830D34F-2340-49F5-A7DC-801892A92994}" dt="2018-10-05T04:37:30.203" v="3"/>
-          <ac:spMkLst>
-            <pc:docMk/>
-            <pc:sldMk cId="3893534347" sldId="258"/>
-            <ac:spMk id="45" creationId="{00000000-0000-0000-0000-000000000000}"/>
-          </ac:spMkLst>
-        </pc:spChg>
-        <pc:spChg chg="mod">
-          <ac:chgData name="Xin Zou" userId="260b9726081dae15" providerId="LiveId" clId="{4830D34F-2340-49F5-A7DC-801892A92994}" dt="2018-10-05T04:37:30.203" v="3"/>
-          <ac:spMkLst>
-            <pc:docMk/>
-            <pc:sldMk cId="3893534347" sldId="258"/>
-            <ac:spMk id="46" creationId="{00000000-0000-0000-0000-000000000000}"/>
-          </ac:spMkLst>
-        </pc:spChg>
-        <pc:spChg chg="mod">
-          <ac:chgData name="Xin Zou" userId="260b9726081dae15" providerId="LiveId" clId="{4830D34F-2340-49F5-A7DC-801892A92994}" dt="2018-10-05T04:37:30.203" v="3"/>
-          <ac:spMkLst>
-            <pc:docMk/>
-            <pc:sldMk cId="3893534347" sldId="258"/>
-            <ac:spMk id="47" creationId="{00000000-0000-0000-0000-000000000000}"/>
-          </ac:spMkLst>
-        </pc:spChg>
-        <pc:spChg chg="mod">
-          <ac:chgData name="Xin Zou" userId="260b9726081dae15" providerId="LiveId" clId="{4830D34F-2340-49F5-A7DC-801892A92994}" dt="2018-10-05T04:37:30.203" v="3"/>
-          <ac:spMkLst>
-            <pc:docMk/>
-            <pc:sldMk cId="3893534347" sldId="258"/>
-            <ac:spMk id="48" creationId="{00000000-0000-0000-0000-000000000000}"/>
-          </ac:spMkLst>
-        </pc:spChg>
-        <pc:spChg chg="mod">
-          <ac:chgData name="Xin Zou" userId="260b9726081dae15" providerId="LiveId" clId="{4830D34F-2340-49F5-A7DC-801892A92994}" dt="2018-10-05T04:37:30.203" v="3"/>
-          <ac:spMkLst>
-            <pc:docMk/>
-            <pc:sldMk cId="3893534347" sldId="258"/>
-            <ac:spMk id="49" creationId="{00000000-0000-0000-0000-000000000000}"/>
-          </ac:spMkLst>
-        </pc:spChg>
-        <pc:spChg chg="mod">
-          <ac:chgData name="Xin Zou" userId="260b9726081dae15" providerId="LiveId" clId="{4830D34F-2340-49F5-A7DC-801892A92994}" dt="2018-10-05T04:37:30.203" v="3"/>
-          <ac:spMkLst>
-            <pc:docMk/>
-            <pc:sldMk cId="3893534347" sldId="258"/>
-            <ac:spMk id="54" creationId="{00000000-0000-0000-0000-000000000000}"/>
-          </ac:spMkLst>
-        </pc:spChg>
-        <pc:spChg chg="mod">
-          <ac:chgData name="Xin Zou" userId="260b9726081dae15" providerId="LiveId" clId="{4830D34F-2340-49F5-A7DC-801892A92994}" dt="2018-10-05T04:37:30.203" v="3"/>
-          <ac:spMkLst>
-            <pc:docMk/>
-            <pc:sldMk cId="3893534347" sldId="258"/>
-            <ac:spMk id="55" creationId="{00000000-0000-0000-0000-000000000000}"/>
-          </ac:spMkLst>
-        </pc:spChg>
-        <pc:spChg chg="mod">
-          <ac:chgData name="Xin Zou" userId="260b9726081dae15" providerId="LiveId" clId="{4830D34F-2340-49F5-A7DC-801892A92994}" dt="2018-10-05T04:37:30.203" v="3"/>
-          <ac:spMkLst>
-            <pc:docMk/>
-            <pc:sldMk cId="3893534347" sldId="258"/>
-            <ac:spMk id="56" creationId="{00000000-0000-0000-0000-000000000000}"/>
-          </ac:spMkLst>
-        </pc:spChg>
-        <pc:spChg chg="mod">
-          <ac:chgData name="Xin Zou" userId="260b9726081dae15" providerId="LiveId" clId="{4830D34F-2340-49F5-A7DC-801892A92994}" dt="2018-10-05T04:37:30.203" v="3"/>
-          <ac:spMkLst>
-            <pc:docMk/>
-            <pc:sldMk cId="3893534347" sldId="258"/>
-            <ac:spMk id="57" creationId="{00000000-0000-0000-0000-000000000000}"/>
-          </ac:spMkLst>
-        </pc:spChg>
-        <pc:spChg chg="mod">
-          <ac:chgData name="Xin Zou" userId="260b9726081dae15" providerId="LiveId" clId="{4830D34F-2340-49F5-A7DC-801892A92994}" dt="2018-10-05T04:37:30.203" v="3"/>
-          <ac:spMkLst>
-            <pc:docMk/>
-            <pc:sldMk cId="3893534347" sldId="258"/>
-            <ac:spMk id="58" creationId="{00000000-0000-0000-0000-000000000000}"/>
-          </ac:spMkLst>
-        </pc:spChg>
-        <pc:spChg chg="mod">
-          <ac:chgData name="Xin Zou" userId="260b9726081dae15" providerId="LiveId" clId="{4830D34F-2340-49F5-A7DC-801892A92994}" dt="2018-10-05T04:37:30.203" v="3"/>
-          <ac:spMkLst>
-            <pc:docMk/>
-            <pc:sldMk cId="3893534347" sldId="258"/>
-            <ac:spMk id="59" creationId="{00000000-0000-0000-0000-000000000000}"/>
-          </ac:spMkLst>
-        </pc:spChg>
-        <pc:spChg chg="mod">
-          <ac:chgData name="Xin Zou" userId="260b9726081dae15" providerId="LiveId" clId="{4830D34F-2340-49F5-A7DC-801892A92994}" dt="2018-10-05T04:37:30.203" v="3"/>
-          <ac:spMkLst>
-            <pc:docMk/>
-            <pc:sldMk cId="3893534347" sldId="258"/>
-            <ac:spMk id="60" creationId="{00000000-0000-0000-0000-000000000000}"/>
-          </ac:spMkLst>
-        </pc:spChg>
-        <pc:spChg chg="mod">
-          <ac:chgData name="Xin Zou" userId="260b9726081dae15" providerId="LiveId" clId="{4830D34F-2340-49F5-A7DC-801892A92994}" dt="2018-10-05T04:37:30.203" v="3"/>
-          <ac:spMkLst>
-            <pc:docMk/>
-            <pc:sldMk cId="3893534347" sldId="258"/>
-            <ac:spMk id="61" creationId="{00000000-0000-0000-0000-000000000000}"/>
-          </ac:spMkLst>
-        </pc:spChg>
-        <pc:spChg chg="mod">
-          <ac:chgData name="Xin Zou" userId="260b9726081dae15" providerId="LiveId" clId="{4830D34F-2340-49F5-A7DC-801892A92994}" dt="2018-10-05T04:37:30.203" v="3"/>
-          <ac:spMkLst>
-            <pc:docMk/>
-            <pc:sldMk cId="3893534347" sldId="258"/>
-            <ac:spMk id="62" creationId="{00000000-0000-0000-0000-000000000000}"/>
-          </ac:spMkLst>
-        </pc:spChg>
-        <pc:spChg chg="mod">
-          <ac:chgData name="Xin Zou" userId="260b9726081dae15" providerId="LiveId" clId="{4830D34F-2340-49F5-A7DC-801892A92994}" dt="2018-10-05T04:37:30.203" v="3"/>
-          <ac:spMkLst>
-            <pc:docMk/>
-            <pc:sldMk cId="3893534347" sldId="258"/>
-            <ac:spMk id="63" creationId="{00000000-0000-0000-0000-000000000000}"/>
-          </ac:spMkLst>
-        </pc:spChg>
-        <pc:spChg chg="mod">
-          <ac:chgData name="Xin Zou" userId="260b9726081dae15" providerId="LiveId" clId="{4830D34F-2340-49F5-A7DC-801892A92994}" dt="2018-10-05T04:37:30.203" v="3"/>
-          <ac:spMkLst>
-            <pc:docMk/>
-            <pc:sldMk cId="3893534347" sldId="258"/>
-            <ac:spMk id="64" creationId="{00000000-0000-0000-0000-000000000000}"/>
-          </ac:spMkLst>
-        </pc:spChg>
-        <pc:spChg chg="mod">
-          <ac:chgData name="Xin Zou" userId="260b9726081dae15" providerId="LiveId" clId="{4830D34F-2340-49F5-A7DC-801892A92994}" dt="2018-10-05T04:37:30.203" v="3"/>
-          <ac:spMkLst>
-            <pc:docMk/>
-            <pc:sldMk cId="3893534347" sldId="258"/>
-            <ac:spMk id="76" creationId="{00000000-0000-0000-0000-000000000000}"/>
-          </ac:spMkLst>
-        </pc:spChg>
-        <pc:cxnChg chg="mod">
-          <ac:chgData name="Xin Zou" userId="260b9726081dae15" providerId="LiveId" clId="{4830D34F-2340-49F5-A7DC-801892A92994}" dt="2018-10-05T04:37:30.203" v="3"/>
-          <ac:cxnSpMkLst>
-            <pc:docMk/>
-            <pc:sldMk cId="3893534347" sldId="258"/>
-            <ac:cxnSpMk id="41" creationId="{00000000-0000-0000-0000-000000000000}"/>
-          </ac:cxnSpMkLst>
-        </pc:cxnChg>
-        <pc:cxnChg chg="mod">
-          <ac:chgData name="Xin Zou" userId="260b9726081dae15" providerId="LiveId" clId="{4830D34F-2340-49F5-A7DC-801892A92994}" dt="2018-10-05T04:37:30.203" v="3"/>
-          <ac:cxnSpMkLst>
-            <pc:docMk/>
-            <pc:sldMk cId="3893534347" sldId="258"/>
-            <ac:cxnSpMk id="42" creationId="{00000000-0000-0000-0000-000000000000}"/>
-          </ac:cxnSpMkLst>
-        </pc:cxnChg>
-        <pc:cxnChg chg="mod">
-          <ac:chgData name="Xin Zou" userId="260b9726081dae15" providerId="LiveId" clId="{4830D34F-2340-49F5-A7DC-801892A92994}" dt="2018-10-05T04:37:30.203" v="3"/>
-          <ac:cxnSpMkLst>
-            <pc:docMk/>
-            <pc:sldMk cId="3893534347" sldId="258"/>
-            <ac:cxnSpMk id="43" creationId="{00000000-0000-0000-0000-000000000000}"/>
-          </ac:cxnSpMkLst>
-        </pc:cxnChg>
-        <pc:cxnChg chg="mod">
-          <ac:chgData name="Xin Zou" userId="260b9726081dae15" providerId="LiveId" clId="{4830D34F-2340-49F5-A7DC-801892A92994}" dt="2018-10-05T04:37:30.203" v="3"/>
-          <ac:cxnSpMkLst>
-            <pc:docMk/>
-            <pc:sldMk cId="3893534347" sldId="258"/>
-            <ac:cxnSpMk id="44" creationId="{00000000-0000-0000-0000-000000000000}"/>
-          </ac:cxnSpMkLst>
-        </pc:cxnChg>
-        <pc:cxnChg chg="mod">
-          <ac:chgData name="Xin Zou" userId="260b9726081dae15" providerId="LiveId" clId="{4830D34F-2340-49F5-A7DC-801892A92994}" dt="2018-10-05T04:37:30.203" v="3"/>
-          <ac:cxnSpMkLst>
-            <pc:docMk/>
-            <pc:sldMk cId="3893534347" sldId="258"/>
-            <ac:cxnSpMk id="50" creationId="{00000000-0000-0000-0000-000000000000}"/>
-          </ac:cxnSpMkLst>
-        </pc:cxnChg>
-        <pc:cxnChg chg="mod">
-          <ac:chgData name="Xin Zou" userId="260b9726081dae15" providerId="LiveId" clId="{4830D34F-2340-49F5-A7DC-801892A92994}" dt="2018-10-05T04:37:30.203" v="3"/>
-          <ac:cxnSpMkLst>
-            <pc:docMk/>
-            <pc:sldMk cId="3893534347" sldId="258"/>
-            <ac:cxnSpMk id="51" creationId="{00000000-0000-0000-0000-000000000000}"/>
-          </ac:cxnSpMkLst>
-        </pc:cxnChg>
-        <pc:cxnChg chg="mod">
-          <ac:chgData name="Xin Zou" userId="260b9726081dae15" providerId="LiveId" clId="{4830D34F-2340-49F5-A7DC-801892A92994}" dt="2018-10-05T04:37:30.203" v="3"/>
-          <ac:cxnSpMkLst>
-            <pc:docMk/>
-            <pc:sldMk cId="3893534347" sldId="258"/>
-            <ac:cxnSpMk id="52" creationId="{00000000-0000-0000-0000-000000000000}"/>
-          </ac:cxnSpMkLst>
-        </pc:cxnChg>
-        <pc:cxnChg chg="mod">
-          <ac:chgData name="Xin Zou" userId="260b9726081dae15" providerId="LiveId" clId="{4830D34F-2340-49F5-A7DC-801892A92994}" dt="2018-10-05T04:37:30.203" v="3"/>
-          <ac:cxnSpMkLst>
-            <pc:docMk/>
-            <pc:sldMk cId="3893534347" sldId="258"/>
-            <ac:cxnSpMk id="53" creationId="{00000000-0000-0000-0000-000000000000}"/>
-          </ac:cxnSpMkLst>
-        </pc:cxnChg>
-        <pc:cxnChg chg="mod">
-          <ac:chgData name="Xin Zou" userId="260b9726081dae15" providerId="LiveId" clId="{4830D34F-2340-49F5-A7DC-801892A92994}" dt="2018-10-05T04:37:30.203" v="3"/>
-          <ac:cxnSpMkLst>
-            <pc:docMk/>
-            <pc:sldMk cId="3893534347" sldId="258"/>
-            <ac:cxnSpMk id="65" creationId="{00000000-0000-0000-0000-000000000000}"/>
-          </ac:cxnSpMkLst>
-        </pc:cxnChg>
-        <pc:cxnChg chg="mod">
-          <ac:chgData name="Xin Zou" userId="260b9726081dae15" providerId="LiveId" clId="{4830D34F-2340-49F5-A7DC-801892A92994}" dt="2018-10-05T04:37:30.203" v="3"/>
-          <ac:cxnSpMkLst>
-            <pc:docMk/>
-            <pc:sldMk cId="3893534347" sldId="258"/>
-            <ac:cxnSpMk id="66" creationId="{00000000-0000-0000-0000-000000000000}"/>
-          </ac:cxnSpMkLst>
-        </pc:cxnChg>
-        <pc:cxnChg chg="mod">
-          <ac:chgData name="Xin Zou" userId="260b9726081dae15" providerId="LiveId" clId="{4830D34F-2340-49F5-A7DC-801892A92994}" dt="2018-10-05T04:37:30.203" v="3"/>
-          <ac:cxnSpMkLst>
-            <pc:docMk/>
-            <pc:sldMk cId="3893534347" sldId="258"/>
-            <ac:cxnSpMk id="67" creationId="{00000000-0000-0000-0000-000000000000}"/>
-          </ac:cxnSpMkLst>
-        </pc:cxnChg>
-        <pc:cxnChg chg="mod">
-          <ac:chgData name="Xin Zou" userId="260b9726081dae15" providerId="LiveId" clId="{4830D34F-2340-49F5-A7DC-801892A92994}" dt="2018-10-05T04:37:30.203" v="3"/>
-          <ac:cxnSpMkLst>
-            <pc:docMk/>
-            <pc:sldMk cId="3893534347" sldId="258"/>
-            <ac:cxnSpMk id="68" creationId="{00000000-0000-0000-0000-000000000000}"/>
-          </ac:cxnSpMkLst>
-        </pc:cxnChg>
-        <pc:cxnChg chg="mod">
-          <ac:chgData name="Xin Zou" userId="260b9726081dae15" providerId="LiveId" clId="{4830D34F-2340-49F5-A7DC-801892A92994}" dt="2018-10-05T04:37:30.203" v="3"/>
-          <ac:cxnSpMkLst>
-            <pc:docMk/>
-            <pc:sldMk cId="3893534347" sldId="258"/>
-            <ac:cxnSpMk id="69" creationId="{00000000-0000-0000-0000-000000000000}"/>
-          </ac:cxnSpMkLst>
-        </pc:cxnChg>
-        <pc:cxnChg chg="mod">
-          <ac:chgData name="Xin Zou" userId="260b9726081dae15" providerId="LiveId" clId="{4830D34F-2340-49F5-A7DC-801892A92994}" dt="2018-10-05T04:37:30.203" v="3"/>
-          <ac:cxnSpMkLst>
-            <pc:docMk/>
-            <pc:sldMk cId="3893534347" sldId="258"/>
-            <ac:cxnSpMk id="70" creationId="{00000000-0000-0000-0000-000000000000}"/>
-          </ac:cxnSpMkLst>
-        </pc:cxnChg>
-        <pc:cxnChg chg="mod">
-          <ac:chgData name="Xin Zou" userId="260b9726081dae15" providerId="LiveId" clId="{4830D34F-2340-49F5-A7DC-801892A92994}" dt="2018-10-05T04:37:30.203" v="3"/>
-          <ac:cxnSpMkLst>
-            <pc:docMk/>
-            <pc:sldMk cId="3893534347" sldId="258"/>
-            <ac:cxnSpMk id="71" creationId="{00000000-0000-0000-0000-000000000000}"/>
-          </ac:cxnSpMkLst>
-        </pc:cxnChg>
-        <pc:cxnChg chg="mod">
-          <ac:chgData name="Xin Zou" userId="260b9726081dae15" providerId="LiveId" clId="{4830D34F-2340-49F5-A7DC-801892A92994}" dt="2018-10-05T04:37:30.203" v="3"/>
-          <ac:cxnSpMkLst>
-            <pc:docMk/>
-            <pc:sldMk cId="3893534347" sldId="258"/>
-            <ac:cxnSpMk id="72" creationId="{00000000-0000-0000-0000-000000000000}"/>
-          </ac:cxnSpMkLst>
-        </pc:cxnChg>
-        <pc:cxnChg chg="mod">
-          <ac:chgData name="Xin Zou" userId="260b9726081dae15" providerId="LiveId" clId="{4830D34F-2340-49F5-A7DC-801892A92994}" dt="2018-10-05T04:37:30.203" v="3"/>
-          <ac:cxnSpMkLst>
-            <pc:docMk/>
-            <pc:sldMk cId="3893534347" sldId="258"/>
-            <ac:cxnSpMk id="73" creationId="{00000000-0000-0000-0000-000000000000}"/>
-          </ac:cxnSpMkLst>
-        </pc:cxnChg>
-        <pc:cxnChg chg="mod">
-          <ac:chgData name="Xin Zou" userId="260b9726081dae15" providerId="LiveId" clId="{4830D34F-2340-49F5-A7DC-801892A92994}" dt="2018-10-05T04:37:30.203" v="3"/>
-          <ac:cxnSpMkLst>
-            <pc:docMk/>
-            <pc:sldMk cId="3893534347" sldId="258"/>
-            <ac:cxnSpMk id="74" creationId="{00000000-0000-0000-0000-000000000000}"/>
-          </ac:cxnSpMkLst>
-        </pc:cxnChg>
-        <pc:cxnChg chg="mod">
-          <ac:chgData name="Xin Zou" userId="260b9726081dae15" providerId="LiveId" clId="{4830D34F-2340-49F5-A7DC-801892A92994}" dt="2018-10-05T04:37:30.203" v="3"/>
-          <ac:cxnSpMkLst>
-            <pc:docMk/>
-            <pc:sldMk cId="3893534347" sldId="258"/>
-            <ac:cxnSpMk id="75" creationId="{00000000-0000-0000-0000-000000000000}"/>
-          </ac:cxnSpMkLst>
-        </pc:cxnChg>
-        <pc:cxnChg chg="mod">
-          <ac:chgData name="Xin Zou" userId="260b9726081dae15" providerId="LiveId" clId="{4830D34F-2340-49F5-A7DC-801892A92994}" dt="2018-10-05T04:37:30.203" v="3"/>
-          <ac:cxnSpMkLst>
-            <pc:docMk/>
-            <pc:sldMk cId="3893534347" sldId="258"/>
-            <ac:cxnSpMk id="77" creationId="{00000000-0000-0000-0000-000000000000}"/>
-          </ac:cxnSpMkLst>
-        </pc:cxnChg>
-        <pc:cxnChg chg="mod">
-          <ac:chgData name="Xin Zou" userId="260b9726081dae15" providerId="LiveId" clId="{4830D34F-2340-49F5-A7DC-801892A92994}" dt="2018-10-05T04:37:30.203" v="3"/>
-          <ac:cxnSpMkLst>
-            <pc:docMk/>
-            <pc:sldMk cId="3893534347" sldId="258"/>
-            <ac:cxnSpMk id="78" creationId="{00000000-0000-0000-0000-000000000000}"/>
-          </ac:cxnSpMkLst>
-        </pc:cxnChg>
-      </pc:sldChg>
-      <pc:sldChg chg="modSp">
-        <pc:chgData name="Xin Zou" userId="260b9726081dae15" providerId="LiveId" clId="{4830D34F-2340-49F5-A7DC-801892A92994}" dt="2018-10-05T04:37:30.704" v="8" actId="27636"/>
-        <pc:sldMkLst>
-          <pc:docMk/>
-          <pc:sldMk cId="330817161" sldId="263"/>
-        </pc:sldMkLst>
-        <pc:spChg chg="mod">
-          <ac:chgData name="Xin Zou" userId="260b9726081dae15" providerId="LiveId" clId="{4830D34F-2340-49F5-A7DC-801892A92994}" dt="2018-10-05T04:37:30.704" v="8" actId="27636"/>
-          <ac:spMkLst>
-            <pc:docMk/>
-            <pc:sldMk cId="330817161" sldId="263"/>
-            <ac:spMk id="3" creationId="{00000000-0000-0000-0000-000000000000}"/>
-          </ac:spMkLst>
-        </pc:spChg>
-      </pc:sldChg>
-      <pc:sldChg chg="modSp">
-        <pc:chgData name="Xin Zou" userId="260b9726081dae15" providerId="LiveId" clId="{4830D34F-2340-49F5-A7DC-801892A92994}" dt="2018-10-05T04:37:30.203" v="3"/>
-        <pc:sldMkLst>
-          <pc:docMk/>
-          <pc:sldMk cId="1774392826" sldId="264"/>
-        </pc:sldMkLst>
-        <pc:picChg chg="mod">
-          <ac:chgData name="Xin Zou" userId="260b9726081dae15" providerId="LiveId" clId="{4830D34F-2340-49F5-A7DC-801892A92994}" dt="2018-10-05T04:37:30.203" v="3"/>
-          <ac:picMkLst>
-            <pc:docMk/>
-            <pc:sldMk cId="1774392826" sldId="264"/>
-            <ac:picMk id="1026" creationId="{00000000-0000-0000-0000-000000000000}"/>
-          </ac:picMkLst>
-        </pc:picChg>
-      </pc:sldChg>
-      <pc:sldChg chg="modSp">
-        <pc:chgData name="Xin Zou" userId="260b9726081dae15" providerId="LiveId" clId="{4830D34F-2340-49F5-A7DC-801892A92994}" dt="2018-10-05T04:37:30.203" v="3"/>
-        <pc:sldMkLst>
-          <pc:docMk/>
-          <pc:sldMk cId="2529894550" sldId="266"/>
-        </pc:sldMkLst>
-        <pc:graphicFrameChg chg="mod">
-          <ac:chgData name="Xin Zou" userId="260b9726081dae15" providerId="LiveId" clId="{4830D34F-2340-49F5-A7DC-801892A92994}" dt="2018-10-05T04:37:30.203" v="3"/>
-          <ac:graphicFrameMkLst>
-            <pc:docMk/>
-            <pc:sldMk cId="2529894550" sldId="266"/>
-            <ac:graphicFrameMk id="4" creationId="{00000000-0000-0000-0000-000000000000}"/>
-          </ac:graphicFrameMkLst>
-        </pc:graphicFrameChg>
-      </pc:sldChg>
-      <pc:sldChg chg="add">
-        <pc:chgData name="Xin Zou" userId="260b9726081dae15" providerId="LiveId" clId="{4830D34F-2340-49F5-A7DC-801892A92994}" dt="2018-10-05T05:36:26.368" v="211"/>
-        <pc:sldMkLst>
-          <pc:docMk/>
-          <pc:sldMk cId="247542524" sldId="267"/>
-        </pc:sldMkLst>
-      </pc:sldChg>
-      <pc:sldChg chg="add">
-        <pc:chgData name="Xin Zou" userId="260b9726081dae15" providerId="LiveId" clId="{4830D34F-2340-49F5-A7DC-801892A92994}" dt="2018-10-06T01:36:55.647" v="1536"/>
-        <pc:sldMkLst>
-          <pc:docMk/>
-          <pc:sldMk cId="3387809721" sldId="274"/>
-        </pc:sldMkLst>
-      </pc:sldChg>
-      <pc:sldChg chg="addSp delSp modSp modAnim">
-        <pc:chgData name="Xin Zou" userId="260b9726081dae15" providerId="LiveId" clId="{4830D34F-2340-49F5-A7DC-801892A92994}" dt="2018-10-08T05:49:36.721" v="1806" actId="27636"/>
-        <pc:sldMkLst>
-          <pc:docMk/>
-          <pc:sldMk cId="2123903328" sldId="275"/>
-        </pc:sldMkLst>
-        <pc:spChg chg="mod">
-          <ac:chgData name="Xin Zou" userId="260b9726081dae15" providerId="LiveId" clId="{4830D34F-2340-49F5-A7DC-801892A92994}" dt="2018-10-08T05:49:36.721" v="1806" actId="27636"/>
-          <ac:spMkLst>
-            <pc:docMk/>
-            <pc:sldMk cId="2123903328" sldId="275"/>
-            <ac:spMk id="3" creationId="{00000000-0000-0000-0000-000000000000}"/>
-          </ac:spMkLst>
-        </pc:spChg>
-        <pc:picChg chg="add del mod">
-          <ac:chgData name="Xin Zou" userId="260b9726081dae15" providerId="LiveId" clId="{4830D34F-2340-49F5-A7DC-801892A92994}" dt="2018-10-06T00:44:49.343" v="1361" actId="478"/>
-          <ac:picMkLst>
-            <pc:docMk/>
-            <pc:sldMk cId="2123903328" sldId="275"/>
-            <ac:picMk id="4" creationId="{34799636-629C-4990-8B08-4831E7DFF7C4}"/>
-          </ac:picMkLst>
-        </pc:picChg>
-        <pc:picChg chg="add mod">
-          <ac:chgData name="Xin Zou" userId="260b9726081dae15" providerId="LiveId" clId="{4830D34F-2340-49F5-A7DC-801892A92994}" dt="2018-10-06T00:45:03.101" v="1365" actId="14100"/>
-          <ac:picMkLst>
-            <pc:docMk/>
-            <pc:sldMk cId="2123903328" sldId="275"/>
-            <ac:picMk id="5" creationId="{9966FF37-16A5-4E90-A630-CDB0DFEE181A}"/>
-          </ac:picMkLst>
-        </pc:picChg>
-      </pc:sldChg>
-      <pc:sldChg chg="modSp">
-        <pc:chgData name="Xin Zou" userId="260b9726081dae15" providerId="LiveId" clId="{4830D34F-2340-49F5-A7DC-801892A92994}" dt="2018-10-08T05:49:36.568" v="1801" actId="27636"/>
-        <pc:sldMkLst>
-          <pc:docMk/>
-          <pc:sldMk cId="416517981" sldId="276"/>
-        </pc:sldMkLst>
-        <pc:spChg chg="mod">
-          <ac:chgData name="Xin Zou" userId="260b9726081dae15" providerId="LiveId" clId="{4830D34F-2340-49F5-A7DC-801892A92994}" dt="2018-10-08T05:49:36.568" v="1801" actId="27636"/>
-          <ac:spMkLst>
-            <pc:docMk/>
-            <pc:sldMk cId="416517981" sldId="276"/>
-            <ac:spMk id="2" creationId="{00000000-0000-0000-0000-000000000000}"/>
-          </ac:spMkLst>
-        </pc:spChg>
-        <pc:spChg chg="mod">
-          <ac:chgData name="Xin Zou" userId="260b9726081dae15" providerId="LiveId" clId="{4830D34F-2340-49F5-A7DC-801892A92994}" dt="2018-10-05T04:37:30.203" v="3"/>
-          <ac:spMkLst>
-            <pc:docMk/>
-            <pc:sldMk cId="416517981" sldId="276"/>
-            <ac:spMk id="40" creationId="{00000000-0000-0000-0000-000000000000}"/>
-          </ac:spMkLst>
-        </pc:spChg>
-        <pc:spChg chg="mod">
-          <ac:chgData name="Xin Zou" userId="260b9726081dae15" providerId="LiveId" clId="{4830D34F-2340-49F5-A7DC-801892A92994}" dt="2018-10-05T04:37:30.203" v="3"/>
-          <ac:spMkLst>
-            <pc:docMk/>
-            <pc:sldMk cId="416517981" sldId="276"/>
-            <ac:spMk id="45" creationId="{00000000-0000-0000-0000-000000000000}"/>
-          </ac:spMkLst>
-        </pc:spChg>
-        <pc:spChg chg="mod">
-          <ac:chgData name="Xin Zou" userId="260b9726081dae15" providerId="LiveId" clId="{4830D34F-2340-49F5-A7DC-801892A92994}" dt="2018-10-05T04:37:30.203" v="3"/>
-          <ac:spMkLst>
-            <pc:docMk/>
-            <pc:sldMk cId="416517981" sldId="276"/>
-            <ac:spMk id="46" creationId="{00000000-0000-0000-0000-000000000000}"/>
-          </ac:spMkLst>
-        </pc:spChg>
-        <pc:spChg chg="mod">
-          <ac:chgData name="Xin Zou" userId="260b9726081dae15" providerId="LiveId" clId="{4830D34F-2340-49F5-A7DC-801892A92994}" dt="2018-10-05T04:37:30.203" v="3"/>
-          <ac:spMkLst>
-            <pc:docMk/>
-            <pc:sldMk cId="416517981" sldId="276"/>
-            <ac:spMk id="47" creationId="{00000000-0000-0000-0000-000000000000}"/>
-          </ac:spMkLst>
-        </pc:spChg>
-        <pc:spChg chg="mod">
-          <ac:chgData name="Xin Zou" userId="260b9726081dae15" providerId="LiveId" clId="{4830D34F-2340-49F5-A7DC-801892A92994}" dt="2018-10-05T04:37:30.203" v="3"/>
-          <ac:spMkLst>
-            <pc:docMk/>
-            <pc:sldMk cId="416517981" sldId="276"/>
-            <ac:spMk id="48" creationId="{00000000-0000-0000-0000-000000000000}"/>
-          </ac:spMkLst>
-        </pc:spChg>
-        <pc:spChg chg="mod">
-          <ac:chgData name="Xin Zou" userId="260b9726081dae15" providerId="LiveId" clId="{4830D34F-2340-49F5-A7DC-801892A92994}" dt="2018-10-05T04:37:30.203" v="3"/>
-          <ac:spMkLst>
-            <pc:docMk/>
-            <pc:sldMk cId="416517981" sldId="276"/>
-            <ac:spMk id="54" creationId="{00000000-0000-0000-0000-000000000000}"/>
-          </ac:spMkLst>
-        </pc:spChg>
-        <pc:spChg chg="mod">
-          <ac:chgData name="Xin Zou" userId="260b9726081dae15" providerId="LiveId" clId="{4830D34F-2340-49F5-A7DC-801892A92994}" dt="2018-10-05T04:37:30.203" v="3"/>
-          <ac:spMkLst>
-            <pc:docMk/>
-            <pc:sldMk cId="416517981" sldId="276"/>
-            <ac:spMk id="55" creationId="{00000000-0000-0000-0000-000000000000}"/>
-          </ac:spMkLst>
-        </pc:spChg>
-        <pc:spChg chg="mod">
-          <ac:chgData name="Xin Zou" userId="260b9726081dae15" providerId="LiveId" clId="{4830D34F-2340-49F5-A7DC-801892A92994}" dt="2018-10-05T04:37:30.203" v="3"/>
-          <ac:spMkLst>
-            <pc:docMk/>
-            <pc:sldMk cId="416517981" sldId="276"/>
-            <ac:spMk id="56" creationId="{00000000-0000-0000-0000-000000000000}"/>
-          </ac:spMkLst>
-        </pc:spChg>
-        <pc:spChg chg="mod">
-          <ac:chgData name="Xin Zou" userId="260b9726081dae15" providerId="LiveId" clId="{4830D34F-2340-49F5-A7DC-801892A92994}" dt="2018-10-05T04:37:30.203" v="3"/>
-          <ac:spMkLst>
-            <pc:docMk/>
-            <pc:sldMk cId="416517981" sldId="276"/>
-            <ac:spMk id="57" creationId="{00000000-0000-0000-0000-000000000000}"/>
-          </ac:spMkLst>
-        </pc:spChg>
-        <pc:spChg chg="mod">
-          <ac:chgData name="Xin Zou" userId="260b9726081dae15" providerId="LiveId" clId="{4830D34F-2340-49F5-A7DC-801892A92994}" dt="2018-10-05T04:37:30.203" v="3"/>
-          <ac:spMkLst>
-            <pc:docMk/>
-            <pc:sldMk cId="416517981" sldId="276"/>
-            <ac:spMk id="58" creationId="{00000000-0000-0000-0000-000000000000}"/>
-          </ac:spMkLst>
-        </pc:spChg>
-        <pc:spChg chg="mod">
-          <ac:chgData name="Xin Zou" userId="260b9726081dae15" providerId="LiveId" clId="{4830D34F-2340-49F5-A7DC-801892A92994}" dt="2018-10-05T04:37:30.203" v="3"/>
-          <ac:spMkLst>
-            <pc:docMk/>
-            <pc:sldMk cId="416517981" sldId="276"/>
-            <ac:spMk id="59" creationId="{00000000-0000-0000-0000-000000000000}"/>
-          </ac:spMkLst>
-        </pc:spChg>
-        <pc:spChg chg="mod">
-          <ac:chgData name="Xin Zou" userId="260b9726081dae15" providerId="LiveId" clId="{4830D34F-2340-49F5-A7DC-801892A92994}" dt="2018-10-05T04:37:30.203" v="3"/>
-          <ac:spMkLst>
-            <pc:docMk/>
-            <pc:sldMk cId="416517981" sldId="276"/>
-            <ac:spMk id="60" creationId="{00000000-0000-0000-0000-000000000000}"/>
-          </ac:spMkLst>
-        </pc:spChg>
-        <pc:spChg chg="mod">
-          <ac:chgData name="Xin Zou" userId="260b9726081dae15" providerId="LiveId" clId="{4830D34F-2340-49F5-A7DC-801892A92994}" dt="2018-10-05T04:37:30.203" v="3"/>
-          <ac:spMkLst>
-            <pc:docMk/>
-            <pc:sldMk cId="416517981" sldId="276"/>
-            <ac:spMk id="61" creationId="{00000000-0000-0000-0000-000000000000}"/>
-          </ac:spMkLst>
-        </pc:spChg>
-        <pc:spChg chg="mod">
-          <ac:chgData name="Xin Zou" userId="260b9726081dae15" providerId="LiveId" clId="{4830D34F-2340-49F5-A7DC-801892A92994}" dt="2018-10-05T04:37:30.203" v="3"/>
-          <ac:spMkLst>
-            <pc:docMk/>
-            <pc:sldMk cId="416517981" sldId="276"/>
-            <ac:spMk id="62" creationId="{00000000-0000-0000-0000-000000000000}"/>
-          </ac:spMkLst>
-        </pc:spChg>
-        <pc:spChg chg="mod">
-          <ac:chgData name="Xin Zou" userId="260b9726081dae15" providerId="LiveId" clId="{4830D34F-2340-49F5-A7DC-801892A92994}" dt="2018-10-05T04:37:30.203" v="3"/>
-          <ac:spMkLst>
-            <pc:docMk/>
-            <pc:sldMk cId="416517981" sldId="276"/>
-            <ac:spMk id="63" creationId="{00000000-0000-0000-0000-000000000000}"/>
-          </ac:spMkLst>
-        </pc:spChg>
-        <pc:spChg chg="mod">
-          <ac:chgData name="Xin Zou" userId="260b9726081dae15" providerId="LiveId" clId="{4830D34F-2340-49F5-A7DC-801892A92994}" dt="2018-10-05T04:37:30.203" v="3"/>
-          <ac:spMkLst>
-            <pc:docMk/>
-            <pc:sldMk cId="416517981" sldId="276"/>
-            <ac:spMk id="64" creationId="{00000000-0000-0000-0000-000000000000}"/>
-          </ac:spMkLst>
-        </pc:spChg>
-        <pc:spChg chg="mod">
-          <ac:chgData name="Xin Zou" userId="260b9726081dae15" providerId="LiveId" clId="{4830D34F-2340-49F5-A7DC-801892A92994}" dt="2018-10-05T04:37:30.203" v="3"/>
-          <ac:spMkLst>
-            <pc:docMk/>
-            <pc:sldMk cId="416517981" sldId="276"/>
-            <ac:spMk id="76" creationId="{00000000-0000-0000-0000-000000000000}"/>
-          </ac:spMkLst>
-        </pc:spChg>
-        <pc:cxnChg chg="mod">
-          <ac:chgData name="Xin Zou" userId="260b9726081dae15" providerId="LiveId" clId="{4830D34F-2340-49F5-A7DC-801892A92994}" dt="2018-10-05T04:37:30.203" v="3"/>
-          <ac:cxnSpMkLst>
-            <pc:docMk/>
-            <pc:sldMk cId="416517981" sldId="276"/>
-            <ac:cxnSpMk id="75" creationId="{00000000-0000-0000-0000-000000000000}"/>
-          </ac:cxnSpMkLst>
-        </pc:cxnChg>
-      </pc:sldChg>
-      <pc:sldChg chg="add">
-        <pc:chgData name="Xin Zou" userId="260b9726081dae15" providerId="LiveId" clId="{4830D34F-2340-49F5-A7DC-801892A92994}" dt="2018-10-06T01:36:55.647" v="1536"/>
-        <pc:sldMkLst>
-          <pc:docMk/>
-          <pc:sldMk cId="3111464202" sldId="277"/>
-        </pc:sldMkLst>
-      </pc:sldChg>
-      <pc:sldChg chg="modSp">
-        <pc:chgData name="Xin Zou" userId="260b9726081dae15" providerId="LiveId" clId="{4830D34F-2340-49F5-A7DC-801892A92994}" dt="2018-10-08T05:49:36.586" v="1803" actId="27636"/>
-        <pc:sldMkLst>
-          <pc:docMk/>
-          <pc:sldMk cId="3997051158" sldId="278"/>
-        </pc:sldMkLst>
-        <pc:spChg chg="mod">
-          <ac:chgData name="Xin Zou" userId="260b9726081dae15" providerId="LiveId" clId="{4830D34F-2340-49F5-A7DC-801892A92994}" dt="2018-10-08T05:49:36.586" v="1803" actId="27636"/>
-          <ac:spMkLst>
-            <pc:docMk/>
-            <pc:sldMk cId="3997051158" sldId="278"/>
-            <ac:spMk id="2" creationId="{00000000-0000-0000-0000-000000000000}"/>
-          </ac:spMkLst>
-        </pc:spChg>
-        <pc:spChg chg="mod">
-          <ac:chgData name="Xin Zou" userId="260b9726081dae15" providerId="LiveId" clId="{4830D34F-2340-49F5-A7DC-801892A92994}" dt="2018-10-05T04:37:30.203" v="3"/>
-          <ac:spMkLst>
-            <pc:docMk/>
-            <pc:sldMk cId="3997051158" sldId="278"/>
-            <ac:spMk id="40" creationId="{00000000-0000-0000-0000-000000000000}"/>
-          </ac:spMkLst>
-        </pc:spChg>
-        <pc:spChg chg="mod">
-          <ac:chgData name="Xin Zou" userId="260b9726081dae15" providerId="LiveId" clId="{4830D34F-2340-49F5-A7DC-801892A92994}" dt="2018-10-05T04:37:30.203" v="3"/>
-          <ac:spMkLst>
-            <pc:docMk/>
-            <pc:sldMk cId="3997051158" sldId="278"/>
-            <ac:spMk id="45" creationId="{00000000-0000-0000-0000-000000000000}"/>
-          </ac:spMkLst>
-        </pc:spChg>
-        <pc:spChg chg="mod">
-          <ac:chgData name="Xin Zou" userId="260b9726081dae15" providerId="LiveId" clId="{4830D34F-2340-49F5-A7DC-801892A92994}" dt="2018-10-05T04:37:30.203" v="3"/>
-          <ac:spMkLst>
-            <pc:docMk/>
-            <pc:sldMk cId="3997051158" sldId="278"/>
-            <ac:spMk id="46" creationId="{00000000-0000-0000-0000-000000000000}"/>
-          </ac:spMkLst>
-        </pc:spChg>
-        <pc:spChg chg="mod">
-          <ac:chgData name="Xin Zou" userId="260b9726081dae15" providerId="LiveId" clId="{4830D34F-2340-49F5-A7DC-801892A92994}" dt="2018-10-05T04:37:30.203" v="3"/>
-          <ac:spMkLst>
-            <pc:docMk/>
-            <pc:sldMk cId="3997051158" sldId="278"/>
-            <ac:spMk id="47" creationId="{00000000-0000-0000-0000-000000000000}"/>
-          </ac:spMkLst>
-        </pc:spChg>
-        <pc:spChg chg="mod">
-          <ac:chgData name="Xin Zou" userId="260b9726081dae15" providerId="LiveId" clId="{4830D34F-2340-49F5-A7DC-801892A92994}" dt="2018-10-05T04:37:30.203" v="3"/>
-          <ac:spMkLst>
-            <pc:docMk/>
-            <pc:sldMk cId="3997051158" sldId="278"/>
-            <ac:spMk id="48" creationId="{00000000-0000-0000-0000-000000000000}"/>
-          </ac:spMkLst>
-        </pc:spChg>
-        <pc:spChg chg="mod">
-          <ac:chgData name="Xin Zou" userId="260b9726081dae15" providerId="LiveId" clId="{4830D34F-2340-49F5-A7DC-801892A92994}" dt="2018-10-05T04:37:30.203" v="3"/>
-          <ac:spMkLst>
-            <pc:docMk/>
-            <pc:sldMk cId="3997051158" sldId="278"/>
-            <ac:spMk id="49" creationId="{00000000-0000-0000-0000-000000000000}"/>
-          </ac:spMkLst>
-        </pc:spChg>
-        <pc:spChg chg="mod">
-          <ac:chgData name="Xin Zou" userId="260b9726081dae15" providerId="LiveId" clId="{4830D34F-2340-49F5-A7DC-801892A92994}" dt="2018-10-05T04:37:30.203" v="3"/>
-          <ac:spMkLst>
-            <pc:docMk/>
-            <pc:sldMk cId="3997051158" sldId="278"/>
-            <ac:spMk id="54" creationId="{00000000-0000-0000-0000-000000000000}"/>
-          </ac:spMkLst>
-        </pc:spChg>
-        <pc:spChg chg="mod">
-          <ac:chgData name="Xin Zou" userId="260b9726081dae15" providerId="LiveId" clId="{4830D34F-2340-49F5-A7DC-801892A92994}" dt="2018-10-05T04:37:30.203" v="3"/>
-          <ac:spMkLst>
-            <pc:docMk/>
-            <pc:sldMk cId="3997051158" sldId="278"/>
-            <ac:spMk id="55" creationId="{00000000-0000-0000-0000-000000000000}"/>
-          </ac:spMkLst>
-        </pc:spChg>
-        <pc:spChg chg="mod">
-          <ac:chgData name="Xin Zou" userId="260b9726081dae15" providerId="LiveId" clId="{4830D34F-2340-49F5-A7DC-801892A92994}" dt="2018-10-05T04:37:30.203" v="3"/>
-          <ac:spMkLst>
-            <pc:docMk/>
-            <pc:sldMk cId="3997051158" sldId="278"/>
-            <ac:spMk id="56" creationId="{00000000-0000-0000-0000-000000000000}"/>
-          </ac:spMkLst>
-        </pc:spChg>
-        <pc:spChg chg="mod">
-          <ac:chgData name="Xin Zou" userId="260b9726081dae15" providerId="LiveId" clId="{4830D34F-2340-49F5-A7DC-801892A92994}" dt="2018-10-05T04:37:30.203" v="3"/>
-          <ac:spMkLst>
-            <pc:docMk/>
-            <pc:sldMk cId="3997051158" sldId="278"/>
-            <ac:spMk id="57" creationId="{00000000-0000-0000-0000-000000000000}"/>
-          </ac:spMkLst>
-        </pc:spChg>
-        <pc:spChg chg="mod">
-          <ac:chgData name="Xin Zou" userId="260b9726081dae15" providerId="LiveId" clId="{4830D34F-2340-49F5-A7DC-801892A92994}" dt="2018-10-05T04:37:30.203" v="3"/>
-          <ac:spMkLst>
-            <pc:docMk/>
-            <pc:sldMk cId="3997051158" sldId="278"/>
-            <ac:spMk id="58" creationId="{00000000-0000-0000-0000-000000000000}"/>
-          </ac:spMkLst>
-        </pc:spChg>
-        <pc:spChg chg="mod">
-          <ac:chgData name="Xin Zou" userId="260b9726081dae15" providerId="LiveId" clId="{4830D34F-2340-49F5-A7DC-801892A92994}" dt="2018-10-05T04:37:30.203" v="3"/>
-          <ac:spMkLst>
-            <pc:docMk/>
-            <pc:sldMk cId="3997051158" sldId="278"/>
-            <ac:spMk id="59" creationId="{00000000-0000-0000-0000-000000000000}"/>
-          </ac:spMkLst>
-        </pc:spChg>
-        <pc:spChg chg="mod">
-          <ac:chgData name="Xin Zou" userId="260b9726081dae15" providerId="LiveId" clId="{4830D34F-2340-49F5-A7DC-801892A92994}" dt="2018-10-05T04:37:30.203" v="3"/>
-          <ac:spMkLst>
-            <pc:docMk/>
-            <pc:sldMk cId="3997051158" sldId="278"/>
-            <ac:spMk id="60" creationId="{00000000-0000-0000-0000-000000000000}"/>
-          </ac:spMkLst>
-        </pc:spChg>
-        <pc:spChg chg="mod">
-          <ac:chgData name="Xin Zou" userId="260b9726081dae15" providerId="LiveId" clId="{4830D34F-2340-49F5-A7DC-801892A92994}" dt="2018-10-05T04:37:30.203" v="3"/>
-          <ac:spMkLst>
-            <pc:docMk/>
-            <pc:sldMk cId="3997051158" sldId="278"/>
-            <ac:spMk id="61" creationId="{00000000-0000-0000-0000-000000000000}"/>
-          </ac:spMkLst>
-        </pc:spChg>
-        <pc:spChg chg="mod">
-          <ac:chgData name="Xin Zou" userId="260b9726081dae15" providerId="LiveId" clId="{4830D34F-2340-49F5-A7DC-801892A92994}" dt="2018-10-05T04:37:30.203" v="3"/>
-          <ac:spMkLst>
-            <pc:docMk/>
-            <pc:sldMk cId="3997051158" sldId="278"/>
-            <ac:spMk id="62" creationId="{00000000-0000-0000-0000-000000000000}"/>
-          </ac:spMkLst>
-        </pc:spChg>
-        <pc:spChg chg="mod">
-          <ac:chgData name="Xin Zou" userId="260b9726081dae15" providerId="LiveId" clId="{4830D34F-2340-49F5-A7DC-801892A92994}" dt="2018-10-05T04:37:30.203" v="3"/>
-          <ac:spMkLst>
-            <pc:docMk/>
-            <pc:sldMk cId="3997051158" sldId="278"/>
-            <ac:spMk id="63" creationId="{00000000-0000-0000-0000-000000000000}"/>
-          </ac:spMkLst>
-        </pc:spChg>
-        <pc:spChg chg="mod">
-          <ac:chgData name="Xin Zou" userId="260b9726081dae15" providerId="LiveId" clId="{4830D34F-2340-49F5-A7DC-801892A92994}" dt="2018-10-05T04:37:30.203" v="3"/>
-          <ac:spMkLst>
-            <pc:docMk/>
-            <pc:sldMk cId="3997051158" sldId="278"/>
-            <ac:spMk id="64" creationId="{00000000-0000-0000-0000-000000000000}"/>
-          </ac:spMkLst>
-        </pc:spChg>
-        <pc:spChg chg="mod">
-          <ac:chgData name="Xin Zou" userId="260b9726081dae15" providerId="LiveId" clId="{4830D34F-2340-49F5-A7DC-801892A92994}" dt="2018-10-05T04:37:30.203" v="3"/>
-          <ac:spMkLst>
-            <pc:docMk/>
-            <pc:sldMk cId="3997051158" sldId="278"/>
-            <ac:spMk id="76" creationId="{00000000-0000-0000-0000-000000000000}"/>
-          </ac:spMkLst>
-        </pc:spChg>
-        <pc:cxnChg chg="mod">
-          <ac:chgData name="Xin Zou" userId="260b9726081dae15" providerId="LiveId" clId="{4830D34F-2340-49F5-A7DC-801892A92994}" dt="2018-10-05T04:37:30.203" v="3"/>
-          <ac:cxnSpMkLst>
-            <pc:docMk/>
-            <pc:sldMk cId="3997051158" sldId="278"/>
-            <ac:cxnSpMk id="41" creationId="{00000000-0000-0000-0000-000000000000}"/>
-          </ac:cxnSpMkLst>
-        </pc:cxnChg>
-        <pc:cxnChg chg="mod">
-          <ac:chgData name="Xin Zou" userId="260b9726081dae15" providerId="LiveId" clId="{4830D34F-2340-49F5-A7DC-801892A92994}" dt="2018-10-05T04:37:30.203" v="3"/>
-          <ac:cxnSpMkLst>
-            <pc:docMk/>
-            <pc:sldMk cId="3997051158" sldId="278"/>
-            <ac:cxnSpMk id="42" creationId="{00000000-0000-0000-0000-000000000000}"/>
-          </ac:cxnSpMkLst>
-        </pc:cxnChg>
-        <pc:cxnChg chg="mod">
-          <ac:chgData name="Xin Zou" userId="260b9726081dae15" providerId="LiveId" clId="{4830D34F-2340-49F5-A7DC-801892A92994}" dt="2018-10-05T04:37:30.203" v="3"/>
-          <ac:cxnSpMkLst>
-            <pc:docMk/>
-            <pc:sldMk cId="3997051158" sldId="278"/>
-            <ac:cxnSpMk id="43" creationId="{00000000-0000-0000-0000-000000000000}"/>
-          </ac:cxnSpMkLst>
-        </pc:cxnChg>
-        <pc:cxnChg chg="mod">
-          <ac:chgData name="Xin Zou" userId="260b9726081dae15" providerId="LiveId" clId="{4830D34F-2340-49F5-A7DC-801892A92994}" dt="2018-10-05T04:37:30.203" v="3"/>
-          <ac:cxnSpMkLst>
-            <pc:docMk/>
-            <pc:sldMk cId="3997051158" sldId="278"/>
-            <ac:cxnSpMk id="44" creationId="{00000000-0000-0000-0000-000000000000}"/>
-          </ac:cxnSpMkLst>
-        </pc:cxnChg>
-        <pc:cxnChg chg="mod">
-          <ac:chgData name="Xin Zou" userId="260b9726081dae15" providerId="LiveId" clId="{4830D34F-2340-49F5-A7DC-801892A92994}" dt="2018-10-05T04:37:30.203" v="3"/>
-          <ac:cxnSpMkLst>
-            <pc:docMk/>
-            <pc:sldMk cId="3997051158" sldId="278"/>
-            <ac:cxnSpMk id="50" creationId="{00000000-0000-0000-0000-000000000000}"/>
-          </ac:cxnSpMkLst>
-        </pc:cxnChg>
-        <pc:cxnChg chg="mod">
-          <ac:chgData name="Xin Zou" userId="260b9726081dae15" providerId="LiveId" clId="{4830D34F-2340-49F5-A7DC-801892A92994}" dt="2018-10-05T04:37:30.203" v="3"/>
-          <ac:cxnSpMkLst>
-            <pc:docMk/>
-            <pc:sldMk cId="3997051158" sldId="278"/>
-            <ac:cxnSpMk id="51" creationId="{00000000-0000-0000-0000-000000000000}"/>
-          </ac:cxnSpMkLst>
-        </pc:cxnChg>
-        <pc:cxnChg chg="mod">
-          <ac:chgData name="Xin Zou" userId="260b9726081dae15" providerId="LiveId" clId="{4830D34F-2340-49F5-A7DC-801892A92994}" dt="2018-10-05T04:37:30.203" v="3"/>
-          <ac:cxnSpMkLst>
-            <pc:docMk/>
-            <pc:sldMk cId="3997051158" sldId="278"/>
-            <ac:cxnSpMk id="52" creationId="{00000000-0000-0000-0000-000000000000}"/>
-          </ac:cxnSpMkLst>
-        </pc:cxnChg>
-        <pc:cxnChg chg="mod">
-          <ac:chgData name="Xin Zou" userId="260b9726081dae15" providerId="LiveId" clId="{4830D34F-2340-49F5-A7DC-801892A92994}" dt="2018-10-05T04:37:30.203" v="3"/>
-          <ac:cxnSpMkLst>
-            <pc:docMk/>
-            <pc:sldMk cId="3997051158" sldId="278"/>
-            <ac:cxnSpMk id="53" creationId="{00000000-0000-0000-0000-000000000000}"/>
-          </ac:cxnSpMkLst>
-        </pc:cxnChg>
-        <pc:cxnChg chg="mod">
-          <ac:chgData name="Xin Zou" userId="260b9726081dae15" providerId="LiveId" clId="{4830D34F-2340-49F5-A7DC-801892A92994}" dt="2018-10-05T04:37:30.203" v="3"/>
-          <ac:cxnSpMkLst>
-            <pc:docMk/>
-            <pc:sldMk cId="3997051158" sldId="278"/>
-            <ac:cxnSpMk id="65" creationId="{00000000-0000-0000-0000-000000000000}"/>
-          </ac:cxnSpMkLst>
-        </pc:cxnChg>
-        <pc:cxnChg chg="mod">
-          <ac:chgData name="Xin Zou" userId="260b9726081dae15" providerId="LiveId" clId="{4830D34F-2340-49F5-A7DC-801892A92994}" dt="2018-10-05T04:37:30.203" v="3"/>
-          <ac:cxnSpMkLst>
-            <pc:docMk/>
-            <pc:sldMk cId="3997051158" sldId="278"/>
-            <ac:cxnSpMk id="66" creationId="{00000000-0000-0000-0000-000000000000}"/>
-          </ac:cxnSpMkLst>
-        </pc:cxnChg>
-        <pc:cxnChg chg="mod">
-          <ac:chgData name="Xin Zou" userId="260b9726081dae15" providerId="LiveId" clId="{4830D34F-2340-49F5-A7DC-801892A92994}" dt="2018-10-05T04:37:30.203" v="3"/>
-          <ac:cxnSpMkLst>
-            <pc:docMk/>
-            <pc:sldMk cId="3997051158" sldId="278"/>
-            <ac:cxnSpMk id="67" creationId="{00000000-0000-0000-0000-000000000000}"/>
-          </ac:cxnSpMkLst>
-        </pc:cxnChg>
-        <pc:cxnChg chg="mod">
-          <ac:chgData name="Xin Zou" userId="260b9726081dae15" providerId="LiveId" clId="{4830D34F-2340-49F5-A7DC-801892A92994}" dt="2018-10-05T04:37:30.203" v="3"/>
-          <ac:cxnSpMkLst>
-            <pc:docMk/>
-            <pc:sldMk cId="3997051158" sldId="278"/>
-            <ac:cxnSpMk id="68" creationId="{00000000-0000-0000-0000-000000000000}"/>
-          </ac:cxnSpMkLst>
-        </pc:cxnChg>
-        <pc:cxnChg chg="mod">
-          <ac:chgData name="Xin Zou" userId="260b9726081dae15" providerId="LiveId" clId="{4830D34F-2340-49F5-A7DC-801892A92994}" dt="2018-10-05T04:37:30.203" v="3"/>
-          <ac:cxnSpMkLst>
-            <pc:docMk/>
-            <pc:sldMk cId="3997051158" sldId="278"/>
-            <ac:cxnSpMk id="69" creationId="{00000000-0000-0000-0000-000000000000}"/>
-          </ac:cxnSpMkLst>
-        </pc:cxnChg>
-        <pc:cxnChg chg="mod">
-          <ac:chgData name="Xin Zou" userId="260b9726081dae15" providerId="LiveId" clId="{4830D34F-2340-49F5-A7DC-801892A92994}" dt="2018-10-05T04:37:30.203" v="3"/>
-          <ac:cxnSpMkLst>
-            <pc:docMk/>
-            <pc:sldMk cId="3997051158" sldId="278"/>
-            <ac:cxnSpMk id="70" creationId="{00000000-0000-0000-0000-000000000000}"/>
-          </ac:cxnSpMkLst>
-        </pc:cxnChg>
-        <pc:cxnChg chg="mod">
-          <ac:chgData name="Xin Zou" userId="260b9726081dae15" providerId="LiveId" clId="{4830D34F-2340-49F5-A7DC-801892A92994}" dt="2018-10-05T04:37:30.203" v="3"/>
-          <ac:cxnSpMkLst>
-            <pc:docMk/>
-            <pc:sldMk cId="3997051158" sldId="278"/>
-            <ac:cxnSpMk id="71" creationId="{00000000-0000-0000-0000-000000000000}"/>
-          </ac:cxnSpMkLst>
-        </pc:cxnChg>
-        <pc:cxnChg chg="mod">
-          <ac:chgData name="Xin Zou" userId="260b9726081dae15" providerId="LiveId" clId="{4830D34F-2340-49F5-A7DC-801892A92994}" dt="2018-10-05T04:37:30.203" v="3"/>
-          <ac:cxnSpMkLst>
-            <pc:docMk/>
-            <pc:sldMk cId="3997051158" sldId="278"/>
-            <ac:cxnSpMk id="72" creationId="{00000000-0000-0000-0000-000000000000}"/>
-          </ac:cxnSpMkLst>
-        </pc:cxnChg>
-        <pc:cxnChg chg="mod">
-          <ac:chgData name="Xin Zou" userId="260b9726081dae15" providerId="LiveId" clId="{4830D34F-2340-49F5-A7DC-801892A92994}" dt="2018-10-05T04:37:30.203" v="3"/>
-          <ac:cxnSpMkLst>
-            <pc:docMk/>
-            <pc:sldMk cId="3997051158" sldId="278"/>
-            <ac:cxnSpMk id="73" creationId="{00000000-0000-0000-0000-000000000000}"/>
-          </ac:cxnSpMkLst>
-        </pc:cxnChg>
-        <pc:cxnChg chg="mod">
-          <ac:chgData name="Xin Zou" userId="260b9726081dae15" providerId="LiveId" clId="{4830D34F-2340-49F5-A7DC-801892A92994}" dt="2018-10-05T04:37:30.203" v="3"/>
-          <ac:cxnSpMkLst>
-            <pc:docMk/>
-            <pc:sldMk cId="3997051158" sldId="278"/>
-            <ac:cxnSpMk id="74" creationId="{00000000-0000-0000-0000-000000000000}"/>
-          </ac:cxnSpMkLst>
-        </pc:cxnChg>
-        <pc:cxnChg chg="mod">
-          <ac:chgData name="Xin Zou" userId="260b9726081dae15" providerId="LiveId" clId="{4830D34F-2340-49F5-A7DC-801892A92994}" dt="2018-10-05T04:37:30.203" v="3"/>
-          <ac:cxnSpMkLst>
-            <pc:docMk/>
-            <pc:sldMk cId="3997051158" sldId="278"/>
-            <ac:cxnSpMk id="75" creationId="{00000000-0000-0000-0000-000000000000}"/>
-          </ac:cxnSpMkLst>
-        </pc:cxnChg>
-        <pc:cxnChg chg="mod">
-          <ac:chgData name="Xin Zou" userId="260b9726081dae15" providerId="LiveId" clId="{4830D34F-2340-49F5-A7DC-801892A92994}" dt="2018-10-05T04:37:30.203" v="3"/>
-          <ac:cxnSpMkLst>
-            <pc:docMk/>
-            <pc:sldMk cId="3997051158" sldId="278"/>
-            <ac:cxnSpMk id="77" creationId="{00000000-0000-0000-0000-000000000000}"/>
-          </ac:cxnSpMkLst>
-        </pc:cxnChg>
-        <pc:cxnChg chg="mod">
-          <ac:chgData name="Xin Zou" userId="260b9726081dae15" providerId="LiveId" clId="{4830D34F-2340-49F5-A7DC-801892A92994}" dt="2018-10-05T04:37:30.203" v="3"/>
-          <ac:cxnSpMkLst>
-            <pc:docMk/>
-            <pc:sldMk cId="3997051158" sldId="278"/>
-            <ac:cxnSpMk id="78" creationId="{00000000-0000-0000-0000-000000000000}"/>
-          </ac:cxnSpMkLst>
-        </pc:cxnChg>
-      </pc:sldChg>
-      <pc:sldChg chg="modSp">
-        <pc:chgData name="Xin Zou" userId="260b9726081dae15" providerId="LiveId" clId="{4830D34F-2340-49F5-A7DC-801892A92994}" dt="2018-10-05T04:37:30.203" v="3"/>
-        <pc:sldMkLst>
-          <pc:docMk/>
-          <pc:sldMk cId="2935768527" sldId="279"/>
-        </pc:sldMkLst>
-        <pc:spChg chg="mod">
-          <ac:chgData name="Xin Zou" userId="260b9726081dae15" providerId="LiveId" clId="{4830D34F-2340-49F5-A7DC-801892A92994}" dt="2018-10-05T04:37:30.203" v="3"/>
-          <ac:spMkLst>
-            <pc:docMk/>
-            <pc:sldMk cId="2935768527" sldId="279"/>
-            <ac:spMk id="5" creationId="{00000000-0000-0000-0000-000000000000}"/>
-          </ac:spMkLst>
-        </pc:spChg>
-        <pc:graphicFrameChg chg="mod">
-          <ac:chgData name="Xin Zou" userId="260b9726081dae15" providerId="LiveId" clId="{4830D34F-2340-49F5-A7DC-801892A92994}" dt="2018-10-05T04:37:30.203" v="3"/>
-          <ac:graphicFrameMkLst>
-            <pc:docMk/>
-            <pc:sldMk cId="2935768527" sldId="279"/>
-            <ac:graphicFrameMk id="4" creationId="{00000000-0000-0000-0000-000000000000}"/>
-          </ac:graphicFrameMkLst>
-        </pc:graphicFrameChg>
-      </pc:sldChg>
-      <pc:sldChg chg="modSp">
-        <pc:chgData name="Xin Zou" userId="260b9726081dae15" providerId="LiveId" clId="{4830D34F-2340-49F5-A7DC-801892A92994}" dt="2018-10-05T04:37:30.203" v="3"/>
-        <pc:sldMkLst>
-          <pc:docMk/>
-          <pc:sldMk cId="2184172224" sldId="280"/>
-        </pc:sldMkLst>
-        <pc:spChg chg="mod">
-          <ac:chgData name="Xin Zou" userId="260b9726081dae15" providerId="LiveId" clId="{4830D34F-2340-49F5-A7DC-801892A92994}" dt="2018-10-05T04:37:30.203" v="3"/>
-          <ac:spMkLst>
-            <pc:docMk/>
-            <pc:sldMk cId="2184172224" sldId="280"/>
-            <ac:spMk id="2" creationId="{00000000-0000-0000-0000-000000000000}"/>
-          </ac:spMkLst>
-        </pc:spChg>
-        <pc:spChg chg="mod">
-          <ac:chgData name="Xin Zou" userId="260b9726081dae15" providerId="LiveId" clId="{4830D34F-2340-49F5-A7DC-801892A92994}" dt="2018-10-05T04:37:30.203" v="3"/>
-          <ac:spMkLst>
-            <pc:docMk/>
-            <pc:sldMk cId="2184172224" sldId="280"/>
-            <ac:spMk id="7" creationId="{00000000-0000-0000-0000-000000000000}"/>
-          </ac:spMkLst>
-        </pc:spChg>
-        <pc:graphicFrameChg chg="mod">
-          <ac:chgData name="Xin Zou" userId="260b9726081dae15" providerId="LiveId" clId="{4830D34F-2340-49F5-A7DC-801892A92994}" dt="2018-10-05T04:37:30.203" v="3"/>
-          <ac:graphicFrameMkLst>
-            <pc:docMk/>
-            <pc:sldMk cId="2184172224" sldId="280"/>
-            <ac:graphicFrameMk id="6" creationId="{00000000-0000-0000-0000-000000000000}"/>
-          </ac:graphicFrameMkLst>
-        </pc:graphicFrameChg>
-      </pc:sldChg>
-      <pc:sldChg chg="modSp">
-        <pc:chgData name="Xin Zou" userId="260b9726081dae15" providerId="LiveId" clId="{4830D34F-2340-49F5-A7DC-801892A92994}" dt="2018-10-05T04:37:30.604" v="4" actId="27636"/>
-        <pc:sldMkLst>
-          <pc:docMk/>
-          <pc:sldMk cId="4203371887" sldId="281"/>
-        </pc:sldMkLst>
-        <pc:spChg chg="mod">
-          <ac:chgData name="Xin Zou" userId="260b9726081dae15" providerId="LiveId" clId="{4830D34F-2340-49F5-A7DC-801892A92994}" dt="2018-10-05T04:37:30.604" v="4" actId="27636"/>
-          <ac:spMkLst>
-            <pc:docMk/>
-            <pc:sldMk cId="4203371887" sldId="281"/>
-            <ac:spMk id="3" creationId="{00000000-0000-0000-0000-000000000000}"/>
-          </ac:spMkLst>
-        </pc:spChg>
-      </pc:sldChg>
-      <pc:sldChg chg="modSp">
-        <pc:chgData name="Xin Zou" userId="260b9726081dae15" providerId="LiveId" clId="{4830D34F-2340-49F5-A7DC-801892A92994}" dt="2018-10-05T04:37:30.645" v="5" actId="27636"/>
-        <pc:sldMkLst>
-          <pc:docMk/>
-          <pc:sldMk cId="3543497223" sldId="282"/>
-        </pc:sldMkLst>
-        <pc:spChg chg="mod">
-          <ac:chgData name="Xin Zou" userId="260b9726081dae15" providerId="LiveId" clId="{4830D34F-2340-49F5-A7DC-801892A92994}" dt="2018-10-05T04:37:30.645" v="5" actId="27636"/>
-          <ac:spMkLst>
-            <pc:docMk/>
-            <pc:sldMk cId="3543497223" sldId="282"/>
-            <ac:spMk id="3" creationId="{00000000-0000-0000-0000-000000000000}"/>
-          </ac:spMkLst>
-        </pc:spChg>
-      </pc:sldChg>
-      <pc:sldChg chg="modSp">
-        <pc:chgData name="Xin Zou" userId="260b9726081dae15" providerId="LiveId" clId="{4830D34F-2340-49F5-A7DC-801892A92994}" dt="2018-10-05T04:37:30.663" v="6" actId="27636"/>
-        <pc:sldMkLst>
-          <pc:docMk/>
-          <pc:sldMk cId="1833257090" sldId="283"/>
-        </pc:sldMkLst>
-        <pc:spChg chg="mod">
-          <ac:chgData name="Xin Zou" userId="260b9726081dae15" providerId="LiveId" clId="{4830D34F-2340-49F5-A7DC-801892A92994}" dt="2018-10-05T04:37:30.663" v="6" actId="27636"/>
-          <ac:spMkLst>
-            <pc:docMk/>
-            <pc:sldMk cId="1833257090" sldId="283"/>
-            <ac:spMk id="3" creationId="{00000000-0000-0000-0000-000000000000}"/>
-          </ac:spMkLst>
-        </pc:spChg>
-      </pc:sldChg>
-      <pc:sldChg chg="modSp">
-        <pc:chgData name="Xin Zou" userId="260b9726081dae15" providerId="LiveId" clId="{4830D34F-2340-49F5-A7DC-801892A92994}" dt="2018-10-05T04:37:30.688" v="7" actId="27636"/>
-        <pc:sldMkLst>
-          <pc:docMk/>
-          <pc:sldMk cId="1395999162" sldId="284"/>
-        </pc:sldMkLst>
-        <pc:spChg chg="mod">
-          <ac:chgData name="Xin Zou" userId="260b9726081dae15" providerId="LiveId" clId="{4830D34F-2340-49F5-A7DC-801892A92994}" dt="2018-10-05T04:37:30.688" v="7" actId="27636"/>
-          <ac:spMkLst>
-            <pc:docMk/>
-            <pc:sldMk cId="1395999162" sldId="284"/>
-            <ac:spMk id="3" creationId="{00000000-0000-0000-0000-000000000000}"/>
-          </ac:spMkLst>
-        </pc:spChg>
-      </pc:sldChg>
-      <pc:sldChg chg="modSp add modNotesTx">
-        <pc:chgData name="Xin Zou" userId="260b9726081dae15" providerId="LiveId" clId="{4830D34F-2340-49F5-A7DC-801892A92994}" dt="2018-10-08T05:49:36.830" v="1809" actId="27636"/>
-        <pc:sldMkLst>
-          <pc:docMk/>
-          <pc:sldMk cId="2000092642" sldId="290"/>
-        </pc:sldMkLst>
-        <pc:spChg chg="mod">
-          <ac:chgData name="Xin Zou" userId="260b9726081dae15" providerId="LiveId" clId="{4830D34F-2340-49F5-A7DC-801892A92994}" dt="2018-10-05T05:36:33.778" v="219" actId="20577"/>
-          <ac:spMkLst>
-            <pc:docMk/>
-            <pc:sldMk cId="2000092642" sldId="290"/>
-            <ac:spMk id="2" creationId="{00000000-0000-0000-0000-000000000000}"/>
-          </ac:spMkLst>
-        </pc:spChg>
-        <pc:spChg chg="mod">
-          <ac:chgData name="Xin Zou" userId="260b9726081dae15" providerId="LiveId" clId="{4830D34F-2340-49F5-A7DC-801892A92994}" dt="2018-10-08T05:49:36.830" v="1809" actId="27636"/>
-          <ac:spMkLst>
-            <pc:docMk/>
-            <pc:sldMk cId="2000092642" sldId="290"/>
-            <ac:spMk id="3" creationId="{00000000-0000-0000-0000-000000000000}"/>
-          </ac:spMkLst>
-        </pc:spChg>
-      </pc:sldChg>
-      <pc:sldChg chg="modSp">
-        <pc:chgData name="Xin Zou" userId="260b9726081dae15" providerId="LiveId" clId="{4830D34F-2340-49F5-A7DC-801892A92994}" dt="2018-10-05T04:37:30.203" v="3"/>
-        <pc:sldMkLst>
-          <pc:docMk/>
-          <pc:sldMk cId="2611250627" sldId="291"/>
-        </pc:sldMkLst>
-        <pc:picChg chg="mod">
-          <ac:chgData name="Xin Zou" userId="260b9726081dae15" providerId="LiveId" clId="{4830D34F-2340-49F5-A7DC-801892A92994}" dt="2018-10-05T04:37:30.203" v="3"/>
-          <ac:picMkLst>
-            <pc:docMk/>
-            <pc:sldMk cId="2611250627" sldId="291"/>
-            <ac:picMk id="6" creationId="{00000000-0000-0000-0000-000000000000}"/>
-          </ac:picMkLst>
-        </pc:picChg>
-      </pc:sldChg>
-      <pc:sldChg chg="modSp">
-        <pc:chgData name="Xin Zou" userId="260b9726081dae15" providerId="LiveId" clId="{4830D34F-2340-49F5-A7DC-801892A92994}" dt="2018-10-08T05:49:36.673" v="1804" actId="27636"/>
-        <pc:sldMkLst>
-          <pc:docMk/>
-          <pc:sldMk cId="591291967" sldId="295"/>
-        </pc:sldMkLst>
-        <pc:spChg chg="mod">
-          <ac:chgData name="Xin Zou" userId="260b9726081dae15" providerId="LiveId" clId="{4830D34F-2340-49F5-A7DC-801892A92994}" dt="2018-10-08T05:49:36.673" v="1804" actId="27636"/>
-          <ac:spMkLst>
-            <pc:docMk/>
-            <pc:sldMk cId="591291967" sldId="295"/>
-            <ac:spMk id="3" creationId="{00000000-0000-0000-0000-000000000000}"/>
-          </ac:spMkLst>
-        </pc:spChg>
-      </pc:sldChg>
-      <pc:sldChg chg="modSp">
-        <pc:chgData name="Xin Zou" userId="260b9726081dae15" providerId="LiveId" clId="{4830D34F-2340-49F5-A7DC-801892A92994}" dt="2018-10-05T04:37:30.203" v="3"/>
-        <pc:sldMkLst>
-          <pc:docMk/>
-          <pc:sldMk cId="208916815" sldId="296"/>
-        </pc:sldMkLst>
-        <pc:picChg chg="mod">
-          <ac:chgData name="Xin Zou" userId="260b9726081dae15" providerId="LiveId" clId="{4830D34F-2340-49F5-A7DC-801892A92994}" dt="2018-10-05T04:37:30.203" v="3"/>
-          <ac:picMkLst>
-            <pc:docMk/>
-            <pc:sldMk cId="208916815" sldId="296"/>
-            <ac:picMk id="4" creationId="{00000000-0000-0000-0000-000000000000}"/>
-          </ac:picMkLst>
-        </pc:picChg>
-        <pc:picChg chg="mod">
-          <ac:chgData name="Xin Zou" userId="260b9726081dae15" providerId="LiveId" clId="{4830D34F-2340-49F5-A7DC-801892A92994}" dt="2018-10-05T04:37:30.203" v="3"/>
-          <ac:picMkLst>
-            <pc:docMk/>
-            <pc:sldMk cId="208916815" sldId="296"/>
-            <ac:picMk id="5" creationId="{00000000-0000-0000-0000-000000000000}"/>
-          </ac:picMkLst>
-        </pc:picChg>
-      </pc:sldChg>
-      <pc:sldChg chg="modSp">
-        <pc:chgData name="Xin Zou" userId="260b9726081dae15" providerId="LiveId" clId="{4830D34F-2340-49F5-A7DC-801892A92994}" dt="2018-10-05T04:37:30.828" v="11" actId="27636"/>
-        <pc:sldMkLst>
-          <pc:docMk/>
-          <pc:sldMk cId="3968743428" sldId="299"/>
-        </pc:sldMkLst>
-        <pc:spChg chg="mod">
-          <ac:chgData name="Xin Zou" userId="260b9726081dae15" providerId="LiveId" clId="{4830D34F-2340-49F5-A7DC-801892A92994}" dt="2018-10-05T04:37:30.828" v="11" actId="27636"/>
-          <ac:spMkLst>
-            <pc:docMk/>
-            <pc:sldMk cId="3968743428" sldId="299"/>
-            <ac:spMk id="3" creationId="{00000000-0000-0000-0000-000000000000}"/>
-          </ac:spMkLst>
-        </pc:spChg>
-      </pc:sldChg>
-      <pc:sldChg chg="modSp">
-        <pc:chgData name="Xin Zou" userId="260b9726081dae15" providerId="LiveId" clId="{4830D34F-2340-49F5-A7DC-801892A92994}" dt="2018-10-08T05:49:36.748" v="1807" actId="27636"/>
-        <pc:sldMkLst>
-          <pc:docMk/>
-          <pc:sldMk cId="2263928036" sldId="300"/>
-        </pc:sldMkLst>
-        <pc:spChg chg="mod">
-          <ac:chgData name="Xin Zou" userId="260b9726081dae15" providerId="LiveId" clId="{4830D34F-2340-49F5-A7DC-801892A92994}" dt="2018-10-08T05:49:36.748" v="1807" actId="27636"/>
-          <ac:spMkLst>
-            <pc:docMk/>
-            <pc:sldMk cId="2263928036" sldId="300"/>
-            <ac:spMk id="3" creationId="{00000000-0000-0000-0000-000000000000}"/>
-          </ac:spMkLst>
-        </pc:spChg>
-      </pc:sldChg>
-      <pc:sldChg chg="modSp">
-        <pc:chgData name="Xin Zou" userId="260b9726081dae15" providerId="LiveId" clId="{4830D34F-2340-49F5-A7DC-801892A92994}" dt="2018-10-06T00:46:59.990" v="1380" actId="20577"/>
-        <pc:sldMkLst>
-          <pc:docMk/>
-          <pc:sldMk cId="1978484899" sldId="301"/>
-        </pc:sldMkLst>
-        <pc:spChg chg="mod">
-          <ac:chgData name="Xin Zou" userId="260b9726081dae15" providerId="LiveId" clId="{4830D34F-2340-49F5-A7DC-801892A92994}" dt="2018-10-06T00:46:59.990" v="1380" actId="20577"/>
-          <ac:spMkLst>
-            <pc:docMk/>
-            <pc:sldMk cId="1978484899" sldId="301"/>
-            <ac:spMk id="3" creationId="{00000000-0000-0000-0000-000000000000}"/>
-          </ac:spMkLst>
-        </pc:spChg>
-      </pc:sldChg>
-      <pc:sldChg chg="addSp delSp modSp">
-        <pc:chgData name="Xin Zou" userId="260b9726081dae15" providerId="LiveId" clId="{4830D34F-2340-49F5-A7DC-801892A92994}" dt="2018-10-08T05:49:24.759" v="1798"/>
-        <pc:sldMkLst>
-          <pc:docMk/>
-          <pc:sldMk cId="2073316975" sldId="303"/>
-        </pc:sldMkLst>
-        <pc:spChg chg="mod">
-          <ac:chgData name="Xin Zou" userId="260b9726081dae15" providerId="LiveId" clId="{4830D34F-2340-49F5-A7DC-801892A92994}" dt="2018-10-06T01:46:26.505" v="1795" actId="15"/>
-          <ac:spMkLst>
-            <pc:docMk/>
-            <pc:sldMk cId="2073316975" sldId="303"/>
-            <ac:spMk id="3" creationId="{00000000-0000-0000-0000-000000000000}"/>
-          </ac:spMkLst>
-        </pc:spChg>
-        <pc:spChg chg="add del">
-          <ac:chgData name="Xin Zou" userId="260b9726081dae15" providerId="LiveId" clId="{4830D34F-2340-49F5-A7DC-801892A92994}" dt="2018-10-08T05:49:24.759" v="1798"/>
-          <ac:spMkLst>
-            <pc:docMk/>
-            <pc:sldMk cId="2073316975" sldId="303"/>
-            <ac:spMk id="4" creationId="{6BF3385A-6B4E-46A0-A17E-B76AC4A15B4D}"/>
-          </ac:spMkLst>
-        </pc:spChg>
-      </pc:sldChg>
-      <pc:sldChg chg="modSp">
-        <pc:chgData name="Xin Zou" userId="260b9726081dae15" providerId="LiveId" clId="{4830D34F-2340-49F5-A7DC-801892A92994}" dt="2018-10-08T05:49:36.702" v="1805" actId="27636"/>
-        <pc:sldMkLst>
-          <pc:docMk/>
-          <pc:sldMk cId="1803774022" sldId="304"/>
-        </pc:sldMkLst>
-        <pc:spChg chg="mod">
-          <ac:chgData name="Xin Zou" userId="260b9726081dae15" providerId="LiveId" clId="{4830D34F-2340-49F5-A7DC-801892A92994}" dt="2018-10-08T05:49:36.702" v="1805" actId="27636"/>
-          <ac:spMkLst>
-            <pc:docMk/>
-            <pc:sldMk cId="1803774022" sldId="304"/>
-            <ac:spMk id="3" creationId="{00000000-0000-0000-0000-000000000000}"/>
-          </ac:spMkLst>
-        </pc:spChg>
-      </pc:sldChg>
-      <pc:sldChg chg="modSp">
-        <pc:chgData name="Xin Zou" userId="260b9726081dae15" providerId="LiveId" clId="{4830D34F-2340-49F5-A7DC-801892A92994}" dt="2018-10-05T04:37:30.203" v="3"/>
-        <pc:sldMkLst>
-          <pc:docMk/>
-          <pc:sldMk cId="1472001750" sldId="305"/>
-        </pc:sldMkLst>
-        <pc:picChg chg="mod">
-          <ac:chgData name="Xin Zou" userId="260b9726081dae15" providerId="LiveId" clId="{4830D34F-2340-49F5-A7DC-801892A92994}" dt="2018-10-05T04:37:30.203" v="3"/>
-          <ac:picMkLst>
-            <pc:docMk/>
-            <pc:sldMk cId="1472001750" sldId="305"/>
-            <ac:picMk id="9" creationId="{00000000-0000-0000-0000-000000000000}"/>
-          </ac:picMkLst>
-        </pc:picChg>
-      </pc:sldChg>
-      <pc:sldChg chg="modSp add">
-        <pc:chgData name="Xin Zou" userId="260b9726081dae15" providerId="LiveId" clId="{4830D34F-2340-49F5-A7DC-801892A92994}" dt="2018-10-06T01:36:38.996" v="1533" actId="5793"/>
-        <pc:sldMkLst>
-          <pc:docMk/>
-          <pc:sldMk cId="2543900192" sldId="306"/>
-        </pc:sldMkLst>
-        <pc:spChg chg="mod">
-          <ac:chgData name="Xin Zou" userId="260b9726081dae15" providerId="LiveId" clId="{4830D34F-2340-49F5-A7DC-801892A92994}" dt="2018-10-06T00:01:33.620" v="335"/>
-          <ac:spMkLst>
-            <pc:docMk/>
-            <pc:sldMk cId="2543900192" sldId="306"/>
-            <ac:spMk id="2" creationId="{540409DC-4A3D-42ED-90F6-13A0C827F065}"/>
-          </ac:spMkLst>
-        </pc:spChg>
-        <pc:spChg chg="mod">
-          <ac:chgData name="Xin Zou" userId="260b9726081dae15" providerId="LiveId" clId="{4830D34F-2340-49F5-A7DC-801892A92994}" dt="2018-10-06T01:36:38.996" v="1533" actId="5793"/>
-          <ac:spMkLst>
-            <pc:docMk/>
-            <pc:sldMk cId="2543900192" sldId="306"/>
-            <ac:spMk id="3" creationId="{D3765327-795B-49DD-9B2D-BDB9215F40D8}"/>
-          </ac:spMkLst>
-        </pc:spChg>
-      </pc:sldChg>
-      <pc:sldChg chg="modSp add">
-        <pc:chgData name="Xin Zou" userId="260b9726081dae15" providerId="LiveId" clId="{4830D34F-2340-49F5-A7DC-801892A92994}" dt="2018-10-06T00:08:35.501" v="1062"/>
-        <pc:sldMkLst>
-          <pc:docMk/>
-          <pc:sldMk cId="2764642956" sldId="307"/>
-        </pc:sldMkLst>
-        <pc:spChg chg="mod">
-          <ac:chgData name="Xin Zou" userId="260b9726081dae15" providerId="LiveId" clId="{4830D34F-2340-49F5-A7DC-801892A92994}" dt="2018-10-06T00:08:10.557" v="974"/>
-          <ac:spMkLst>
-            <pc:docMk/>
-            <pc:sldMk cId="2764642956" sldId="307"/>
-            <ac:spMk id="2" creationId="{C3576192-E970-4BDB-885C-53C2C8AE41BF}"/>
-          </ac:spMkLst>
-        </pc:spChg>
-        <pc:spChg chg="mod">
-          <ac:chgData name="Xin Zou" userId="260b9726081dae15" providerId="LiveId" clId="{4830D34F-2340-49F5-A7DC-801892A92994}" dt="2018-10-06T00:08:35.501" v="1062"/>
-          <ac:spMkLst>
-            <pc:docMk/>
-            <pc:sldMk cId="2764642956" sldId="307"/>
-            <ac:spMk id="3" creationId="{7E909748-3F92-4706-9840-13DE39922D9F}"/>
-          </ac:spMkLst>
-        </pc:spChg>
-      </pc:sldChg>
-      <pc:sldChg chg="addSp modSp add">
-        <pc:chgData name="Xin Zou" userId="260b9726081dae15" providerId="LiveId" clId="{4830D34F-2340-49F5-A7DC-801892A92994}" dt="2018-10-08T05:49:36.811" v="1808" actId="27636"/>
-        <pc:sldMkLst>
-          <pc:docMk/>
-          <pc:sldMk cId="1987010629" sldId="308"/>
-        </pc:sldMkLst>
-        <pc:spChg chg="mod">
-          <ac:chgData name="Xin Zou" userId="260b9726081dae15" providerId="LiveId" clId="{4830D34F-2340-49F5-A7DC-801892A92994}" dt="2018-10-08T05:49:36.811" v="1808" actId="27636"/>
-          <ac:spMkLst>
-            <pc:docMk/>
-            <pc:sldMk cId="1987010629" sldId="308"/>
-            <ac:spMk id="2" creationId="{F3D38540-E567-44CC-98AA-1BF154F044A5}"/>
-          </ac:spMkLst>
-        </pc:spChg>
-        <pc:spChg chg="mod">
-          <ac:chgData name="Xin Zou" userId="260b9726081dae15" providerId="LiveId" clId="{4830D34F-2340-49F5-A7DC-801892A92994}" dt="2018-10-06T04:18:34.584" v="1796" actId="2711"/>
-          <ac:spMkLst>
-            <pc:docMk/>
-            <pc:sldMk cId="1987010629" sldId="308"/>
-            <ac:spMk id="3" creationId="{6EBA4C05-93DC-4ED3-9C66-296271644949}"/>
-          </ac:spMkLst>
-        </pc:spChg>
-        <pc:picChg chg="add mod">
-          <ac:chgData name="Xin Zou" userId="260b9726081dae15" providerId="LiveId" clId="{4830D34F-2340-49F5-A7DC-801892A92994}" dt="2018-10-06T00:13:05.712" v="1148" actId="14100"/>
-          <ac:picMkLst>
-            <pc:docMk/>
-            <pc:sldMk cId="1987010629" sldId="308"/>
-            <ac:picMk id="4" creationId="{2E0C223C-1A5E-4C02-8D5A-278BB0F5A964}"/>
-          </ac:picMkLst>
-        </pc:picChg>
-        <pc:picChg chg="add mod">
-          <ac:chgData name="Xin Zou" userId="260b9726081dae15" providerId="LiveId" clId="{4830D34F-2340-49F5-A7DC-801892A92994}" dt="2018-10-06T00:13:11.855" v="1150" actId="1076"/>
-          <ac:picMkLst>
-            <pc:docMk/>
-            <pc:sldMk cId="1987010629" sldId="308"/>
-            <ac:picMk id="5" creationId="{710E891E-828F-4E58-8337-60CFA39C370B}"/>
-          </ac:picMkLst>
-        </pc:picChg>
-      </pc:sldChg>
-      <pc:sldChg chg="addSp delSp modSp add modNotesTx">
-        <pc:chgData name="Xin Zou" userId="260b9726081dae15" providerId="LiveId" clId="{4830D34F-2340-49F5-A7DC-801892A92994}" dt="2018-10-06T00:49:31.075" v="1532" actId="20577"/>
-        <pc:sldMkLst>
-          <pc:docMk/>
-          <pc:sldMk cId="1388405499" sldId="309"/>
-        </pc:sldMkLst>
-        <pc:spChg chg="mod">
-          <ac:chgData name="Xin Zou" userId="260b9726081dae15" providerId="LiveId" clId="{4830D34F-2340-49F5-A7DC-801892A92994}" dt="2018-10-06T00:48:25.327" v="1516"/>
-          <ac:spMkLst>
-            <pc:docMk/>
-            <pc:sldMk cId="1388405499" sldId="309"/>
-            <ac:spMk id="2" creationId="{B522B4A5-A7C6-49CC-B76A-7E0E549BF6E6}"/>
-          </ac:spMkLst>
-        </pc:spChg>
-        <pc:spChg chg="del">
-          <ac:chgData name="Xin Zou" userId="260b9726081dae15" providerId="LiveId" clId="{4830D34F-2340-49F5-A7DC-801892A92994}" dt="2018-10-06T00:48:08.445" v="1438"/>
-          <ac:spMkLst>
-            <pc:docMk/>
-            <pc:sldMk cId="1388405499" sldId="309"/>
-            <ac:spMk id="3" creationId="{9E3E523A-E748-4A69-85DD-7F08C78E14FF}"/>
-          </ac:spMkLst>
-        </pc:spChg>
-        <pc:picChg chg="add mod">
-          <ac:chgData name="Xin Zou" userId="260b9726081dae15" providerId="LiveId" clId="{4830D34F-2340-49F5-A7DC-801892A92994}" dt="2018-10-06T00:48:08.445" v="1438"/>
-          <ac:picMkLst>
-            <pc:docMk/>
-            <pc:sldMk cId="1388405499" sldId="309"/>
-            <ac:picMk id="4" creationId="{EB2D54B7-433B-4817-923E-D512359D38DB}"/>
-          </ac:picMkLst>
-        </pc:picChg>
-      </pc:sldChg>
-      <pc:sldChg chg="addSp delSp modSp add">
-        <pc:chgData name="Xin Zou" userId="260b9726081dae15" providerId="LiveId" clId="{4830D34F-2340-49F5-A7DC-801892A92994}" dt="2018-10-08T05:49:36.846" v="1810" actId="27636"/>
-        <pc:sldMkLst>
-          <pc:docMk/>
-          <pc:sldMk cId="2905683820" sldId="310"/>
-        </pc:sldMkLst>
-        <pc:spChg chg="mod">
-          <ac:chgData name="Xin Zou" userId="260b9726081dae15" providerId="LiveId" clId="{4830D34F-2340-49F5-A7DC-801892A92994}" dt="2018-10-08T05:49:36.846" v="1810" actId="27636"/>
-          <ac:spMkLst>
-            <pc:docMk/>
-            <pc:sldMk cId="2905683820" sldId="310"/>
-            <ac:spMk id="2" creationId="{045D195B-DABF-440D-9BFD-646AEE5D0429}"/>
-          </ac:spMkLst>
-        </pc:spChg>
-        <pc:spChg chg="del">
-          <ac:chgData name="Xin Zou" userId="260b9726081dae15" providerId="LiveId" clId="{4830D34F-2340-49F5-A7DC-801892A92994}" dt="2018-10-06T01:39:01.162" v="1576"/>
-          <ac:spMkLst>
-            <pc:docMk/>
-            <pc:sldMk cId="2905683820" sldId="310"/>
-            <ac:spMk id="3" creationId="{B3F7D30C-7578-464D-8CD4-25E349917434}"/>
-          </ac:spMkLst>
-        </pc:spChg>
-        <pc:picChg chg="add mod">
-          <ac:chgData name="Xin Zou" userId="260b9726081dae15" providerId="LiveId" clId="{4830D34F-2340-49F5-A7DC-801892A92994}" dt="2018-10-06T01:39:01.162" v="1576"/>
-          <ac:picMkLst>
-            <pc:docMk/>
-            <pc:sldMk cId="2905683820" sldId="310"/>
-            <ac:picMk id="4" creationId="{19C916C6-FF60-406D-ADA3-88D0A4A7810C}"/>
-          </ac:picMkLst>
-        </pc:picChg>
-      </pc:sldChg>
-      <pc:sldChg chg="addSp delSp modSp add">
-        <pc:chgData name="Xin Zou" userId="260b9726081dae15" providerId="LiveId" clId="{4830D34F-2340-49F5-A7DC-801892A92994}" dt="2018-10-06T01:40:01.476" v="1649"/>
-        <pc:sldMkLst>
-          <pc:docMk/>
-          <pc:sldMk cId="33026678" sldId="311"/>
-        </pc:sldMkLst>
-        <pc:spChg chg="mod">
-          <ac:chgData name="Xin Zou" userId="260b9726081dae15" providerId="LiveId" clId="{4830D34F-2340-49F5-A7DC-801892A92994}" dt="2018-10-06T01:39:59.425" v="1648"/>
-          <ac:spMkLst>
-            <pc:docMk/>
-            <pc:sldMk cId="33026678" sldId="311"/>
-            <ac:spMk id="2" creationId="{B617A536-759C-4F5E-8AD0-42D2F41B845A}"/>
-          </ac:spMkLst>
-        </pc:spChg>
-        <pc:spChg chg="del">
-          <ac:chgData name="Xin Zou" userId="260b9726081dae15" providerId="LiveId" clId="{4830D34F-2340-49F5-A7DC-801892A92994}" dt="2018-10-06T01:40:01.476" v="1649"/>
-          <ac:spMkLst>
-            <pc:docMk/>
-            <pc:sldMk cId="33026678" sldId="311"/>
-            <ac:spMk id="3" creationId="{45A0B690-0AC5-4DE8-861E-88DF26E8873A}"/>
-          </ac:spMkLst>
-        </pc:spChg>
-        <pc:picChg chg="add mod">
-          <ac:chgData name="Xin Zou" userId="260b9726081dae15" providerId="LiveId" clId="{4830D34F-2340-49F5-A7DC-801892A92994}" dt="2018-10-06T01:40:01.476" v="1649"/>
-          <ac:picMkLst>
-            <pc:docMk/>
-            <pc:sldMk cId="33026678" sldId="311"/>
-            <ac:picMk id="4" creationId="{AAA9864F-4E8A-4458-8175-43FBAF48BDC2}"/>
-          </ac:picMkLst>
-        </pc:picChg>
-      </pc:sldChg>
-      <pc:sldChg chg="add">
-        <pc:chgData name="Xin Zou" userId="260b9726081dae15" providerId="LiveId" clId="{4830D34F-2340-49F5-A7DC-801892A92994}" dt="2018-10-08T05:49:32.175" v="1799"/>
-        <pc:sldMkLst>
-          <pc:docMk/>
-          <pc:sldMk cId="161325156" sldId="374"/>
-        </pc:sldMkLst>
-      </pc:sldChg>
-    </pc:docChg>
-  </pc:docChgLst>
-</pc:chgInfo>
 </file>
 
 <file path=ppt/notesMasters/notesMaster1.xml><?xml version="1.0" encoding="utf-8"?>
@@ -1698,7 +247,6 @@
           <a:p>
             <a:fld id="{FAC37360-BE78-48F1-87F9-0C7E0C0D7963}" type="datetimeFigureOut">
               <a:rPr lang="en-US" smtClean="0"/>
-              <a:t>10/24/2018</a:t>
             </a:fld>
             <a:endParaRPr lang="en-US"/>
           </a:p>
@@ -1765,6 +313,7 @@
               <a:rPr lang="zh-CN" altLang="en-US"/>
               <a:t>编辑母版文本样式</a:t>
             </a:r>
+            <a:endParaRPr lang="zh-CN" altLang="en-US"/>
           </a:p>
           <a:p>
             <a:pPr lvl="1"/>
@@ -1772,6 +321,7 @@
               <a:rPr lang="zh-CN" altLang="en-US"/>
               <a:t>第二级</a:t>
             </a:r>
+            <a:endParaRPr lang="zh-CN" altLang="en-US"/>
           </a:p>
           <a:p>
             <a:pPr lvl="2"/>
@@ -1779,6 +329,7 @@
               <a:rPr lang="zh-CN" altLang="en-US"/>
               <a:t>第三级</a:t>
             </a:r>
+            <a:endParaRPr lang="zh-CN" altLang="en-US"/>
           </a:p>
           <a:p>
             <a:pPr lvl="3"/>
@@ -1786,6 +337,7 @@
               <a:rPr lang="zh-CN" altLang="en-US"/>
               <a:t>第四级</a:t>
             </a:r>
+            <a:endParaRPr lang="zh-CN" altLang="en-US"/>
           </a:p>
           <a:p>
             <a:pPr lvl="4"/>
@@ -1857,18 +409,12 @@
           <a:p>
             <a:fld id="{EFA0029D-281E-4907-BBE6-6A60037D7471}" type="slidenum">
               <a:rPr lang="en-US" smtClean="0"/>
-              <a:t>‹#›</a:t>
             </a:fld>
             <a:endParaRPr lang="en-US"/>
           </a:p>
         </p:txBody>
       </p:sp>
     </p:spTree>
-    <p:extLst>
-      <p:ext uri="{BB962C8B-B14F-4D97-AF65-F5344CB8AC3E}">
-        <p14:creationId xmlns:p14="http://schemas.microsoft.com/office/powerpoint/2010/main" val="3059469232"/>
-      </p:ext>
-    </p:extLst>
   </p:cSld>
   <p:clrMap bg1="lt1" tx1="dk1" bg2="lt2" tx2="dk2" accent1="accent1" accent2="accent2" accent3="accent3" accent4="accent4" accent5="accent5" accent6="accent6" hlink="hlink" folHlink="folHlink"/>
   <p:notesStyle>
@@ -2040,18 +586,12 @@
           <a:p>
             <a:fld id="{EFA0029D-281E-4907-BBE6-6A60037D7471}" type="slidenum">
               <a:rPr lang="en-US" smtClean="0"/>
-              <a:t>2</a:t>
             </a:fld>
             <a:endParaRPr lang="en-US"/>
           </a:p>
         </p:txBody>
       </p:sp>
     </p:spTree>
-    <p:extLst>
-      <p:ext uri="{BB962C8B-B14F-4D97-AF65-F5344CB8AC3E}">
-        <p14:creationId xmlns:p14="http://schemas.microsoft.com/office/powerpoint/2010/main" val="1875520206"/>
-      </p:ext>
-    </p:extLst>
   </p:cSld>
   <p:clrMapOvr>
     <a:masterClrMapping/>
@@ -2417,18 +957,12 @@
           <a:p>
             <a:fld id="{EFA0029D-281E-4907-BBE6-6A60037D7471}" type="slidenum">
               <a:rPr lang="en-US" smtClean="0"/>
-              <a:t>5</a:t>
             </a:fld>
             <a:endParaRPr lang="en-US"/>
           </a:p>
         </p:txBody>
       </p:sp>
     </p:spTree>
-    <p:extLst>
-      <p:ext uri="{BB962C8B-B14F-4D97-AF65-F5344CB8AC3E}">
-        <p14:creationId xmlns:p14="http://schemas.microsoft.com/office/powerpoint/2010/main" val="2330954225"/>
-      </p:ext>
-    </p:extLst>
   </p:cSld>
   <p:clrMapOvr>
     <a:masterClrMapping/>
@@ -2499,7 +1033,6 @@
               <a:buSzTx/>
               <a:buFontTx/>
               <a:buNone/>
-              <a:tabLst/>
               <a:defRPr/>
             </a:pPr>
             <a:r>
@@ -2530,18 +1063,12 @@
           <a:p>
             <a:fld id="{EFA0029D-281E-4907-BBE6-6A60037D7471}" type="slidenum">
               <a:rPr lang="en-US" smtClean="0"/>
-              <a:t>18</a:t>
             </a:fld>
             <a:endParaRPr lang="en-US"/>
           </a:p>
         </p:txBody>
       </p:sp>
     </p:spTree>
-    <p:extLst>
-      <p:ext uri="{BB962C8B-B14F-4D97-AF65-F5344CB8AC3E}">
-        <p14:creationId xmlns:p14="http://schemas.microsoft.com/office/powerpoint/2010/main" val="2712141949"/>
-      </p:ext>
-    </p:extLst>
   </p:cSld>
   <p:clrMapOvr>
     <a:masterClrMapping/>
@@ -2602,6 +1129,7 @@
               <a:rPr lang="en-US" dirty="0"/>
               <a:t>https://sandofsky.com/blog/the-s-curve.html</a:t>
             </a:r>
+            <a:endParaRPr lang="en-US" dirty="0"/>
           </a:p>
           <a:p>
             <a:r>
@@ -2629,18 +1157,12 @@
           <a:p>
             <a:fld id="{EFA0029D-281E-4907-BBE6-6A60037D7471}" type="slidenum">
               <a:rPr lang="en-US" smtClean="0"/>
-              <a:t>22</a:t>
             </a:fld>
             <a:endParaRPr lang="en-US"/>
           </a:p>
         </p:txBody>
       </p:sp>
     </p:spTree>
-    <p:extLst>
-      <p:ext uri="{BB962C8B-B14F-4D97-AF65-F5344CB8AC3E}">
-        <p14:creationId xmlns:p14="http://schemas.microsoft.com/office/powerpoint/2010/main" val="2824025544"/>
-      </p:ext>
-    </p:extLst>
   </p:cSld>
   <p:clrMapOvr>
     <a:masterClrMapping/>
@@ -2700,6 +1222,7 @@
               <a:rPr lang="en-US" altLang="zh-CN" dirty="0"/>
               <a:t>https://www.scrum.org/forum/scrum-forum/14106/scrum-joke </a:t>
             </a:r>
+            <a:endParaRPr lang="en-US" altLang="zh-CN" dirty="0"/>
           </a:p>
           <a:p>
             <a:endParaRPr lang="en-US" dirty="0"/>
@@ -2723,18 +1246,12 @@
           <a:p>
             <a:fld id="{EFA0029D-281E-4907-BBE6-6A60037D7471}" type="slidenum">
               <a:rPr lang="en-US" smtClean="0"/>
-              <a:t>23</a:t>
             </a:fld>
             <a:endParaRPr lang="en-US"/>
           </a:p>
         </p:txBody>
       </p:sp>
     </p:spTree>
-    <p:extLst>
-      <p:ext uri="{BB962C8B-B14F-4D97-AF65-F5344CB8AC3E}">
-        <p14:creationId xmlns:p14="http://schemas.microsoft.com/office/powerpoint/2010/main" val="3780566784"/>
-      </p:ext>
-    </p:extLst>
   </p:cSld>
   <p:clrMapOvr>
     <a:masterClrMapping/>
@@ -2797,6 +1314,7 @@
               <a:rPr lang="en-US" dirty="0"/>
               <a:t>https://www.oreilly.com/library/view/bdd-in-action/9781617291654/</a:t>
             </a:r>
+            <a:endParaRPr lang="en-US" dirty="0"/>
           </a:p>
           <a:p>
             <a:endParaRPr lang="en-US" dirty="0"/>
@@ -2813,6 +1331,7 @@
               <a:rPr lang="en-US" dirty="0"/>
               <a:t>https://medium.com/the-reading-room/behaviour-driven-development-a-better-agile-778d2d2a7ab5</a:t>
             </a:r>
+            <a:endParaRPr lang="en-US" dirty="0"/>
           </a:p>
           <a:p>
             <a:endParaRPr lang="en-US" dirty="0"/>
@@ -2829,6 +1348,7 @@
               <a:rPr lang="en-US" dirty="0"/>
               <a:t>https://medium.com/agile-vision/behavior-driven-development-bdd-software-testing-in-agile-environments-d5327c0f9e2d</a:t>
             </a:r>
+            <a:endParaRPr lang="en-US" dirty="0"/>
           </a:p>
           <a:p>
             <a:endParaRPr lang="en-US" dirty="0"/>
@@ -2852,18 +1372,12 @@
           <a:p>
             <a:fld id="{EFA0029D-281E-4907-BBE6-6A60037D7471}" type="slidenum">
               <a:rPr lang="en-US" smtClean="0"/>
-              <a:t>33</a:t>
             </a:fld>
             <a:endParaRPr lang="en-US"/>
           </a:p>
         </p:txBody>
       </p:sp>
     </p:spTree>
-    <p:extLst>
-      <p:ext uri="{BB962C8B-B14F-4D97-AF65-F5344CB8AC3E}">
-        <p14:creationId xmlns:p14="http://schemas.microsoft.com/office/powerpoint/2010/main" val="3887604417"/>
-      </p:ext>
-    </p:extLst>
   </p:cSld>
   <p:clrMapOvr>
     <a:masterClrMapping/>
@@ -2936,18 +1450,12 @@
           <a:p>
             <a:fld id="{EFA0029D-281E-4907-BBE6-6A60037D7471}" type="slidenum">
               <a:rPr lang="en-US" smtClean="0"/>
-              <a:t>34</a:t>
             </a:fld>
             <a:endParaRPr lang="en-US"/>
           </a:p>
         </p:txBody>
       </p:sp>
     </p:spTree>
-    <p:extLst>
-      <p:ext uri="{BB962C8B-B14F-4D97-AF65-F5344CB8AC3E}">
-        <p14:creationId xmlns:p14="http://schemas.microsoft.com/office/powerpoint/2010/main" val="217334892"/>
-      </p:ext>
-    </p:extLst>
   </p:cSld>
   <p:clrMapOvr>
     <a:masterClrMapping/>
@@ -3151,7 +1659,6 @@
           <a:p>
             <a:fld id="{48A87A34-81AB-432B-8DAE-1953F412C126}" type="datetimeFigureOut">
               <a:rPr lang="en-US" smtClean="0"/>
-              <a:t>10/24/2018</a:t>
             </a:fld>
             <a:endParaRPr lang="en-US" dirty="0"/>
           </a:p>
@@ -3193,18 +1700,12 @@
           <a:p>
             <a:fld id="{6D22F896-40B5-4ADD-8801-0D06FADFA095}" type="slidenum">
               <a:rPr lang="en-US" smtClean="0"/>
-              <a:t>‹#›</a:t>
             </a:fld>
             <a:endParaRPr lang="en-US" dirty="0"/>
           </a:p>
         </p:txBody>
       </p:sp>
     </p:spTree>
-    <p:extLst>
-      <p:ext uri="{BB962C8B-B14F-4D97-AF65-F5344CB8AC3E}">
-        <p14:creationId xmlns:p14="http://schemas.microsoft.com/office/powerpoint/2010/main" val="2025261129"/>
-      </p:ext>
-    </p:extLst>
   </p:cSld>
   <p:clrMapOvr>
     <a:masterClrMapping/>
@@ -3412,6 +1913,7 @@
               <a:rPr lang="en-US"/>
               <a:t>Edit Master text styles</a:t>
             </a:r>
+            <a:endParaRPr lang="en-US"/>
           </a:p>
         </p:txBody>
       </p:sp>
@@ -3432,8 +1934,6 @@
           <a:p>
             <a:fld id="{48A87A34-81AB-432B-8DAE-1953F412C126}" type="datetimeFigureOut">
               <a:rPr lang="en-US" smtClean="0"/>
-              <a:pPr/>
-              <a:t>10/24/2018</a:t>
             </a:fld>
             <a:endParaRPr lang="en-US" dirty="0"/>
           </a:p>
@@ -3475,19 +1975,12 @@
           <a:p>
             <a:fld id="{6D22F896-40B5-4ADD-8801-0D06FADFA095}" type="slidenum">
               <a:rPr lang="en-US" smtClean="0"/>
-              <a:pPr/>
-              <a:t>‹#›</a:t>
             </a:fld>
             <a:endParaRPr lang="en-US" dirty="0"/>
           </a:p>
         </p:txBody>
       </p:sp>
     </p:spTree>
-    <p:extLst>
-      <p:ext uri="{BB962C8B-B14F-4D97-AF65-F5344CB8AC3E}">
-        <p14:creationId xmlns:p14="http://schemas.microsoft.com/office/powerpoint/2010/main" val="2679300852"/>
-      </p:ext>
-    </p:extLst>
   </p:cSld>
   <p:clrMapOvr>
     <a:masterClrMapping/>
@@ -3606,6 +2099,7 @@
               <a:rPr lang="en-US"/>
               <a:t>Edit Master text styles</a:t>
             </a:r>
+            <a:endParaRPr lang="en-US"/>
           </a:p>
         </p:txBody>
       </p:sp>
@@ -3626,8 +2120,6 @@
           <a:p>
             <a:fld id="{48A87A34-81AB-432B-8DAE-1953F412C126}" type="datetimeFigureOut">
               <a:rPr lang="en-US" smtClean="0"/>
-              <a:pPr/>
-              <a:t>10/24/2018</a:t>
             </a:fld>
             <a:endParaRPr lang="en-US" dirty="0"/>
           </a:p>
@@ -3669,19 +2161,12 @@
           <a:p>
             <a:fld id="{6D22F896-40B5-4ADD-8801-0D06FADFA095}" type="slidenum">
               <a:rPr lang="en-US" smtClean="0"/>
-              <a:pPr/>
-              <a:t>‹#›</a:t>
             </a:fld>
             <a:endParaRPr lang="en-US" dirty="0"/>
           </a:p>
         </p:txBody>
       </p:sp>
     </p:spTree>
-    <p:extLst>
-      <p:ext uri="{BB962C8B-B14F-4D97-AF65-F5344CB8AC3E}">
-        <p14:creationId xmlns:p14="http://schemas.microsoft.com/office/powerpoint/2010/main" val="1721187056"/>
-      </p:ext>
-    </p:extLst>
   </p:cSld>
   <p:clrMapOvr>
     <a:masterClrMapping/>
@@ -3802,6 +2287,7 @@
               <a:rPr lang="en-US"/>
               <a:t>Edit Master text styles</a:t>
             </a:r>
+            <a:endParaRPr lang="en-US"/>
           </a:p>
         </p:txBody>
       </p:sp>
@@ -3869,6 +2355,7 @@
               <a:rPr lang="en-US"/>
               <a:t>Edit Master text styles</a:t>
             </a:r>
+            <a:endParaRPr lang="en-US"/>
           </a:p>
         </p:txBody>
       </p:sp>
@@ -3889,8 +2376,6 @@
           <a:p>
             <a:fld id="{48A87A34-81AB-432B-8DAE-1953F412C126}" type="datetimeFigureOut">
               <a:rPr lang="en-US" smtClean="0"/>
-              <a:pPr/>
-              <a:t>10/24/2018</a:t>
             </a:fld>
             <a:endParaRPr lang="en-US" dirty="0"/>
           </a:p>
@@ -3932,8 +2417,6 @@
           <a:p>
             <a:fld id="{6D22F896-40B5-4ADD-8801-0D06FADFA095}" type="slidenum">
               <a:rPr lang="en-US" smtClean="0"/>
-              <a:pPr/>
-              <a:t>‹#›</a:t>
             </a:fld>
             <a:endParaRPr lang="en-US" dirty="0"/>
           </a:p>
@@ -4052,6 +2535,12 @@
               </a:rPr>
               <a:t>“</a:t>
             </a:r>
+            <a:endParaRPr lang="en-US" sz="8000" dirty="0">
+              <a:solidFill>
+                <a:schemeClr val="tx1"/>
+              </a:solidFill>
+              <a:effectLst/>
+            </a:endParaRPr>
           </a:p>
         </p:txBody>
       </p:sp>
@@ -4168,15 +2657,16 @@
               </a:rPr>
               <a:t>”</a:t>
             </a:r>
+            <a:endParaRPr lang="en-US" sz="8000" dirty="0">
+              <a:solidFill>
+                <a:schemeClr val="tx1"/>
+              </a:solidFill>
+              <a:effectLst/>
+            </a:endParaRPr>
           </a:p>
         </p:txBody>
       </p:sp>
     </p:spTree>
-    <p:extLst>
-      <p:ext uri="{BB962C8B-B14F-4D97-AF65-F5344CB8AC3E}">
-        <p14:creationId xmlns:p14="http://schemas.microsoft.com/office/powerpoint/2010/main" val="2432146510"/>
-      </p:ext>
-    </p:extLst>
   </p:cSld>
   <p:clrMapOvr>
     <a:masterClrMapping/>
@@ -4297,6 +2787,7 @@
               <a:rPr lang="en-US"/>
               <a:t>Edit Master text styles</a:t>
             </a:r>
+            <a:endParaRPr lang="en-US"/>
           </a:p>
         </p:txBody>
       </p:sp>
@@ -4317,8 +2808,6 @@
           <a:p>
             <a:fld id="{48A87A34-81AB-432B-8DAE-1953F412C126}" type="datetimeFigureOut">
               <a:rPr lang="en-US" smtClean="0"/>
-              <a:pPr/>
-              <a:t>10/24/2018</a:t>
             </a:fld>
             <a:endParaRPr lang="en-US" dirty="0"/>
           </a:p>
@@ -4360,19 +2849,12 @@
           <a:p>
             <a:fld id="{6D22F896-40B5-4ADD-8801-0D06FADFA095}" type="slidenum">
               <a:rPr lang="en-US" smtClean="0"/>
-              <a:pPr/>
-              <a:t>‹#›</a:t>
             </a:fld>
             <a:endParaRPr lang="en-US" dirty="0"/>
           </a:p>
         </p:txBody>
       </p:sp>
     </p:spTree>
-    <p:extLst>
-      <p:ext uri="{BB962C8B-B14F-4D97-AF65-F5344CB8AC3E}">
-        <p14:creationId xmlns:p14="http://schemas.microsoft.com/office/powerpoint/2010/main" val="2058658672"/>
-      </p:ext>
-    </p:extLst>
   </p:cSld>
   <p:clrMapOvr>
     <a:masterClrMapping/>
@@ -4516,6 +2998,7 @@
               <a:rPr lang="en-US"/>
               <a:t>Edit Master text styles</a:t>
             </a:r>
+            <a:endParaRPr lang="en-US"/>
           </a:p>
         </p:txBody>
       </p:sp>
@@ -4583,6 +3066,7 @@
               <a:rPr lang="en-US"/>
               <a:t>Edit Master text styles</a:t>
             </a:r>
+            <a:endParaRPr lang="en-US"/>
           </a:p>
         </p:txBody>
       </p:sp>
@@ -4647,6 +3131,7 @@
               <a:rPr lang="en-US"/>
               <a:t>Edit Master text styles</a:t>
             </a:r>
+            <a:endParaRPr lang="en-US"/>
           </a:p>
         </p:txBody>
       </p:sp>
@@ -4714,6 +3199,7 @@
               <a:rPr lang="en-US"/>
               <a:t>Edit Master text styles</a:t>
             </a:r>
+            <a:endParaRPr lang="en-US"/>
           </a:p>
         </p:txBody>
       </p:sp>
@@ -4778,6 +3264,7 @@
               <a:rPr lang="en-US"/>
               <a:t>Edit Master text styles</a:t>
             </a:r>
+            <a:endParaRPr lang="en-US"/>
           </a:p>
         </p:txBody>
       </p:sp>
@@ -4845,6 +3332,7 @@
               <a:rPr lang="en-US"/>
               <a:t>Edit Master text styles</a:t>
             </a:r>
+            <a:endParaRPr lang="en-US"/>
           </a:p>
         </p:txBody>
       </p:sp>
@@ -4865,8 +3353,6 @@
           <a:p>
             <a:fld id="{48A87A34-81AB-432B-8DAE-1953F412C126}" type="datetimeFigureOut">
               <a:rPr lang="en-US" smtClean="0"/>
-              <a:pPr/>
-              <a:t>10/24/2018</a:t>
             </a:fld>
             <a:endParaRPr lang="en-US" dirty="0"/>
           </a:p>
@@ -4908,19 +3394,12 @@
           <a:p>
             <a:fld id="{6D22F896-40B5-4ADD-8801-0D06FADFA095}" type="slidenum">
               <a:rPr lang="en-US" smtClean="0"/>
-              <a:pPr/>
-              <a:t>‹#›</a:t>
             </a:fld>
             <a:endParaRPr lang="en-US" dirty="0"/>
           </a:p>
         </p:txBody>
       </p:sp>
     </p:spTree>
-    <p:extLst>
-      <p:ext uri="{BB962C8B-B14F-4D97-AF65-F5344CB8AC3E}">
-        <p14:creationId xmlns:p14="http://schemas.microsoft.com/office/powerpoint/2010/main" val="3829677541"/>
-      </p:ext>
-    </p:extLst>
   </p:cSld>
   <p:clrMapOvr>
     <a:masterClrMapping/>
@@ -5060,6 +3539,7 @@
               <a:rPr lang="en-US"/>
               <a:t>Edit Master text styles</a:t>
             </a:r>
+            <a:endParaRPr lang="en-US"/>
           </a:p>
         </p:txBody>
       </p:sp>
@@ -5206,6 +3686,7 @@
               <a:rPr lang="en-US"/>
               <a:t>Edit Master text styles</a:t>
             </a:r>
+            <a:endParaRPr lang="en-US"/>
           </a:p>
         </p:txBody>
       </p:sp>
@@ -5296,6 +3777,7 @@
               <a:rPr lang="en-US"/>
               <a:t>Edit Master text styles</a:t>
             </a:r>
+            <a:endParaRPr lang="en-US"/>
           </a:p>
         </p:txBody>
       </p:sp>
@@ -5442,6 +3924,7 @@
               <a:rPr lang="en-US"/>
               <a:t>Edit Master text styles</a:t>
             </a:r>
+            <a:endParaRPr lang="en-US"/>
           </a:p>
         </p:txBody>
       </p:sp>
@@ -5532,6 +4015,7 @@
               <a:rPr lang="en-US"/>
               <a:t>Edit Master text styles</a:t>
             </a:r>
+            <a:endParaRPr lang="en-US"/>
           </a:p>
         </p:txBody>
       </p:sp>
@@ -5678,6 +4162,7 @@
               <a:rPr lang="en-US"/>
               <a:t>Edit Master text styles</a:t>
             </a:r>
+            <a:endParaRPr lang="en-US"/>
           </a:p>
         </p:txBody>
       </p:sp>
@@ -5698,8 +4183,6 @@
           <a:p>
             <a:fld id="{48A87A34-81AB-432B-8DAE-1953F412C126}" type="datetimeFigureOut">
               <a:rPr lang="en-US" smtClean="0"/>
-              <a:pPr/>
-              <a:t>10/24/2018</a:t>
             </a:fld>
             <a:endParaRPr lang="en-US" dirty="0"/>
           </a:p>
@@ -5741,19 +4224,12 @@
           <a:p>
             <a:fld id="{6D22F896-40B5-4ADD-8801-0D06FADFA095}" type="slidenum">
               <a:rPr lang="en-US" smtClean="0"/>
-              <a:pPr/>
-              <a:t>‹#›</a:t>
             </a:fld>
             <a:endParaRPr lang="en-US" dirty="0"/>
           </a:p>
         </p:txBody>
       </p:sp>
     </p:spTree>
-    <p:extLst>
-      <p:ext uri="{BB962C8B-B14F-4D97-AF65-F5344CB8AC3E}">
-        <p14:creationId xmlns:p14="http://schemas.microsoft.com/office/powerpoint/2010/main" val="584911652"/>
-      </p:ext>
-    </p:extLst>
   </p:cSld>
   <p:clrMapOvr>
     <a:masterClrMapping/>
@@ -5821,6 +4297,7 @@
               <a:rPr lang="en-US"/>
               <a:t>Edit Master text styles</a:t>
             </a:r>
+            <a:endParaRPr lang="en-US"/>
           </a:p>
           <a:p>
             <a:pPr lvl="1"/>
@@ -5828,6 +4305,7 @@
               <a:rPr lang="en-US"/>
               <a:t>Second level</a:t>
             </a:r>
+            <a:endParaRPr lang="en-US"/>
           </a:p>
           <a:p>
             <a:pPr lvl="2"/>
@@ -5835,6 +4313,7 @@
               <a:rPr lang="en-US"/>
               <a:t>Third level</a:t>
             </a:r>
+            <a:endParaRPr lang="en-US"/>
           </a:p>
           <a:p>
             <a:pPr lvl="3"/>
@@ -5842,6 +4321,7 @@
               <a:rPr lang="en-US"/>
               <a:t>Fourth level</a:t>
             </a:r>
+            <a:endParaRPr lang="en-US"/>
           </a:p>
           <a:p>
             <a:pPr lvl="4"/>
@@ -5870,7 +4350,6 @@
           <a:p>
             <a:fld id="{48A87A34-81AB-432B-8DAE-1953F412C126}" type="datetimeFigureOut">
               <a:rPr lang="en-US" smtClean="0"/>
-              <a:t>10/24/2018</a:t>
             </a:fld>
             <a:endParaRPr lang="en-US" dirty="0"/>
           </a:p>
@@ -5912,18 +4391,12 @@
           <a:p>
             <a:fld id="{6D22F896-40B5-4ADD-8801-0D06FADFA095}" type="slidenum">
               <a:rPr lang="en-US" smtClean="0"/>
-              <a:t>‹#›</a:t>
             </a:fld>
             <a:endParaRPr lang="en-US" dirty="0"/>
           </a:p>
         </p:txBody>
       </p:sp>
     </p:spTree>
-    <p:extLst>
-      <p:ext uri="{BB962C8B-B14F-4D97-AF65-F5344CB8AC3E}">
-        <p14:creationId xmlns:p14="http://schemas.microsoft.com/office/powerpoint/2010/main" val="3267424371"/>
-      </p:ext>
-    </p:extLst>
   </p:cSld>
   <p:clrMapOvr>
     <a:masterClrMapping/>
@@ -6001,6 +4474,7 @@
               <a:rPr lang="en-US"/>
               <a:t>Edit Master text styles</a:t>
             </a:r>
+            <a:endParaRPr lang="en-US"/>
           </a:p>
           <a:p>
             <a:pPr lvl="1"/>
@@ -6008,6 +4482,7 @@
               <a:rPr lang="en-US"/>
               <a:t>Second level</a:t>
             </a:r>
+            <a:endParaRPr lang="en-US"/>
           </a:p>
           <a:p>
             <a:pPr lvl="2"/>
@@ -6015,6 +4490,7 @@
               <a:rPr lang="en-US"/>
               <a:t>Third level</a:t>
             </a:r>
+            <a:endParaRPr lang="en-US"/>
           </a:p>
           <a:p>
             <a:pPr lvl="3"/>
@@ -6022,6 +4498,7 @@
               <a:rPr lang="en-US"/>
               <a:t>Fourth level</a:t>
             </a:r>
+            <a:endParaRPr lang="en-US"/>
           </a:p>
           <a:p>
             <a:pPr lvl="4"/>
@@ -6050,7 +4527,6 @@
           <a:p>
             <a:fld id="{48A87A34-81AB-432B-8DAE-1953F412C126}" type="datetimeFigureOut">
               <a:rPr lang="en-US" smtClean="0"/>
-              <a:t>10/24/2018</a:t>
             </a:fld>
             <a:endParaRPr lang="en-US" dirty="0"/>
           </a:p>
@@ -6092,18 +4568,12 @@
           <a:p>
             <a:fld id="{6D22F896-40B5-4ADD-8801-0D06FADFA095}" type="slidenum">
               <a:rPr lang="en-US" smtClean="0"/>
-              <a:t>‹#›</a:t>
             </a:fld>
             <a:endParaRPr lang="en-US" dirty="0"/>
           </a:p>
         </p:txBody>
       </p:sp>
     </p:spTree>
-    <p:extLst>
-      <p:ext uri="{BB962C8B-B14F-4D97-AF65-F5344CB8AC3E}">
-        <p14:creationId xmlns:p14="http://schemas.microsoft.com/office/powerpoint/2010/main" val="2609113377"/>
-      </p:ext>
-    </p:extLst>
   </p:cSld>
   <p:clrMapOvr>
     <a:masterClrMapping/>
@@ -6171,6 +4641,7 @@
               <a:rPr lang="en-US"/>
               <a:t>Edit Master text styles</a:t>
             </a:r>
+            <a:endParaRPr lang="en-US"/>
           </a:p>
           <a:p>
             <a:pPr lvl="1"/>
@@ -6178,6 +4649,7 @@
               <a:rPr lang="en-US"/>
               <a:t>Second level</a:t>
             </a:r>
+            <a:endParaRPr lang="en-US"/>
           </a:p>
           <a:p>
             <a:pPr lvl="2"/>
@@ -6185,6 +4657,7 @@
               <a:rPr lang="en-US"/>
               <a:t>Third level</a:t>
             </a:r>
+            <a:endParaRPr lang="en-US"/>
           </a:p>
           <a:p>
             <a:pPr lvl="3"/>
@@ -6192,6 +4665,7 @@
               <a:rPr lang="en-US"/>
               <a:t>Fourth level</a:t>
             </a:r>
+            <a:endParaRPr lang="en-US"/>
           </a:p>
           <a:p>
             <a:pPr lvl="4"/>
@@ -6220,7 +4694,6 @@
           <a:p>
             <a:fld id="{48A87A34-81AB-432B-8DAE-1953F412C126}" type="datetimeFigureOut">
               <a:rPr lang="en-US" smtClean="0"/>
-              <a:t>10/24/2018</a:t>
             </a:fld>
             <a:endParaRPr lang="en-US" dirty="0"/>
           </a:p>
@@ -6262,18 +4735,12 @@
           <a:p>
             <a:fld id="{6D22F896-40B5-4ADD-8801-0D06FADFA095}" type="slidenum">
               <a:rPr lang="en-US" smtClean="0"/>
-              <a:t>‹#›</a:t>
             </a:fld>
             <a:endParaRPr lang="en-US" dirty="0"/>
           </a:p>
         </p:txBody>
       </p:sp>
     </p:spTree>
-    <p:extLst>
-      <p:ext uri="{BB962C8B-B14F-4D97-AF65-F5344CB8AC3E}">
-        <p14:creationId xmlns:p14="http://schemas.microsoft.com/office/powerpoint/2010/main" val="3792220468"/>
-      </p:ext>
-    </p:extLst>
   </p:cSld>
   <p:clrMapOvr>
     <a:masterClrMapping/>
@@ -6477,7 +4944,6 @@
           <a:p>
             <a:fld id="{48A87A34-81AB-432B-8DAE-1953F412C126}" type="datetimeFigureOut">
               <a:rPr lang="en-US" smtClean="0"/>
-              <a:t>10/24/2018</a:t>
             </a:fld>
             <a:endParaRPr lang="en-US" dirty="0"/>
           </a:p>
@@ -6519,18 +4985,12 @@
           <a:p>
             <a:fld id="{6D22F896-40B5-4ADD-8801-0D06FADFA095}" type="slidenum">
               <a:rPr lang="en-US" smtClean="0"/>
-              <a:t>‹#›</a:t>
             </a:fld>
             <a:endParaRPr lang="en-US" dirty="0"/>
           </a:p>
         </p:txBody>
       </p:sp>
     </p:spTree>
-    <p:extLst>
-      <p:ext uri="{BB962C8B-B14F-4D97-AF65-F5344CB8AC3E}">
-        <p14:creationId xmlns:p14="http://schemas.microsoft.com/office/powerpoint/2010/main" val="864447558"/>
-      </p:ext>
-    </p:extLst>
   </p:cSld>
   <p:clrMapOvr>
     <a:masterClrMapping/>
@@ -6603,6 +5063,7 @@
               <a:rPr lang="en-US"/>
               <a:t>Edit Master text styles</a:t>
             </a:r>
+            <a:endParaRPr lang="en-US"/>
           </a:p>
           <a:p>
             <a:pPr lvl="1"/>
@@ -6610,6 +5071,7 @@
               <a:rPr lang="en-US"/>
               <a:t>Second level</a:t>
             </a:r>
+            <a:endParaRPr lang="en-US"/>
           </a:p>
           <a:p>
             <a:pPr lvl="2"/>
@@ -6617,6 +5079,7 @@
               <a:rPr lang="en-US"/>
               <a:t>Third level</a:t>
             </a:r>
+            <a:endParaRPr lang="en-US"/>
           </a:p>
           <a:p>
             <a:pPr lvl="3"/>
@@ -6624,6 +5087,7 @@
               <a:rPr lang="en-US"/>
               <a:t>Fourth level</a:t>
             </a:r>
+            <a:endParaRPr lang="en-US"/>
           </a:p>
           <a:p>
             <a:pPr lvl="4"/>
@@ -6660,6 +5124,7 @@
               <a:rPr lang="en-US"/>
               <a:t>Edit Master text styles</a:t>
             </a:r>
+            <a:endParaRPr lang="en-US"/>
           </a:p>
           <a:p>
             <a:pPr lvl="1"/>
@@ -6667,6 +5132,7 @@
               <a:rPr lang="en-US"/>
               <a:t>Second level</a:t>
             </a:r>
+            <a:endParaRPr lang="en-US"/>
           </a:p>
           <a:p>
             <a:pPr lvl="2"/>
@@ -6674,6 +5140,7 @@
               <a:rPr lang="en-US"/>
               <a:t>Third level</a:t>
             </a:r>
+            <a:endParaRPr lang="en-US"/>
           </a:p>
           <a:p>
             <a:pPr lvl="3"/>
@@ -6681,6 +5148,7 @@
               <a:rPr lang="en-US"/>
               <a:t>Fourth level</a:t>
             </a:r>
+            <a:endParaRPr lang="en-US"/>
           </a:p>
           <a:p>
             <a:pPr lvl="4"/>
@@ -6709,7 +5177,6 @@
           <a:p>
             <a:fld id="{48A87A34-81AB-432B-8DAE-1953F412C126}" type="datetimeFigureOut">
               <a:rPr lang="en-US" smtClean="0"/>
-              <a:t>10/24/2018</a:t>
             </a:fld>
             <a:endParaRPr lang="en-US" dirty="0"/>
           </a:p>
@@ -6751,18 +5218,12 @@
           <a:p>
             <a:fld id="{6D22F896-40B5-4ADD-8801-0D06FADFA095}" type="slidenum">
               <a:rPr lang="en-US" smtClean="0"/>
-              <a:t>‹#›</a:t>
             </a:fld>
             <a:endParaRPr lang="en-US" dirty="0"/>
           </a:p>
         </p:txBody>
       </p:sp>
     </p:spTree>
-    <p:extLst>
-      <p:ext uri="{BB962C8B-B14F-4D97-AF65-F5344CB8AC3E}">
-        <p14:creationId xmlns:p14="http://schemas.microsoft.com/office/powerpoint/2010/main" val="3037855244"/>
-      </p:ext>
-    </p:extLst>
   </p:cSld>
   <p:clrMapOvr>
     <a:masterClrMapping/>
@@ -6904,6 +5365,7 @@
               <a:rPr lang="en-US"/>
               <a:t>Edit Master text styles</a:t>
             </a:r>
+            <a:endParaRPr lang="en-US"/>
           </a:p>
         </p:txBody>
       </p:sp>
@@ -6932,6 +5394,7 @@
               <a:rPr lang="en-US"/>
               <a:t>Edit Master text styles</a:t>
             </a:r>
+            <a:endParaRPr lang="en-US"/>
           </a:p>
           <a:p>
             <a:pPr lvl="1"/>
@@ -6939,6 +5402,7 @@
               <a:rPr lang="en-US"/>
               <a:t>Second level</a:t>
             </a:r>
+            <a:endParaRPr lang="en-US"/>
           </a:p>
           <a:p>
             <a:pPr lvl="2"/>
@@ -6946,6 +5410,7 @@
               <a:rPr lang="en-US"/>
               <a:t>Third level</a:t>
             </a:r>
+            <a:endParaRPr lang="en-US"/>
           </a:p>
           <a:p>
             <a:pPr lvl="3"/>
@@ -6953,6 +5418,7 @@
               <a:rPr lang="en-US"/>
               <a:t>Fourth level</a:t>
             </a:r>
+            <a:endParaRPr lang="en-US"/>
           </a:p>
           <a:p>
             <a:pPr lvl="4"/>
@@ -7025,6 +5491,7 @@
               <a:rPr lang="en-US"/>
               <a:t>Edit Master text styles</a:t>
             </a:r>
+            <a:endParaRPr lang="en-US"/>
           </a:p>
         </p:txBody>
       </p:sp>
@@ -7053,6 +5520,7 @@
               <a:rPr lang="en-US"/>
               <a:t>Edit Master text styles</a:t>
             </a:r>
+            <a:endParaRPr lang="en-US"/>
           </a:p>
           <a:p>
             <a:pPr lvl="1"/>
@@ -7060,6 +5528,7 @@
               <a:rPr lang="en-US"/>
               <a:t>Second level</a:t>
             </a:r>
+            <a:endParaRPr lang="en-US"/>
           </a:p>
           <a:p>
             <a:pPr lvl="2"/>
@@ -7067,6 +5536,7 @@
               <a:rPr lang="en-US"/>
               <a:t>Third level</a:t>
             </a:r>
+            <a:endParaRPr lang="en-US"/>
           </a:p>
           <a:p>
             <a:pPr lvl="3"/>
@@ -7074,6 +5544,7 @@
               <a:rPr lang="en-US"/>
               <a:t>Fourth level</a:t>
             </a:r>
+            <a:endParaRPr lang="en-US"/>
           </a:p>
           <a:p>
             <a:pPr lvl="4"/>
@@ -7102,7 +5573,6 @@
           <a:p>
             <a:fld id="{48A87A34-81AB-432B-8DAE-1953F412C126}" type="datetimeFigureOut">
               <a:rPr lang="en-US" smtClean="0"/>
-              <a:t>10/24/2018</a:t>
             </a:fld>
             <a:endParaRPr lang="en-US" dirty="0"/>
           </a:p>
@@ -7144,18 +5614,12 @@
           <a:p>
             <a:fld id="{6D22F896-40B5-4ADD-8801-0D06FADFA095}" type="slidenum">
               <a:rPr lang="en-US" smtClean="0"/>
-              <a:t>‹#›</a:t>
             </a:fld>
             <a:endParaRPr lang="en-US" dirty="0"/>
           </a:p>
         </p:txBody>
       </p:sp>
     </p:spTree>
-    <p:extLst>
-      <p:ext uri="{BB962C8B-B14F-4D97-AF65-F5344CB8AC3E}">
-        <p14:creationId xmlns:p14="http://schemas.microsoft.com/office/powerpoint/2010/main" val="4010033861"/>
-      </p:ext>
-    </p:extLst>
   </p:cSld>
   <p:clrMapOvr>
     <a:masterClrMapping/>
@@ -7220,7 +5684,6 @@
           <a:p>
             <a:fld id="{48A87A34-81AB-432B-8DAE-1953F412C126}" type="datetimeFigureOut">
               <a:rPr lang="en-US" smtClean="0"/>
-              <a:t>10/24/2018</a:t>
             </a:fld>
             <a:endParaRPr lang="en-US" dirty="0"/>
           </a:p>
@@ -7262,18 +5725,12 @@
           <a:p>
             <a:fld id="{6D22F896-40B5-4ADD-8801-0D06FADFA095}" type="slidenum">
               <a:rPr lang="en-US" smtClean="0"/>
-              <a:t>‹#›</a:t>
             </a:fld>
             <a:endParaRPr lang="en-US" dirty="0"/>
           </a:p>
         </p:txBody>
       </p:sp>
     </p:spTree>
-    <p:extLst>
-      <p:ext uri="{BB962C8B-B14F-4D97-AF65-F5344CB8AC3E}">
-        <p14:creationId xmlns:p14="http://schemas.microsoft.com/office/powerpoint/2010/main" val="1007431593"/>
-      </p:ext>
-    </p:extLst>
   </p:cSld>
   <p:clrMapOvr>
     <a:masterClrMapping/>
@@ -7315,7 +5772,6 @@
           <a:p>
             <a:fld id="{48A87A34-81AB-432B-8DAE-1953F412C126}" type="datetimeFigureOut">
               <a:rPr lang="en-US" smtClean="0"/>
-              <a:t>10/24/2018</a:t>
             </a:fld>
             <a:endParaRPr lang="en-US" dirty="0"/>
           </a:p>
@@ -7357,18 +5813,12 @@
           <a:p>
             <a:fld id="{6D22F896-40B5-4ADD-8801-0D06FADFA095}" type="slidenum">
               <a:rPr lang="en-US" smtClean="0"/>
-              <a:t>‹#›</a:t>
             </a:fld>
             <a:endParaRPr lang="en-US" dirty="0"/>
           </a:p>
         </p:txBody>
       </p:sp>
     </p:spTree>
-    <p:extLst>
-      <p:ext uri="{BB962C8B-B14F-4D97-AF65-F5344CB8AC3E}">
-        <p14:creationId xmlns:p14="http://schemas.microsoft.com/office/powerpoint/2010/main" val="3526207531"/>
-      </p:ext>
-    </p:extLst>
   </p:cSld>
   <p:clrMapOvr>
     <a:masterClrMapping/>
@@ -7450,6 +5900,7 @@
               <a:rPr lang="en-US"/>
               <a:t>Edit Master text styles</a:t>
             </a:r>
+            <a:endParaRPr lang="en-US"/>
           </a:p>
           <a:p>
             <a:pPr lvl="1"/>
@@ -7457,6 +5908,7 @@
               <a:rPr lang="en-US"/>
               <a:t>Second level</a:t>
             </a:r>
+            <a:endParaRPr lang="en-US"/>
           </a:p>
           <a:p>
             <a:pPr lvl="2"/>
@@ -7464,6 +5916,7 @@
               <a:rPr lang="en-US"/>
               <a:t>Third level</a:t>
             </a:r>
+            <a:endParaRPr lang="en-US"/>
           </a:p>
           <a:p>
             <a:pPr lvl="3"/>
@@ -7471,6 +5924,7 @@
               <a:rPr lang="en-US"/>
               <a:t>Fourth level</a:t>
             </a:r>
+            <a:endParaRPr lang="en-US"/>
           </a:p>
           <a:p>
             <a:pPr lvl="4"/>
@@ -7568,6 +6022,7 @@
               <a:rPr lang="en-US"/>
               <a:t>Edit Master text styles</a:t>
             </a:r>
+            <a:endParaRPr lang="en-US"/>
           </a:p>
         </p:txBody>
       </p:sp>
@@ -7588,7 +6043,6 @@
           <a:p>
             <a:fld id="{48A87A34-81AB-432B-8DAE-1953F412C126}" type="datetimeFigureOut">
               <a:rPr lang="en-US" smtClean="0"/>
-              <a:t>10/24/2018</a:t>
             </a:fld>
             <a:endParaRPr lang="en-US" dirty="0"/>
           </a:p>
@@ -7630,18 +6084,12 @@
           <a:p>
             <a:fld id="{6D22F896-40B5-4ADD-8801-0D06FADFA095}" type="slidenum">
               <a:rPr lang="en-US" smtClean="0"/>
-              <a:t>‹#›</a:t>
             </a:fld>
             <a:endParaRPr lang="en-US" dirty="0"/>
           </a:p>
         </p:txBody>
       </p:sp>
     </p:spTree>
-    <p:extLst>
-      <p:ext uri="{BB962C8B-B14F-4D97-AF65-F5344CB8AC3E}">
-        <p14:creationId xmlns:p14="http://schemas.microsoft.com/office/powerpoint/2010/main" val="150217349"/>
-      </p:ext>
-    </p:extLst>
   </p:cSld>
   <p:clrMapOvr>
     <a:masterClrMapping/>
@@ -7849,6 +6297,7 @@
               <a:rPr lang="en-US"/>
               <a:t>Edit Master text styles</a:t>
             </a:r>
+            <a:endParaRPr lang="en-US"/>
           </a:p>
         </p:txBody>
       </p:sp>
@@ -7869,7 +6318,6 @@
           <a:p>
             <a:fld id="{48A87A34-81AB-432B-8DAE-1953F412C126}" type="datetimeFigureOut">
               <a:rPr lang="en-US" smtClean="0"/>
-              <a:t>10/24/2018</a:t>
             </a:fld>
             <a:endParaRPr lang="en-US" dirty="0"/>
           </a:p>
@@ -7911,18 +6359,12 @@
           <a:p>
             <a:fld id="{6D22F896-40B5-4ADD-8801-0D06FADFA095}" type="slidenum">
               <a:rPr lang="en-US" smtClean="0"/>
-              <a:t>‹#›</a:t>
             </a:fld>
             <a:endParaRPr lang="en-US" dirty="0"/>
           </a:p>
         </p:txBody>
       </p:sp>
     </p:spTree>
-    <p:extLst>
-      <p:ext uri="{BB962C8B-B14F-4D97-AF65-F5344CB8AC3E}">
-        <p14:creationId xmlns:p14="http://schemas.microsoft.com/office/powerpoint/2010/main" val="1825496774"/>
-      </p:ext>
-    </p:extLst>
   </p:cSld>
   <p:clrMapOvr>
     <a:masterClrMapping/>
@@ -7936,7 +6378,7 @@
     <p:bg>
       <p:bgPr>
         <a:blipFill dpi="0" rotWithShape="1">
-          <a:blip r:embed="rId19">
+          <a:blip r:embed="rId18">
             <a:lum/>
           </a:blip>
           <a:srcRect/>
@@ -8024,6 +6466,7 @@
               <a:rPr lang="en-US"/>
               <a:t>Edit Master text styles</a:t>
             </a:r>
+            <a:endParaRPr lang="en-US"/>
           </a:p>
           <a:p>
             <a:pPr lvl="1"/>
@@ -8031,6 +6474,7 @@
               <a:rPr lang="en-US"/>
               <a:t>Second level</a:t>
             </a:r>
+            <a:endParaRPr lang="en-US"/>
           </a:p>
           <a:p>
             <a:pPr lvl="2"/>
@@ -8038,6 +6482,7 @@
               <a:rPr lang="en-US"/>
               <a:t>Third level</a:t>
             </a:r>
+            <a:endParaRPr lang="en-US"/>
           </a:p>
           <a:p>
             <a:pPr lvl="3"/>
@@ -8045,6 +6490,7 @@
               <a:rPr lang="en-US"/>
               <a:t>Fourth level</a:t>
             </a:r>
+            <a:endParaRPr lang="en-US"/>
           </a:p>
           <a:p>
             <a:pPr lvl="4"/>
@@ -8109,8 +6555,6 @@
           <a:p>
             <a:fld id="{48A87A34-81AB-432B-8DAE-1953F412C126}" type="datetimeFigureOut">
               <a:rPr lang="en-US" smtClean="0"/>
-              <a:pPr/>
-              <a:t>10/24/2018</a:t>
             </a:fld>
             <a:endParaRPr lang="en-US" dirty="0"/>
           </a:p>
@@ -8224,39 +6668,32 @@
           <a:p>
             <a:fld id="{6D22F896-40B5-4ADD-8801-0D06FADFA095}" type="slidenum">
               <a:rPr lang="en-US" smtClean="0"/>
-              <a:pPr/>
-              <a:t>‹#›</a:t>
             </a:fld>
             <a:endParaRPr lang="en-US" dirty="0"/>
           </a:p>
         </p:txBody>
       </p:sp>
     </p:spTree>
-    <p:extLst>
-      <p:ext uri="{BB962C8B-B14F-4D97-AF65-F5344CB8AC3E}">
-        <p14:creationId xmlns:p14="http://schemas.microsoft.com/office/powerpoint/2010/main" val="2893764555"/>
-      </p:ext>
-    </p:extLst>
   </p:cSld>
   <p:clrMap bg1="dk1" tx1="lt1" bg2="dk2" tx2="lt2" accent1="accent1" accent2="accent2" accent3="accent3" accent4="accent4" accent5="accent5" accent6="accent6" hlink="hlink" folHlink="folHlink"/>
   <p:sldLayoutIdLst>
-    <p:sldLayoutId id="2147483876" r:id="rId1"/>
-    <p:sldLayoutId id="2147483877" r:id="rId2"/>
-    <p:sldLayoutId id="2147483878" r:id="rId3"/>
-    <p:sldLayoutId id="2147483879" r:id="rId4"/>
-    <p:sldLayoutId id="2147483880" r:id="rId5"/>
-    <p:sldLayoutId id="2147483881" r:id="rId6"/>
-    <p:sldLayoutId id="2147483882" r:id="rId7"/>
-    <p:sldLayoutId id="2147483883" r:id="rId8"/>
-    <p:sldLayoutId id="2147483884" r:id="rId9"/>
-    <p:sldLayoutId id="2147483885" r:id="rId10"/>
-    <p:sldLayoutId id="2147483886" r:id="rId11"/>
-    <p:sldLayoutId id="2147483887" r:id="rId12"/>
-    <p:sldLayoutId id="2147483888" r:id="rId13"/>
-    <p:sldLayoutId id="2147483889" r:id="rId14"/>
-    <p:sldLayoutId id="2147483890" r:id="rId15"/>
-    <p:sldLayoutId id="2147483891" r:id="rId16"/>
-    <p:sldLayoutId id="2147483892" r:id="rId17"/>
+    <p:sldLayoutId id="2147483649" r:id="rId1"/>
+    <p:sldLayoutId id="2147483650" r:id="rId2"/>
+    <p:sldLayoutId id="2147483651" r:id="rId3"/>
+    <p:sldLayoutId id="2147483652" r:id="rId4"/>
+    <p:sldLayoutId id="2147483653" r:id="rId5"/>
+    <p:sldLayoutId id="2147483654" r:id="rId6"/>
+    <p:sldLayoutId id="2147483655" r:id="rId7"/>
+    <p:sldLayoutId id="2147483656" r:id="rId8"/>
+    <p:sldLayoutId id="2147483657" r:id="rId9"/>
+    <p:sldLayoutId id="2147483658" r:id="rId10"/>
+    <p:sldLayoutId id="2147483659" r:id="rId11"/>
+    <p:sldLayoutId id="2147483660" r:id="rId12"/>
+    <p:sldLayoutId id="2147483661" r:id="rId13"/>
+    <p:sldLayoutId id="2147483662" r:id="rId14"/>
+    <p:sldLayoutId id="2147483663" r:id="rId15"/>
+    <p:sldLayoutId id="2147483664" r:id="rId16"/>
+    <p:sldLayoutId id="2147483665" r:id="rId17"/>
   </p:sldLayoutIdLst>
   <p:txStyles>
     <p:titleStyle>
@@ -8760,11 +7197,6 @@
         </p:txBody>
       </p:sp>
     </p:spTree>
-    <p:extLst>
-      <p:ext uri="{BB962C8B-B14F-4D97-AF65-F5344CB8AC3E}">
-        <p14:creationId xmlns:p14="http://schemas.microsoft.com/office/powerpoint/2010/main" val="1430678027"/>
-      </p:ext>
-    </p:extLst>
   </p:cSld>
   <p:clrMapOvr>
     <a:masterClrMapping/>
@@ -8808,6 +7240,7 @@
               <a:rPr lang="en-US" dirty="0"/>
               <a:t>Agile Process (set 3)</a:t>
             </a:r>
+            <a:endParaRPr lang="en-US" dirty="0"/>
           </a:p>
         </p:txBody>
       </p:sp>
@@ -8837,6 +7270,7 @@
               <a:rPr lang="en-US" b="0" dirty="0"/>
               <a:t>Working software is the primary measure of progress. </a:t>
             </a:r>
+            <a:endParaRPr lang="en-US" b="0" dirty="0"/>
           </a:p>
           <a:p>
             <a:pPr>
@@ -8868,6 +7302,7 @@
               <a:rPr lang="en-US" b="0" dirty="0"/>
               <a:t>Agile processes promote sustainable development. The sponsors, developers, and users should be able to maintain a constant pace indefinitely. </a:t>
             </a:r>
+            <a:endParaRPr lang="en-US" b="0" dirty="0"/>
           </a:p>
           <a:p>
             <a:pPr>
@@ -8914,6 +7349,7 @@
               <a:rPr lang="en-US" b="0" dirty="0"/>
               <a:t>and good design enhances agility. </a:t>
             </a:r>
+            <a:endParaRPr lang="en-US" b="0" dirty="0"/>
           </a:p>
           <a:p>
             <a:pPr>
@@ -8934,11 +7370,6 @@
         </p:txBody>
       </p:sp>
     </p:spTree>
-    <p:extLst>
-      <p:ext uri="{BB962C8B-B14F-4D97-AF65-F5344CB8AC3E}">
-        <p14:creationId xmlns:p14="http://schemas.microsoft.com/office/powerpoint/2010/main" val="1833257090"/>
-      </p:ext>
-    </p:extLst>
   </p:cSld>
   <p:clrMapOvr>
     <a:masterClrMapping/>
@@ -8982,6 +7413,7 @@
               <a:rPr lang="en-US" dirty="0"/>
               <a:t>Agile Process (set 4)</a:t>
             </a:r>
+            <a:endParaRPr lang="en-US" dirty="0"/>
           </a:p>
         </p:txBody>
       </p:sp>
@@ -9013,6 +7445,7 @@
               <a:rPr lang="en-US" b="0" dirty="0"/>
               <a:t>of work not done--is essential. </a:t>
             </a:r>
+            <a:endParaRPr lang="en-US" b="0" dirty="0"/>
           </a:p>
           <a:p>
             <a:r>
@@ -9045,6 +7478,7 @@
               <a:rPr lang="en-US" b="0" dirty="0"/>
               <a:t>The best architectures, requirements, and designs emerge from self-organizing teams. </a:t>
             </a:r>
+            <a:endParaRPr lang="en-US" b="0" dirty="0"/>
           </a:p>
           <a:p>
             <a:r>
@@ -9080,6 +7514,7 @@
               <a:rPr lang="en-US" b="0" dirty="0"/>
               <a:t>to become more effective, then tunes and adjusts its behavior accordingly. </a:t>
             </a:r>
+            <a:endParaRPr lang="en-US" b="0" dirty="0"/>
           </a:p>
           <a:p>
             <a:r>
@@ -9099,11 +7534,6 @@
         </p:txBody>
       </p:sp>
     </p:spTree>
-    <p:extLst>
-      <p:ext uri="{BB962C8B-B14F-4D97-AF65-F5344CB8AC3E}">
-        <p14:creationId xmlns:p14="http://schemas.microsoft.com/office/powerpoint/2010/main" val="1395999162"/>
-      </p:ext>
-    </p:extLst>
   </p:cSld>
   <p:clrMapOvr>
     <a:masterClrMapping/>
@@ -9163,6 +7593,7 @@
               <a:rPr lang="en-US" dirty="0"/>
               <a:t> Programming</a:t>
             </a:r>
+            <a:endParaRPr lang="en-US" dirty="0"/>
           </a:p>
         </p:txBody>
       </p:sp>
@@ -9203,6 +7634,7 @@
               <a:rPr lang="en-US" sz="2400" dirty="0"/>
               <a:t>extreme)</a:t>
             </a:r>
+            <a:endParaRPr lang="en-US" sz="2400" dirty="0"/>
           </a:p>
         </p:txBody>
       </p:sp>
@@ -9212,13 +7644,7 @@
           <p:cNvGraphicFramePr>
             <a:graphicFrameLocks noGrp="1"/>
           </p:cNvGraphicFramePr>
-          <p:nvPr>
-            <p:extLst>
-              <p:ext uri="{D42A27DB-BD31-4B8C-83A1-F6EECF244321}">
-                <p14:modId xmlns:p14="http://schemas.microsoft.com/office/powerpoint/2010/main" val="351603206"/>
-              </p:ext>
-            </p:extLst>
-          </p:nvPr>
+          <p:nvPr/>
         </p:nvGraphicFramePr>
         <p:xfrm>
           <a:off x="1981201" y="2438401"/>
@@ -9231,20 +7657,8 @@
                 <a:tableStyleId>{5C22544A-7EE6-4342-B048-85BDC9FD1C3A}</a:tableStyleId>
               </a:tblPr>
               <a:tblGrid>
-                <a:gridCol w="3565581">
-                  <a:extLst>
-                    <a:ext uri="{9D8B030D-6E8A-4147-A177-3AD203B41FA5}">
-                      <a16:colId xmlns:a16="http://schemas.microsoft.com/office/drawing/2014/main" val="20000"/>
-                    </a:ext>
-                  </a:extLst>
-                </a:gridCol>
-                <a:gridCol w="4660970">
-                  <a:extLst>
-                    <a:ext uri="{9D8B030D-6E8A-4147-A177-3AD203B41FA5}">
-                      <a16:colId xmlns:a16="http://schemas.microsoft.com/office/drawing/2014/main" val="20001"/>
-                    </a:ext>
-                  </a:extLst>
-                </a:gridCol>
+                <a:gridCol w="3565581"/>
+                <a:gridCol w="4660970"/>
               </a:tblGrid>
               <a:tr h="326755">
                 <a:tc>
@@ -9277,8 +7691,8 @@
                           <a:srgbClr val="C00000"/>
                         </a:solidFill>
                         <a:effectLst/>
-                        <a:latin typeface="Times New Roman"/>
-                        <a:ea typeface="SimSun"/>
+                        <a:latin typeface="Times New Roman" panose="02020603050405020304"/>
+                        <a:ea typeface="宋体" panose="02010600030101010101" pitchFamily="2" charset="-122"/>
                       </a:endParaRPr>
                     </a:p>
                   </a:txBody>
@@ -9314,18 +7728,13 @@
                           <a:srgbClr val="C00000"/>
                         </a:solidFill>
                         <a:effectLst/>
-                        <a:latin typeface="Times New Roman"/>
-                        <a:ea typeface="SimSun"/>
+                        <a:latin typeface="Times New Roman" panose="02020603050405020304"/>
+                        <a:ea typeface="宋体" panose="02010600030101010101" pitchFamily="2" charset="-122"/>
                       </a:endParaRPr>
                     </a:p>
                   </a:txBody>
                   <a:tcPr marL="68580" marR="68580" marT="0" marB="0" anchor="ctr"/>
                 </a:tc>
-                <a:extLst>
-                  <a:ext uri="{0D108BD9-81ED-4DB2-BD59-A6C34878D82A}">
-                    <a16:rowId xmlns:a16="http://schemas.microsoft.com/office/drawing/2014/main" val="10000"/>
-                  </a:ext>
-                </a:extLst>
               </a:tr>
               <a:tr h="419573">
                 <a:tc>
@@ -9358,9 +7767,9 @@
                       </a:r>
                       <a:endParaRPr lang="en-US" sz="1400" dirty="0">
                         <a:effectLst/>
-                        <a:latin typeface="Verdana"/>
-                        <a:ea typeface="SimSun"/>
-                        <a:cs typeface="Times New Roman"/>
+                        <a:latin typeface="Verdana" panose="020B0604030504040204"/>
+                        <a:ea typeface="宋体" panose="02010600030101010101" pitchFamily="2" charset="-122"/>
+                        <a:cs typeface="Times New Roman" panose="02020603050405020304"/>
                       </a:endParaRPr>
                     </a:p>
                   </a:txBody>
@@ -9396,19 +7805,14 @@
                       </a:r>
                       <a:endParaRPr lang="en-US" sz="1400" dirty="0">
                         <a:effectLst/>
-                        <a:latin typeface="Verdana"/>
-                        <a:ea typeface="SimSun"/>
-                        <a:cs typeface="Times New Roman"/>
+                        <a:latin typeface="Verdana" panose="020B0604030504040204"/>
+                        <a:ea typeface="宋体" panose="02010600030101010101" pitchFamily="2" charset="-122"/>
+                        <a:cs typeface="Times New Roman" panose="02020603050405020304"/>
                       </a:endParaRPr>
                     </a:p>
                   </a:txBody>
                   <a:tcPr marL="68580" marR="68580" marT="0" marB="0" anchor="ctr"/>
                 </a:tc>
-                <a:extLst>
-                  <a:ext uri="{0D108BD9-81ED-4DB2-BD59-A6C34878D82A}">
-                    <a16:rowId xmlns:a16="http://schemas.microsoft.com/office/drawing/2014/main" val="10001"/>
-                  </a:ext>
-                </a:extLst>
               </a:tr>
               <a:tr h="349015">
                 <a:tc>
@@ -9430,7 +7834,6 @@
                         <a:buSzTx/>
                         <a:buFontTx/>
                         <a:buNone/>
-                        <a:tabLst/>
                         <a:defRPr/>
                       </a:pPr>
                       <a:r>
@@ -9459,9 +7862,9 @@
                         <a:effectLst/>
                         <a:uLnTx/>
                         <a:uFillTx/>
-                        <a:latin typeface="Verdana"/>
-                        <a:ea typeface="SimSun"/>
-                        <a:cs typeface="Times New Roman"/>
+                        <a:latin typeface="Verdana" panose="020B0604030504040204"/>
+                        <a:ea typeface="宋体" panose="02010600030101010101" pitchFamily="2" charset="-122"/>
+                        <a:cs typeface="Times New Roman" panose="02020603050405020304"/>
                       </a:endParaRPr>
                     </a:p>
                   </a:txBody>
@@ -9501,19 +7904,14 @@
                       </a:r>
                       <a:endParaRPr lang="en-US" sz="1400" dirty="0">
                         <a:effectLst/>
-                        <a:latin typeface="Verdana"/>
-                        <a:ea typeface="SimSun"/>
-                        <a:cs typeface="Times New Roman"/>
+                        <a:latin typeface="Verdana" panose="020B0604030504040204"/>
+                        <a:ea typeface="宋体" panose="02010600030101010101" pitchFamily="2" charset="-122"/>
+                        <a:cs typeface="Times New Roman" panose="02020603050405020304"/>
                       </a:endParaRPr>
                     </a:p>
                   </a:txBody>
                   <a:tcPr marL="68580" marR="68580" marT="0" marB="0" anchor="ctr"/>
                 </a:tc>
-                <a:extLst>
-                  <a:ext uri="{0D108BD9-81ED-4DB2-BD59-A6C34878D82A}">
-                    <a16:rowId xmlns:a16="http://schemas.microsoft.com/office/drawing/2014/main" val="10002"/>
-                  </a:ext>
-                </a:extLst>
               </a:tr>
               <a:tr h="699847">
                 <a:tc>
@@ -9552,9 +7950,9 @@
                       </a:r>
                       <a:endParaRPr lang="en-US" sz="1400" dirty="0">
                         <a:effectLst/>
-                        <a:latin typeface="Verdana"/>
-                        <a:ea typeface="SimSun"/>
-                        <a:cs typeface="Times New Roman"/>
+                        <a:latin typeface="Verdana" panose="020B0604030504040204"/>
+                        <a:ea typeface="宋体" panose="02010600030101010101" pitchFamily="2" charset="-122"/>
+                        <a:cs typeface="Times New Roman" panose="02020603050405020304"/>
                       </a:endParaRPr>
                     </a:p>
                   </a:txBody>
@@ -9608,19 +8006,14 @@
                       </a:r>
                       <a:endParaRPr lang="en-US" sz="1400" dirty="0">
                         <a:effectLst/>
-                        <a:latin typeface="Verdana"/>
-                        <a:ea typeface="SimSun"/>
-                        <a:cs typeface="Times New Roman"/>
+                        <a:latin typeface="Verdana" panose="020B0604030504040204"/>
+                        <a:ea typeface="宋体" panose="02010600030101010101" pitchFamily="2" charset="-122"/>
+                        <a:cs typeface="Times New Roman" panose="02020603050405020304"/>
                       </a:endParaRPr>
                     </a:p>
                   </a:txBody>
                   <a:tcPr marL="68580" marR="68580" marT="0" marB="0" anchor="ctr"/>
                 </a:tc>
-                <a:extLst>
-                  <a:ext uri="{0D108BD9-81ED-4DB2-BD59-A6C34878D82A}">
-                    <a16:rowId xmlns:a16="http://schemas.microsoft.com/office/drawing/2014/main" val="10003"/>
-                  </a:ext>
-                </a:extLst>
               </a:tr>
               <a:tr h="689685">
                 <a:tc>
@@ -9647,9 +8040,9 @@
                       </a:r>
                       <a:endParaRPr lang="en-US" sz="1400" dirty="0">
                         <a:effectLst/>
-                        <a:latin typeface="Verdana"/>
-                        <a:ea typeface="SimSun"/>
-                        <a:cs typeface="Times New Roman"/>
+                        <a:latin typeface="Verdana" panose="020B0604030504040204"/>
+                        <a:ea typeface="宋体" panose="02010600030101010101" pitchFamily="2" charset="-122"/>
+                        <a:cs typeface="Times New Roman" panose="02020603050405020304"/>
                       </a:endParaRPr>
                     </a:p>
                   </a:txBody>
@@ -9691,19 +8084,14 @@
                       </a:r>
                       <a:endParaRPr lang="en-US" sz="1400" dirty="0">
                         <a:effectLst/>
-                        <a:latin typeface="Verdana"/>
-                        <a:ea typeface="SimSun"/>
-                        <a:cs typeface="Times New Roman"/>
+                        <a:latin typeface="Verdana" panose="020B0604030504040204"/>
+                        <a:ea typeface="宋体" panose="02010600030101010101" pitchFamily="2" charset="-122"/>
+                        <a:cs typeface="Times New Roman" panose="02020603050405020304"/>
                       </a:endParaRPr>
                     </a:p>
                   </a:txBody>
                   <a:tcPr marL="68580" marR="68580" marT="0" marB="0" anchor="ctr"/>
                 </a:tc>
-                <a:extLst>
-                  <a:ext uri="{0D108BD9-81ED-4DB2-BD59-A6C34878D82A}">
-                    <a16:rowId xmlns:a16="http://schemas.microsoft.com/office/drawing/2014/main" val="10004"/>
-                  </a:ext>
-                </a:extLst>
               </a:tr>
               <a:tr h="689685">
                 <a:tc>
@@ -9730,9 +8118,9 @@
                       </a:r>
                       <a:endParaRPr lang="en-US" sz="1400" dirty="0">
                         <a:effectLst/>
-                        <a:latin typeface="Verdana"/>
-                        <a:ea typeface="SimSun"/>
-                        <a:cs typeface="Times New Roman"/>
+                        <a:latin typeface="Verdana" panose="020B0604030504040204"/>
+                        <a:ea typeface="宋体" panose="02010600030101010101" pitchFamily="2" charset="-122"/>
+                        <a:cs typeface="Times New Roman" panose="02020603050405020304"/>
                       </a:endParaRPr>
                     </a:p>
                   </a:txBody>
@@ -9780,19 +8168,14 @@
                       </a:r>
                       <a:endParaRPr lang="en-US" sz="1400" dirty="0">
                         <a:effectLst/>
-                        <a:latin typeface="Verdana"/>
-                        <a:ea typeface="SimSun"/>
-                        <a:cs typeface="Times New Roman"/>
+                        <a:latin typeface="Verdana" panose="020B0604030504040204"/>
+                        <a:ea typeface="宋体" panose="02010600030101010101" pitchFamily="2" charset="-122"/>
+                        <a:cs typeface="Times New Roman" panose="02020603050405020304"/>
                       </a:endParaRPr>
                     </a:p>
                   </a:txBody>
                   <a:tcPr marL="68580" marR="68580" marT="0" marB="0" anchor="ctr"/>
                 </a:tc>
-                <a:extLst>
-                  <a:ext uri="{0D108BD9-81ED-4DB2-BD59-A6C34878D82A}">
-                    <a16:rowId xmlns:a16="http://schemas.microsoft.com/office/drawing/2014/main" val="10005"/>
-                  </a:ext>
-                </a:extLst>
               </a:tr>
               <a:tr h="689685">
                 <a:tc>
@@ -9877,11 +8260,6 @@
                   </a:txBody>
                   <a:tcPr marL="68580" marR="68580" marT="0" marB="0" anchor="ctr"/>
                 </a:tc>
-                <a:extLst>
-                  <a:ext uri="{0D108BD9-81ED-4DB2-BD59-A6C34878D82A}">
-                    <a16:rowId xmlns:a16="http://schemas.microsoft.com/office/drawing/2014/main" val="10006"/>
-                  </a:ext>
-                </a:extLst>
               </a:tr>
               <a:tr h="326755">
                 <a:tc>
@@ -9908,9 +8286,9 @@
                       </a:r>
                       <a:endParaRPr lang="en-US" sz="1600" dirty="0">
                         <a:effectLst/>
-                        <a:latin typeface="Verdana"/>
-                        <a:ea typeface="SimSun"/>
-                        <a:cs typeface="Times New Roman"/>
+                        <a:latin typeface="Verdana" panose="020B0604030504040204"/>
+                        <a:ea typeface="宋体" panose="02010600030101010101" pitchFamily="2" charset="-122"/>
+                        <a:cs typeface="Times New Roman" panose="02020603050405020304"/>
                       </a:endParaRPr>
                     </a:p>
                   </a:txBody>
@@ -9940,30 +8318,20 @@
                       </a:r>
                       <a:endParaRPr lang="en-US" sz="1600" dirty="0">
                         <a:effectLst/>
-                        <a:latin typeface="Verdana"/>
-                        <a:ea typeface="SimSun"/>
-                        <a:cs typeface="Times New Roman"/>
+                        <a:latin typeface="Verdana" panose="020B0604030504040204"/>
+                        <a:ea typeface="宋体" panose="02010600030101010101" pitchFamily="2" charset="-122"/>
+                        <a:cs typeface="Times New Roman" panose="02020603050405020304"/>
                       </a:endParaRPr>
                     </a:p>
                   </a:txBody>
                   <a:tcPr marL="68580" marR="68580" marT="0" marB="0" anchor="ctr"/>
                 </a:tc>
-                <a:extLst>
-                  <a:ext uri="{0D108BD9-81ED-4DB2-BD59-A6C34878D82A}">
-                    <a16:rowId xmlns:a16="http://schemas.microsoft.com/office/drawing/2014/main" val="10007"/>
-                  </a:ext>
-                </a:extLst>
               </a:tr>
             </a:tbl>
           </a:graphicData>
         </a:graphic>
       </p:graphicFrame>
     </p:spTree>
-    <p:extLst>
-      <p:ext uri="{BB962C8B-B14F-4D97-AF65-F5344CB8AC3E}">
-        <p14:creationId xmlns:p14="http://schemas.microsoft.com/office/powerpoint/2010/main" val="2529894550"/>
-      </p:ext>
-    </p:extLst>
   </p:cSld>
   <p:clrMapOvr>
     <a:masterClrMapping/>
@@ -10007,6 +8375,7 @@
               <a:rPr lang="en-US" dirty="0"/>
               <a:t>SCRUM</a:t>
             </a:r>
+            <a:endParaRPr lang="en-US" dirty="0"/>
           </a:p>
         </p:txBody>
       </p:sp>
@@ -10031,12 +8400,14 @@
               <a:rPr lang="en-US" dirty="0"/>
               <a:t>SCRUM is an iterative, incremental methodology for project management often seen in agile software development. </a:t>
             </a:r>
+            <a:endParaRPr lang="en-US" dirty="0"/>
           </a:p>
           <a:p>
             <a:r>
               <a:rPr lang="en-US" dirty="0"/>
               <a:t>Roles</a:t>
             </a:r>
+            <a:endParaRPr lang="en-US" dirty="0"/>
           </a:p>
           <a:p>
             <a:pPr lvl="1"/>
@@ -10052,6 +8423,7 @@
               <a:rPr lang="en-US" dirty="0"/>
               <a:t>”, who maintains the processes (project manager)</a:t>
             </a:r>
+            <a:endParaRPr lang="en-US" dirty="0"/>
           </a:p>
           <a:p>
             <a:pPr lvl="1"/>
@@ -10067,6 +8439,7 @@
               <a:rPr lang="en-US" dirty="0"/>
               <a:t>”, who represents the stakeholders and the business</a:t>
             </a:r>
+            <a:endParaRPr lang="en-US" dirty="0"/>
           </a:p>
           <a:p>
             <a:pPr lvl="1"/>
@@ -10082,18 +8455,14 @@
               <a:rPr lang="en-US" dirty="0"/>
               <a:t>”, a cross-functional group carrying out the actual analysis, design, implementation, testing, etc.</a:t>
             </a:r>
-          </a:p>
-          <a:p>
             <a:endParaRPr lang="en-US" dirty="0"/>
           </a:p>
+          <a:p>
+            <a:endParaRPr lang="en-US" dirty="0"/>
+          </a:p>
         </p:txBody>
       </p:sp>
     </p:spTree>
-    <p:extLst>
-      <p:ext uri="{BB962C8B-B14F-4D97-AF65-F5344CB8AC3E}">
-        <p14:creationId xmlns:p14="http://schemas.microsoft.com/office/powerpoint/2010/main" val="330817161"/>
-      </p:ext>
-    </p:extLst>
   </p:cSld>
   <p:clrMapOvr>
     <a:masterClrMapping/>
@@ -10154,7 +8523,7 @@
           <p:nvPr/>
         </p:nvPicPr>
         <p:blipFill>
-          <a:blip r:embed="rId2">
+          <a:blip r:embed="rId1">
             <a:extLst>
               <a:ext uri="{28A0092B-C50C-407E-A947-70E740481C1C}">
                 <a14:useLocalDpi xmlns:a14="http://schemas.microsoft.com/office/drawing/2010/main" val="0"/>
@@ -10210,11 +8579,6 @@
         </p:spPr>
       </p:pic>
     </p:spTree>
-    <p:extLst>
-      <p:ext uri="{BB962C8B-B14F-4D97-AF65-F5344CB8AC3E}">
-        <p14:creationId xmlns:p14="http://schemas.microsoft.com/office/powerpoint/2010/main" val="1774392826"/>
-      </p:ext>
-    </p:extLst>
   </p:cSld>
   <p:clrMapOvr>
     <a:masterClrMapping/>
@@ -10258,6 +8622,7 @@
               <a:rPr lang="en-US" dirty="0"/>
               <a:t>Scrum + Sprint</a:t>
             </a:r>
+            <a:endParaRPr lang="en-US" dirty="0"/>
           </a:p>
         </p:txBody>
       </p:sp>
@@ -10272,7 +8637,7 @@
           </p:nvPr>
         </p:nvPicPr>
         <p:blipFill>
-          <a:blip r:embed="rId2"/>
+          <a:blip r:embed="rId1"/>
           <a:stretch>
             <a:fillRect/>
           </a:stretch>
@@ -10288,11 +8653,6 @@
         </p:spPr>
       </p:pic>
     </p:spTree>
-    <p:extLst>
-      <p:ext uri="{BB962C8B-B14F-4D97-AF65-F5344CB8AC3E}">
-        <p14:creationId xmlns:p14="http://schemas.microsoft.com/office/powerpoint/2010/main" val="2611250627"/>
-      </p:ext>
-    </p:extLst>
   </p:cSld>
   <p:clrMapOvr>
     <a:masterClrMapping/>
@@ -10415,11 +8775,6 @@
         </p:txBody>
       </p:sp>
     </p:spTree>
-    <p:extLst>
-      <p:ext uri="{BB962C8B-B14F-4D97-AF65-F5344CB8AC3E}">
-        <p14:creationId xmlns:p14="http://schemas.microsoft.com/office/powerpoint/2010/main" val="2442703833"/>
-      </p:ext>
-    </p:extLst>
   </p:cSld>
   <p:clrMapOvr>
     <a:masterClrMapping/>
@@ -10572,11 +8927,6 @@
         </p:txBody>
       </p:sp>
     </p:spTree>
-    <p:extLst>
-      <p:ext uri="{BB962C8B-B14F-4D97-AF65-F5344CB8AC3E}">
-        <p14:creationId xmlns:p14="http://schemas.microsoft.com/office/powerpoint/2010/main" val="1311308502"/>
-      </p:ext>
-    </p:extLst>
   </p:cSld>
   <p:clrMapOvr>
     <a:masterClrMapping/>
@@ -10707,11 +9057,6 @@
         </p:txBody>
       </p:sp>
     </p:spTree>
-    <p:extLst>
-      <p:ext uri="{BB962C8B-B14F-4D97-AF65-F5344CB8AC3E}">
-        <p14:creationId xmlns:p14="http://schemas.microsoft.com/office/powerpoint/2010/main" val="3945486089"/>
-      </p:ext>
-    </p:extLst>
   </p:cSld>
   <p:clrMapOvr>
     <a:masterClrMapping/>
@@ -10810,11 +9155,6 @@
         </p:txBody>
       </p:sp>
     </p:spTree>
-    <p:extLst>
-      <p:ext uri="{BB962C8B-B14F-4D97-AF65-F5344CB8AC3E}">
-        <p14:creationId xmlns:p14="http://schemas.microsoft.com/office/powerpoint/2010/main" val="3950939550"/>
-      </p:ext>
-    </p:extLst>
   </p:cSld>
   <p:clrMapOvr>
     <a:masterClrMapping/>
@@ -10906,6 +9246,11 @@
               </a:rPr>
               <a:t>Backlog</a:t>
             </a:r>
+            <a:endParaRPr lang="en-US" sz="1000" dirty="0">
+              <a:solidFill>
+                <a:schemeClr val="tx1"/>
+              </a:solidFill>
+            </a:endParaRPr>
           </a:p>
         </p:txBody>
       </p:sp>
@@ -10943,6 +9288,7 @@
               <a:rPr lang="en-US" sz="2900" dirty="0"/>
               <a:t>?</a:t>
             </a:r>
+            <a:endParaRPr lang="en-US" sz="2900" dirty="0"/>
           </a:p>
         </p:txBody>
       </p:sp>
@@ -10998,6 +9344,11 @@
               </a:rPr>
               <a:t>Agile</a:t>
             </a:r>
+            <a:endParaRPr lang="en-US" dirty="0">
+              <a:solidFill>
+                <a:schemeClr val="tx1"/>
+              </a:solidFill>
+            </a:endParaRPr>
           </a:p>
         </p:txBody>
       </p:sp>
@@ -11053,6 +9404,11 @@
               </a:rPr>
               <a:t>SCRUM</a:t>
             </a:r>
+            <a:endParaRPr lang="en-US" sz="1400" dirty="0">
+              <a:solidFill>
+                <a:schemeClr val="tx1"/>
+              </a:solidFill>
+            </a:endParaRPr>
           </a:p>
         </p:txBody>
       </p:sp>
@@ -11108,6 +9464,11 @@
               </a:rPr>
               <a:t>XP</a:t>
             </a:r>
+            <a:endParaRPr lang="en-US" sz="1400" dirty="0">
+              <a:solidFill>
+                <a:schemeClr val="tx1"/>
+              </a:solidFill>
+            </a:endParaRPr>
           </a:p>
         </p:txBody>
       </p:sp>
@@ -11163,6 +9524,11 @@
               </a:rPr>
               <a:t>FDD</a:t>
             </a:r>
+            <a:endParaRPr lang="en-US" sz="1400" dirty="0">
+              <a:solidFill>
+                <a:schemeClr val="tx1"/>
+              </a:solidFill>
+            </a:endParaRPr>
           </a:p>
         </p:txBody>
       </p:sp>
@@ -11218,6 +9584,11 @@
               </a:rPr>
               <a:t>TDD</a:t>
             </a:r>
+            <a:endParaRPr lang="en-US" sz="1000" dirty="0">
+              <a:solidFill>
+                <a:schemeClr val="tx1"/>
+              </a:solidFill>
+            </a:endParaRPr>
           </a:p>
         </p:txBody>
       </p:sp>
@@ -11273,6 +9644,11 @@
               </a:rPr>
               <a:t>BDD</a:t>
             </a:r>
+            <a:endParaRPr lang="en-US" sz="1000" dirty="0">
+              <a:solidFill>
+                <a:schemeClr val="tx1"/>
+              </a:solidFill>
+            </a:endParaRPr>
           </a:p>
         </p:txBody>
       </p:sp>
@@ -11328,6 +9704,11 @@
               </a:rPr>
               <a:t>CI</a:t>
             </a:r>
+            <a:endParaRPr lang="en-US" sz="1000" dirty="0">
+              <a:solidFill>
+                <a:schemeClr val="tx1"/>
+              </a:solidFill>
+            </a:endParaRPr>
           </a:p>
         </p:txBody>
       </p:sp>
@@ -11383,6 +9764,11 @@
               </a:rPr>
               <a:t>Burn-down</a:t>
             </a:r>
+            <a:endParaRPr lang="en-US" sz="1000" dirty="0">
+              <a:solidFill>
+                <a:schemeClr val="tx1"/>
+              </a:solidFill>
+            </a:endParaRPr>
           </a:p>
         </p:txBody>
       </p:sp>
@@ -11573,6 +9959,11 @@
               </a:rPr>
               <a:t>Backlog</a:t>
             </a:r>
+            <a:endParaRPr lang="en-US" sz="1000" dirty="0">
+              <a:solidFill>
+                <a:schemeClr val="tx1"/>
+              </a:solidFill>
+            </a:endParaRPr>
           </a:p>
         </p:txBody>
       </p:sp>
@@ -11628,6 +10019,11 @@
               </a:rPr>
               <a:t>Feature Team</a:t>
             </a:r>
+            <a:endParaRPr lang="en-US" sz="1000" dirty="0">
+              <a:solidFill>
+                <a:schemeClr val="tx1"/>
+              </a:solidFill>
+            </a:endParaRPr>
           </a:p>
         </p:txBody>
       </p:sp>
@@ -11683,6 +10079,11 @@
               </a:rPr>
               <a:t>Pair Programming</a:t>
             </a:r>
+            <a:endParaRPr lang="en-US" sz="1000" dirty="0">
+              <a:solidFill>
+                <a:schemeClr val="tx1"/>
+              </a:solidFill>
+            </a:endParaRPr>
           </a:p>
         </p:txBody>
       </p:sp>
@@ -11849,6 +10250,11 @@
               </a:rPr>
               <a:t>Extract Activities</a:t>
             </a:r>
+            <a:endParaRPr lang="en-US" sz="1000" dirty="0">
+              <a:solidFill>
+                <a:schemeClr val="tx1"/>
+              </a:solidFill>
+            </a:endParaRPr>
           </a:p>
         </p:txBody>
       </p:sp>
@@ -11904,15 +10310,15 @@
               </a:rPr>
               <a:t>Domain Model</a:t>
             </a:r>
+            <a:endParaRPr lang="en-US" sz="1000" dirty="0">
+              <a:solidFill>
+                <a:schemeClr val="tx1"/>
+              </a:solidFill>
+            </a:endParaRPr>
           </a:p>
         </p:txBody>
       </p:sp>
     </p:spTree>
-    <p:extLst>
-      <p:ext uri="{BB962C8B-B14F-4D97-AF65-F5344CB8AC3E}">
-        <p14:creationId xmlns:p14="http://schemas.microsoft.com/office/powerpoint/2010/main" val="416517981"/>
-      </p:ext>
-    </p:extLst>
   </p:cSld>
   <p:clrMapOvr>
     <a:masterClrMapping/>
@@ -12029,7 +10435,7 @@
             <a:endParaRPr lang="en-US" dirty="0"/>
           </a:p>
           <a:p>
-            <a:pPr marL="118872" indent="0" eaLnBrk="0" hangingPunct="0">
+            <a:pPr marL="118745" indent="0" eaLnBrk="0" hangingPunct="0">
               <a:buNone/>
             </a:pPr>
             <a:endParaRPr lang="en-US" dirty="0"/>
@@ -12051,7 +10457,7 @@
             <a:endParaRPr lang="en-US" dirty="0"/>
           </a:p>
           <a:p>
-            <a:pPr marL="118872" indent="0">
+            <a:pPr marL="118745" indent="0">
               <a:buNone/>
             </a:pPr>
             <a:endParaRPr lang="en-US" dirty="0"/>
@@ -12059,11 +10465,6 @@
         </p:txBody>
       </p:sp>
     </p:spTree>
-    <p:extLst>
-      <p:ext uri="{BB962C8B-B14F-4D97-AF65-F5344CB8AC3E}">
-        <p14:creationId xmlns:p14="http://schemas.microsoft.com/office/powerpoint/2010/main" val="591291967"/>
-      </p:ext>
-    </p:extLst>
   </p:cSld>
   <p:clrMapOvr>
     <a:masterClrMapping/>
@@ -12132,7 +10533,7 @@
           </a:bodyPr>
           <a:lstStyle/>
           <a:p>
-            <a:pPr marL="118872" indent="0">
+            <a:pPr marL="118745" indent="0">
               <a:buNone/>
             </a:pPr>
             <a:r>
@@ -12154,13 +10555,13 @@
             <a:endParaRPr lang="en-US" altLang="zh-CN" dirty="0"/>
           </a:p>
           <a:p>
-            <a:pPr marL="118872" indent="0">
+            <a:pPr marL="118745" indent="0">
               <a:buNone/>
             </a:pPr>
             <a:endParaRPr lang="en-US" dirty="0"/>
           </a:p>
           <a:p>
-            <a:pPr marL="118872" indent="0">
+            <a:pPr marL="118745" indent="0">
               <a:buNone/>
             </a:pPr>
             <a:endParaRPr lang="en-US" altLang="zh-CN" dirty="0"/>
@@ -12174,7 +10575,7 @@
           <p:nvPr/>
         </p:nvPicPr>
         <p:blipFill>
-          <a:blip r:embed="rId2">
+          <a:blip r:embed="rId1">
             <a:extLst>
               <a:ext uri="{28A0092B-C50C-407E-A947-70E740481C1C}">
                 <a14:useLocalDpi xmlns:a14="http://schemas.microsoft.com/office/drawing/2010/main" val="0"/>
@@ -12207,7 +10608,7 @@
           <p:nvPr/>
         </p:nvPicPr>
         <p:blipFill>
-          <a:blip r:embed="rId3">
+          <a:blip r:embed="rId2">
             <a:extLst>
               <a:ext uri="{28A0092B-C50C-407E-A947-70E740481C1C}">
                 <a14:useLocalDpi xmlns:a14="http://schemas.microsoft.com/office/drawing/2010/main" val="0"/>
@@ -12234,11 +10635,6 @@
         </p:spPr>
       </p:pic>
     </p:spTree>
-    <p:extLst>
-      <p:ext uri="{BB962C8B-B14F-4D97-AF65-F5344CB8AC3E}">
-        <p14:creationId xmlns:p14="http://schemas.microsoft.com/office/powerpoint/2010/main" val="208916815"/>
-      </p:ext>
-    </p:extLst>
   </p:cSld>
   <p:clrMapOvr>
     <a:masterClrMapping/>
@@ -12298,25 +10694,6 @@
           </a:p>
         </p:txBody>
       </p:sp>
-      <p:sp>
-        <p:nvSpPr>
-          <p:cNvPr id="8" name="内容占位符 7"/>
-          <p:cNvSpPr>
-            <a:spLocks noGrp="1"/>
-          </p:cNvSpPr>
-          <p:nvPr>
-            <p:ph idx="1"/>
-          </p:nvPr>
-        </p:nvSpPr>
-        <p:spPr/>
-        <p:txBody>
-          <a:bodyPr/>
-          <a:lstStyle/>
-          <a:p>
-            <a:endParaRPr lang="en-US" dirty="0"/>
-          </a:p>
-        </p:txBody>
-      </p:sp>
       <p:pic>
         <p:nvPicPr>
           <p:cNvPr id="9" name="图片 8"/>
@@ -12326,7 +10703,7 @@
           <p:nvPr/>
         </p:nvPicPr>
         <p:blipFill>
-          <a:blip r:embed="rId3"/>
+          <a:blip r:embed="rId1"/>
           <a:stretch>
             <a:fillRect/>
           </a:stretch>
@@ -12342,11 +10719,6 @@
         </p:spPr>
       </p:pic>
     </p:spTree>
-    <p:extLst>
-      <p:ext uri="{BB962C8B-B14F-4D97-AF65-F5344CB8AC3E}">
-        <p14:creationId xmlns:p14="http://schemas.microsoft.com/office/powerpoint/2010/main" val="1472001750"/>
-      </p:ext>
-    </p:extLst>
   </p:cSld>
   <p:clrMapOvr>
     <a:masterClrMapping/>
@@ -12373,13 +10745,7 @@
       </p:grpSpPr>
       <p:sp>
         <p:nvSpPr>
-          <p:cNvPr id="2" name="Title 1">
-            <a:extLst>
-              <a:ext uri="{FF2B5EF4-FFF2-40B4-BE49-F238E27FC236}">
-                <a16:creationId xmlns:a16="http://schemas.microsoft.com/office/drawing/2014/main" id="{B522B4A5-A7C6-49CC-B76A-7E0E549BF6E6}"/>
-              </a:ext>
-            </a:extLst>
-          </p:cNvPr>
+          <p:cNvPr id="2" name="Title 1"/>
           <p:cNvSpPr>
             <a:spLocks noGrp="1"/>
           </p:cNvSpPr>
@@ -12402,13 +10768,7 @@
       </p:sp>
       <p:pic>
         <p:nvPicPr>
-          <p:cNvPr id="4" name="Content Placeholder 3">
-            <a:extLst>
-              <a:ext uri="{FF2B5EF4-FFF2-40B4-BE49-F238E27FC236}">
-                <a16:creationId xmlns:a16="http://schemas.microsoft.com/office/drawing/2014/main" id="{EB2D54B7-433B-4817-923E-D512359D38DB}"/>
-              </a:ext>
-            </a:extLst>
-          </p:cNvPr>
+          <p:cNvPr id="4" name="Content Placeholder 3"/>
           <p:cNvPicPr>
             <a:picLocks noGrp="1" noChangeAspect="1"/>
           </p:cNvPicPr>
@@ -12417,7 +10777,7 @@
           </p:nvPr>
         </p:nvPicPr>
         <p:blipFill>
-          <a:blip r:embed="rId3"/>
+          <a:blip r:embed="rId1"/>
           <a:stretch>
             <a:fillRect/>
           </a:stretch>
@@ -12433,11 +10793,6 @@
         </p:spPr>
       </p:pic>
     </p:spTree>
-    <p:extLst>
-      <p:ext uri="{BB962C8B-B14F-4D97-AF65-F5344CB8AC3E}">
-        <p14:creationId xmlns:p14="http://schemas.microsoft.com/office/powerpoint/2010/main" val="1388405499"/>
-      </p:ext>
-    </p:extLst>
   </p:cSld>
   <p:clrMapOvr>
     <a:masterClrMapping/>
@@ -12558,13 +10913,13 @@
             <a:endParaRPr lang="en-US" altLang="zh-CN" dirty="0"/>
           </a:p>
           <a:p>
-            <a:pPr marL="118872" indent="0">
+            <a:pPr marL="118745" indent="0">
               <a:buNone/>
             </a:pPr>
             <a:endParaRPr lang="en-US" dirty="0"/>
           </a:p>
           <a:p>
-            <a:pPr marL="118872" indent="0">
+            <a:pPr marL="118745" indent="0">
               <a:buNone/>
             </a:pPr>
             <a:endParaRPr lang="en-US" dirty="0"/>
@@ -12572,11 +10927,6 @@
         </p:txBody>
       </p:sp>
     </p:spTree>
-    <p:extLst>
-      <p:ext uri="{BB962C8B-B14F-4D97-AF65-F5344CB8AC3E}">
-        <p14:creationId xmlns:p14="http://schemas.microsoft.com/office/powerpoint/2010/main" val="2833468711"/>
-      </p:ext>
-    </p:extLst>
   </p:cSld>
   <p:clrMapOvr>
     <a:masterClrMapping/>
@@ -12774,6 +11124,7 @@
               <a:rPr lang="zh-CN" altLang="en-US" dirty="0"/>
               <a:t>来写，测试由测试人员来做，现在每个人都全面负责， 自己搞定规格说明书，和别人沟通，同时自己搞定测试。</a:t>
             </a:r>
+            <a:endParaRPr lang="zh-CN" altLang="en-US" dirty="0"/>
           </a:p>
           <a:p>
             <a:pPr>
@@ -12786,11 +11137,6 @@
         </p:txBody>
       </p:sp>
     </p:spTree>
-    <p:extLst>
-      <p:ext uri="{BB962C8B-B14F-4D97-AF65-F5344CB8AC3E}">
-        <p14:creationId xmlns:p14="http://schemas.microsoft.com/office/powerpoint/2010/main" val="1803774022"/>
-      </p:ext>
-    </p:extLst>
   </p:cSld>
   <p:clrMapOvr>
     <a:masterClrMapping/>
@@ -12877,6 +11223,7 @@
               <a:rPr lang="en-US" altLang="zh-CN" b="0" dirty="0"/>
               <a:t>?     </a:t>
             </a:r>
+            <a:endParaRPr lang="en-US" altLang="zh-CN" b="0" dirty="0"/>
           </a:p>
           <a:p>
             <a:pPr lvl="1">
@@ -12940,6 +11287,7 @@
               <a:rPr lang="en-US" altLang="zh-CN" b="0" dirty="0"/>
               <a:t>.</a:t>
             </a:r>
+            <a:endParaRPr lang="en-US" altLang="zh-CN" b="0" dirty="0"/>
           </a:p>
           <a:p>
             <a:pPr>
@@ -13001,20 +11349,14 @@
       </p:sp>
       <p:pic>
         <p:nvPicPr>
-          <p:cNvPr id="5" name="Picture 4">
-            <a:extLst>
-              <a:ext uri="{FF2B5EF4-FFF2-40B4-BE49-F238E27FC236}">
-                <a16:creationId xmlns:a16="http://schemas.microsoft.com/office/drawing/2014/main" id="{9966FF37-16A5-4E90-A630-CDB0DFEE181A}"/>
-              </a:ext>
-            </a:extLst>
-          </p:cNvPr>
+          <p:cNvPr id="5" name="Picture 4"/>
           <p:cNvPicPr>
             <a:picLocks noChangeAspect="1"/>
           </p:cNvPicPr>
           <p:nvPr/>
         </p:nvPicPr>
         <p:blipFill>
-          <a:blip r:embed="rId2"/>
+          <a:blip r:embed="rId1"/>
           <a:stretch>
             <a:fillRect/>
           </a:stretch>
@@ -13030,11 +11372,6 @@
         </p:spPr>
       </p:pic>
     </p:spTree>
-    <p:extLst>
-      <p:ext uri="{BB962C8B-B14F-4D97-AF65-F5344CB8AC3E}">
-        <p14:creationId xmlns:p14="http://schemas.microsoft.com/office/powerpoint/2010/main" val="2123903328"/>
-      </p:ext>
-    </p:extLst>
   </p:cSld>
   <p:clrMapOvr>
     <a:masterClrMapping/>
@@ -13504,6 +11841,7 @@
               <a:rPr lang="en-US" dirty="0"/>
               <a:t> </a:t>
             </a:r>
+            <a:endParaRPr lang="en-US" dirty="0"/>
           </a:p>
           <a:p>
             <a:r>
@@ -13547,11 +11885,6 @@
         </p:txBody>
       </p:sp>
     </p:spTree>
-    <p:extLst>
-      <p:ext uri="{BB962C8B-B14F-4D97-AF65-F5344CB8AC3E}">
-        <p14:creationId xmlns:p14="http://schemas.microsoft.com/office/powerpoint/2010/main" val="3968743428"/>
-      </p:ext>
-    </p:extLst>
   </p:cSld>
   <p:clrMapOvr>
     <a:masterClrMapping/>
@@ -13701,11 +12034,6 @@
         </p:txBody>
       </p:sp>
     </p:spTree>
-    <p:extLst>
-      <p:ext uri="{BB962C8B-B14F-4D97-AF65-F5344CB8AC3E}">
-        <p14:creationId xmlns:p14="http://schemas.microsoft.com/office/powerpoint/2010/main" val="2263928036"/>
-      </p:ext>
-    </p:extLst>
   </p:cSld>
   <p:clrMapOvr>
     <a:masterClrMapping/>
@@ -13807,6 +12135,7 @@
               <a:rPr lang="en-US" dirty="0"/>
               <a:t>Scrum</a:t>
             </a:r>
+            <a:endParaRPr lang="en-US" dirty="0"/>
           </a:p>
           <a:p>
             <a:pPr eaLnBrk="0" hangingPunct="0">
@@ -13877,7 +12206,7 @@
             <a:endParaRPr lang="en-US" dirty="0"/>
           </a:p>
           <a:p>
-            <a:pPr marL="118872" indent="0">
+            <a:pPr marL="118745" indent="0">
               <a:lnSpc>
                 <a:spcPct val="120000"/>
               </a:lnSpc>
@@ -13888,11 +12217,6 @@
         </p:txBody>
       </p:sp>
     </p:spTree>
-    <p:extLst>
-      <p:ext uri="{BB962C8B-B14F-4D97-AF65-F5344CB8AC3E}">
-        <p14:creationId xmlns:p14="http://schemas.microsoft.com/office/powerpoint/2010/main" val="1978484899"/>
-      </p:ext>
-    </p:extLst>
   </p:cSld>
   <p:clrMapOvr>
     <a:masterClrMapping/>
@@ -13984,6 +12308,11 @@
               </a:rPr>
               <a:t>Backlog</a:t>
             </a:r>
+            <a:endParaRPr lang="en-US" sz="1000" dirty="0">
+              <a:solidFill>
+                <a:schemeClr val="tx1"/>
+              </a:solidFill>
+            </a:endParaRPr>
           </a:p>
         </p:txBody>
       </p:sp>
@@ -14013,6 +12342,7 @@
               <a:rPr lang="en-US" sz="2900" dirty="0"/>
               <a:t>What is Agile?</a:t>
             </a:r>
+            <a:endParaRPr lang="en-US" sz="2900" dirty="0"/>
           </a:p>
         </p:txBody>
       </p:sp>
@@ -14220,6 +12550,11 @@
               </a:rPr>
               <a:t>Agile</a:t>
             </a:r>
+            <a:endParaRPr lang="en-US" dirty="0">
+              <a:solidFill>
+                <a:schemeClr val="tx1"/>
+              </a:solidFill>
+            </a:endParaRPr>
           </a:p>
         </p:txBody>
       </p:sp>
@@ -14275,6 +12610,11 @@
               </a:rPr>
               <a:t>Scrum</a:t>
             </a:r>
+            <a:endParaRPr lang="en-US" sz="1400" dirty="0">
+              <a:solidFill>
+                <a:schemeClr val="tx1"/>
+              </a:solidFill>
+            </a:endParaRPr>
           </a:p>
         </p:txBody>
       </p:sp>
@@ -14330,6 +12670,11 @@
               </a:rPr>
               <a:t>XP</a:t>
             </a:r>
+            <a:endParaRPr lang="en-US" sz="1400" dirty="0">
+              <a:solidFill>
+                <a:schemeClr val="tx1"/>
+              </a:solidFill>
+            </a:endParaRPr>
           </a:p>
         </p:txBody>
       </p:sp>
@@ -14385,6 +12730,11 @@
               </a:rPr>
               <a:t>FDD</a:t>
             </a:r>
+            <a:endParaRPr lang="en-US" sz="1400" dirty="0">
+              <a:solidFill>
+                <a:schemeClr val="tx1"/>
+              </a:solidFill>
+            </a:endParaRPr>
           </a:p>
         </p:txBody>
       </p:sp>
@@ -14440,6 +12790,11 @@
               </a:rPr>
               <a:t>Others</a:t>
             </a:r>
+            <a:endParaRPr lang="en-US" sz="1400" dirty="0">
+              <a:solidFill>
+                <a:schemeClr val="tx1"/>
+              </a:solidFill>
+            </a:endParaRPr>
           </a:p>
         </p:txBody>
       </p:sp>
@@ -14646,6 +13001,11 @@
               </a:rPr>
               <a:t>TDD</a:t>
             </a:r>
+            <a:endParaRPr lang="en-US" sz="1000" dirty="0">
+              <a:solidFill>
+                <a:schemeClr val="tx1"/>
+              </a:solidFill>
+            </a:endParaRPr>
           </a:p>
         </p:txBody>
       </p:sp>
@@ -14701,6 +13061,11 @@
               </a:rPr>
               <a:t>BDD</a:t>
             </a:r>
+            <a:endParaRPr lang="en-US" sz="1000" dirty="0">
+              <a:solidFill>
+                <a:schemeClr val="tx1"/>
+              </a:solidFill>
+            </a:endParaRPr>
           </a:p>
         </p:txBody>
       </p:sp>
@@ -14756,6 +13121,11 @@
               </a:rPr>
               <a:t>CI</a:t>
             </a:r>
+            <a:endParaRPr lang="en-US" sz="1000" dirty="0">
+              <a:solidFill>
+                <a:schemeClr val="tx1"/>
+              </a:solidFill>
+            </a:endParaRPr>
           </a:p>
         </p:txBody>
       </p:sp>
@@ -14811,6 +13181,11 @@
               </a:rPr>
               <a:t>Burn-down</a:t>
             </a:r>
+            <a:endParaRPr lang="en-US" sz="1000" dirty="0">
+              <a:solidFill>
+                <a:schemeClr val="tx1"/>
+              </a:solidFill>
+            </a:endParaRPr>
           </a:p>
         </p:txBody>
       </p:sp>
@@ -15001,6 +13376,11 @@
               </a:rPr>
               <a:t>Backlog</a:t>
             </a:r>
+            <a:endParaRPr lang="en-US" sz="1000" dirty="0">
+              <a:solidFill>
+                <a:schemeClr val="tx1"/>
+              </a:solidFill>
+            </a:endParaRPr>
           </a:p>
         </p:txBody>
       </p:sp>
@@ -15056,6 +13436,11 @@
               </a:rPr>
               <a:t>Feature Team</a:t>
             </a:r>
+            <a:endParaRPr lang="en-US" sz="1000" dirty="0">
+              <a:solidFill>
+                <a:schemeClr val="tx1"/>
+              </a:solidFill>
+            </a:endParaRPr>
           </a:p>
         </p:txBody>
       </p:sp>
@@ -15111,6 +13496,11 @@
               </a:rPr>
               <a:t>Pair Programming</a:t>
             </a:r>
+            <a:endParaRPr lang="en-US" sz="1000" dirty="0">
+              <a:solidFill>
+                <a:schemeClr val="tx1"/>
+              </a:solidFill>
+            </a:endParaRPr>
           </a:p>
         </p:txBody>
       </p:sp>
@@ -15601,6 +13991,7 @@
               <a:rPr lang="en-US" dirty="0"/>
               <a:t>.</a:t>
             </a:r>
+            <a:endParaRPr lang="en-US" dirty="0"/>
           </a:p>
         </p:txBody>
       </p:sp>
@@ -15694,6 +14085,11 @@
               </a:rPr>
               <a:t>Extract Activities</a:t>
             </a:r>
+            <a:endParaRPr lang="en-US" sz="1000" dirty="0">
+              <a:solidFill>
+                <a:schemeClr val="tx1"/>
+              </a:solidFill>
+            </a:endParaRPr>
           </a:p>
         </p:txBody>
       </p:sp>
@@ -15787,15 +14183,15 @@
               </a:rPr>
               <a:t>Domain Model</a:t>
             </a:r>
+            <a:endParaRPr lang="en-US" sz="1000" dirty="0">
+              <a:solidFill>
+                <a:schemeClr val="tx1"/>
+              </a:solidFill>
+            </a:endParaRPr>
           </a:p>
         </p:txBody>
       </p:sp>
     </p:spTree>
-    <p:extLst>
-      <p:ext uri="{BB962C8B-B14F-4D97-AF65-F5344CB8AC3E}">
-        <p14:creationId xmlns:p14="http://schemas.microsoft.com/office/powerpoint/2010/main" val="3893534347"/>
-      </p:ext>
-    </p:extLst>
   </p:cSld>
   <p:clrMapOvr>
     <a:masterClrMapping/>
@@ -15822,13 +14218,7 @@
       </p:grpSpPr>
       <p:sp>
         <p:nvSpPr>
-          <p:cNvPr id="2" name="Title 1">
-            <a:extLst>
-              <a:ext uri="{FF2B5EF4-FFF2-40B4-BE49-F238E27FC236}">
-                <a16:creationId xmlns:a16="http://schemas.microsoft.com/office/drawing/2014/main" id="{540409DC-4A3D-42ED-90F6-13A0C827F065}"/>
-              </a:ext>
-            </a:extLst>
-          </p:cNvPr>
+          <p:cNvPr id="2" name="Title 1"/>
           <p:cNvSpPr>
             <a:spLocks noGrp="1"/>
           </p:cNvSpPr>
@@ -15851,13 +14241,7 @@
       </p:sp>
       <p:sp>
         <p:nvSpPr>
-          <p:cNvPr id="3" name="Content Placeholder 2">
-            <a:extLst>
-              <a:ext uri="{FF2B5EF4-FFF2-40B4-BE49-F238E27FC236}">
-                <a16:creationId xmlns:a16="http://schemas.microsoft.com/office/drawing/2014/main" id="{D3765327-795B-49DD-9B2D-BDB9215F40D8}"/>
-              </a:ext>
-            </a:extLst>
-          </p:cNvPr>
+          <p:cNvPr id="3" name="Content Placeholder 2"/>
           <p:cNvSpPr>
             <a:spLocks noGrp="1"/>
           </p:cNvSpPr>
@@ -15872,7 +14256,7 @@
           </a:bodyPr>
           <a:lstStyle/>
           <a:p>
-            <a:pPr marL="118872" indent="0">
+            <a:pPr marL="118745" indent="0">
               <a:lnSpc>
                 <a:spcPct val="120000"/>
               </a:lnSpc>
@@ -15982,6 +14366,7 @@
               <a:rPr lang="zh-CN" altLang="en-US" dirty="0"/>
               <a:t>， 怎么办？</a:t>
             </a:r>
+            <a:endParaRPr lang="zh-CN" altLang="en-US" dirty="0"/>
           </a:p>
           <a:p>
             <a:pPr lvl="1">
@@ -15993,6 +14378,7 @@
               <a:rPr lang="zh-CN" altLang="en-US" dirty="0"/>
               <a:t>有些成员认领的任务很多，有些成员认领的任务很少，忙闲不均，怎么办？</a:t>
             </a:r>
+            <a:endParaRPr lang="zh-CN" altLang="en-US" dirty="0"/>
           </a:p>
           <a:p>
             <a:pPr>
@@ -16008,6 +14394,7 @@
               <a:rPr lang="en-US" altLang="zh-CN" dirty="0"/>
               <a:t>?</a:t>
             </a:r>
+            <a:endParaRPr lang="en-US" altLang="zh-CN" dirty="0"/>
           </a:p>
           <a:p>
             <a:pPr lvl="1">
@@ -16064,11 +14451,6 @@
         </p:txBody>
       </p:sp>
     </p:spTree>
-    <p:extLst>
-      <p:ext uri="{BB962C8B-B14F-4D97-AF65-F5344CB8AC3E}">
-        <p14:creationId xmlns:p14="http://schemas.microsoft.com/office/powerpoint/2010/main" val="2543900192"/>
-      </p:ext>
-    </p:extLst>
   </p:cSld>
   <p:clrMapOvr>
     <a:masterClrMapping/>
@@ -16095,13 +14477,7 @@
       </p:grpSpPr>
       <p:sp>
         <p:nvSpPr>
-          <p:cNvPr id="2" name="Title 1">
-            <a:extLst>
-              <a:ext uri="{FF2B5EF4-FFF2-40B4-BE49-F238E27FC236}">
-                <a16:creationId xmlns:a16="http://schemas.microsoft.com/office/drawing/2014/main" id="{F3D38540-E567-44CC-98AA-1BF154F044A5}"/>
-              </a:ext>
-            </a:extLst>
-          </p:cNvPr>
+          <p:cNvPr id="2" name="Title 1"/>
           <p:cNvSpPr>
             <a:spLocks noGrp="1"/>
           </p:cNvSpPr>
@@ -16142,13 +14518,7 @@
       </p:sp>
       <p:sp>
         <p:nvSpPr>
-          <p:cNvPr id="3" name="Content Placeholder 2">
-            <a:extLst>
-              <a:ext uri="{FF2B5EF4-FFF2-40B4-BE49-F238E27FC236}">
-                <a16:creationId xmlns:a16="http://schemas.microsoft.com/office/drawing/2014/main" id="{6EBA4C05-93DC-4ED3-9C66-296271644949}"/>
-              </a:ext>
-            </a:extLst>
-          </p:cNvPr>
+          <p:cNvPr id="3" name="Content Placeholder 2"/>
           <p:cNvSpPr>
             <a:spLocks noGrp="1"/>
           </p:cNvSpPr>
@@ -16174,6 +14544,9 @@
               </a:rPr>
               <a:t>有三个每天跟踪的时间值：</a:t>
             </a:r>
+            <a:endParaRPr lang="zh-CN" altLang="en-US" sz="2400" dirty="0">
+              <a:latin typeface="+mn-ea"/>
+            </a:endParaRPr>
           </a:p>
           <a:p>
             <a:r>
@@ -16284,20 +14657,14 @@
       </p:sp>
       <p:pic>
         <p:nvPicPr>
-          <p:cNvPr id="4" name="Picture 3">
-            <a:extLst>
-              <a:ext uri="{FF2B5EF4-FFF2-40B4-BE49-F238E27FC236}">
-                <a16:creationId xmlns:a16="http://schemas.microsoft.com/office/drawing/2014/main" id="{2E0C223C-1A5E-4C02-8D5A-278BB0F5A964}"/>
-              </a:ext>
-            </a:extLst>
-          </p:cNvPr>
+          <p:cNvPr id="4" name="Picture 3"/>
           <p:cNvPicPr>
             <a:picLocks noChangeAspect="1"/>
           </p:cNvPicPr>
           <p:nvPr/>
         </p:nvPicPr>
         <p:blipFill>
-          <a:blip r:embed="rId2"/>
+          <a:blip r:embed="rId1"/>
           <a:stretch>
             <a:fillRect/>
           </a:stretch>
@@ -16314,20 +14681,14 @@
       </p:pic>
       <p:pic>
         <p:nvPicPr>
-          <p:cNvPr id="5" name="Picture 4">
-            <a:extLst>
-              <a:ext uri="{FF2B5EF4-FFF2-40B4-BE49-F238E27FC236}">
-                <a16:creationId xmlns:a16="http://schemas.microsoft.com/office/drawing/2014/main" id="{710E891E-828F-4E58-8337-60CFA39C370B}"/>
-              </a:ext>
-            </a:extLst>
-          </p:cNvPr>
+          <p:cNvPr id="5" name="Picture 4"/>
           <p:cNvPicPr>
             <a:picLocks noChangeAspect="1"/>
           </p:cNvPicPr>
           <p:nvPr/>
         </p:nvPicPr>
         <p:blipFill>
-          <a:blip r:embed="rId3"/>
+          <a:blip r:embed="rId2"/>
           <a:stretch>
             <a:fillRect/>
           </a:stretch>
@@ -16343,11 +14704,6 @@
         </p:spPr>
       </p:pic>
     </p:spTree>
-    <p:extLst>
-      <p:ext uri="{BB962C8B-B14F-4D97-AF65-F5344CB8AC3E}">
-        <p14:creationId xmlns:p14="http://schemas.microsoft.com/office/powerpoint/2010/main" val="1987010629"/>
-      </p:ext>
-    </p:extLst>
   </p:cSld>
   <p:clrMapOvr>
     <a:masterClrMapping/>
@@ -16374,13 +14730,7 @@
       </p:grpSpPr>
       <p:sp>
         <p:nvSpPr>
-          <p:cNvPr id="2" name="Title 1">
-            <a:extLst>
-              <a:ext uri="{FF2B5EF4-FFF2-40B4-BE49-F238E27FC236}">
-                <a16:creationId xmlns:a16="http://schemas.microsoft.com/office/drawing/2014/main" id="{C3576192-E970-4BDB-885C-53C2C8AE41BF}"/>
-              </a:ext>
-            </a:extLst>
-          </p:cNvPr>
+          <p:cNvPr id="2" name="Title 1"/>
           <p:cNvSpPr>
             <a:spLocks noGrp="1"/>
           </p:cNvSpPr>
@@ -16403,13 +14753,7 @@
       </p:sp>
       <p:sp>
         <p:nvSpPr>
-          <p:cNvPr id="3" name="Content Placeholder 2">
-            <a:extLst>
-              <a:ext uri="{FF2B5EF4-FFF2-40B4-BE49-F238E27FC236}">
-                <a16:creationId xmlns:a16="http://schemas.microsoft.com/office/drawing/2014/main" id="{7E909748-3F92-4706-9840-13DE39922D9F}"/>
-              </a:ext>
-            </a:extLst>
-          </p:cNvPr>
+          <p:cNvPr id="3" name="Content Placeholder 2"/>
           <p:cNvSpPr>
             <a:spLocks noGrp="1"/>
           </p:cNvSpPr>
@@ -16431,11 +14775,6 @@
         </p:txBody>
       </p:sp>
     </p:spTree>
-    <p:extLst>
-      <p:ext uri="{BB962C8B-B14F-4D97-AF65-F5344CB8AC3E}">
-        <p14:creationId xmlns:p14="http://schemas.microsoft.com/office/powerpoint/2010/main" val="2764642956"/>
-      </p:ext>
-    </p:extLst>
   </p:cSld>
   <p:clrMapOvr>
     <a:masterClrMapping/>
@@ -16533,6 +14872,7 @@
               <a:rPr lang="en-US" dirty="0"/>
               <a:t>User story: “As a &lt;role&gt; I want &lt;feature&gt; so that I can &lt;benefit&gt;”.</a:t>
             </a:r>
+            <a:endParaRPr lang="en-US" dirty="0"/>
           </a:p>
           <a:p>
             <a:endParaRPr lang="en-US" dirty="0"/>
@@ -16542,15 +14882,11 @@
               <a:rPr lang="en-US" dirty="0"/>
               <a:t> BDD: “In order to &lt;realize benefit&gt; as a &lt;role&gt; I want &lt;feature&gt;.</a:t>
             </a:r>
+            <a:endParaRPr lang="en-US" dirty="0"/>
           </a:p>
         </p:txBody>
       </p:sp>
     </p:spTree>
-    <p:extLst>
-      <p:ext uri="{BB962C8B-B14F-4D97-AF65-F5344CB8AC3E}">
-        <p14:creationId xmlns:p14="http://schemas.microsoft.com/office/powerpoint/2010/main" val="2000092642"/>
-      </p:ext>
-    </p:extLst>
   </p:cSld>
   <p:clrMapOvr>
     <a:masterClrMapping/>
@@ -16643,6 +14979,7 @@
               <a:rPr lang="en-US" sz="1800" dirty="0"/>
               <a:t>should refer to the same system in the same way</a:t>
             </a:r>
+            <a:endParaRPr lang="en-US" sz="1800" dirty="0"/>
           </a:p>
           <a:p>
             <a:pPr lvl="1"/>
@@ -16665,6 +15002,7 @@
               <a:rPr lang="en-US" sz="1800" dirty="0"/>
               <a:t>Any system should have an identified, verifiable value to the business </a:t>
             </a:r>
+            <a:endParaRPr lang="en-US" sz="1800" dirty="0"/>
           </a:p>
           <a:p>
             <a:pPr lvl="1"/>
@@ -16679,6 +15017,7 @@
               <a:rPr lang="en-US" sz="1800" dirty="0"/>
               <a:t>Up-front analysis, design and planning all have a diminishing return</a:t>
             </a:r>
+            <a:endParaRPr lang="en-US" sz="1800" dirty="0"/>
           </a:p>
           <a:p>
             <a:pPr lvl="1"/>
@@ -16697,13 +15036,13 @@
             <a:endParaRPr lang="en-US" sz="1800" dirty="0"/>
           </a:p>
           <a:p>
-            <a:pPr marL="118872" indent="0">
+            <a:pPr marL="118745" indent="0">
               <a:buNone/>
             </a:pPr>
             <a:endParaRPr lang="en-US" altLang="zh-CN" sz="1800" dirty="0"/>
           </a:p>
           <a:p>
-            <a:pPr marL="118872" indent="0">
+            <a:pPr marL="118745" indent="0">
               <a:buNone/>
             </a:pPr>
             <a:r>
@@ -16714,6 +15053,7 @@
               <a:rPr lang="en-US" sz="2000" dirty="0"/>
               <a:t>:  </a:t>
             </a:r>
+            <a:endParaRPr lang="en-US" sz="2000" dirty="0"/>
           </a:p>
           <a:p>
             <a:r>
@@ -16747,11 +15087,6 @@
         </p:txBody>
       </p:sp>
     </p:spTree>
-    <p:extLst>
-      <p:ext uri="{BB962C8B-B14F-4D97-AF65-F5344CB8AC3E}">
-        <p14:creationId xmlns:p14="http://schemas.microsoft.com/office/powerpoint/2010/main" val="247542524"/>
-      </p:ext>
-    </p:extLst>
   </p:cSld>
   <p:clrMapOvr>
     <a:masterClrMapping/>
@@ -16799,6 +15134,7 @@
               <a:rPr lang="en-US" dirty="0"/>
               <a:t>emember</a:t>
             </a:r>
+            <a:endParaRPr lang="en-US" dirty="0"/>
           </a:p>
         </p:txBody>
       </p:sp>
@@ -16833,6 +15169,7 @@
               <a:rPr lang="en-US" altLang="zh-CN" dirty="0"/>
               <a:t>! </a:t>
             </a:r>
+            <a:endParaRPr lang="en-US" altLang="zh-CN" dirty="0"/>
           </a:p>
           <a:p>
             <a:pPr marL="0" indent="0">
@@ -16851,7 +15188,7 @@
           <p:nvPr/>
         </p:nvPicPr>
         <p:blipFill>
-          <a:blip r:embed="rId2"/>
+          <a:blip r:embed="rId1"/>
           <a:stretch>
             <a:fillRect/>
           </a:stretch>
@@ -16867,11 +15204,6 @@
         </p:spPr>
       </p:pic>
     </p:spTree>
-    <p:extLst>
-      <p:ext uri="{BB962C8B-B14F-4D97-AF65-F5344CB8AC3E}">
-        <p14:creationId xmlns:p14="http://schemas.microsoft.com/office/powerpoint/2010/main" val="3387809721"/>
-      </p:ext>
-    </p:extLst>
   </p:cSld>
   <p:clrMapOvr>
     <a:masterClrMapping/>
@@ -16932,7 +15264,6 @@
           </p:cNvGraphicFramePr>
           <p:nvPr>
             <p:ph idx="1"/>
-            <p:extLst/>
           </p:nvPr>
         </p:nvGraphicFramePr>
         <p:xfrm>
@@ -16944,34 +15275,10 @@
             <a:tbl>
               <a:tblPr/>
               <a:tblGrid>
-                <a:gridCol w="1841578">
-                  <a:extLst>
-                    <a:ext uri="{9D8B030D-6E8A-4147-A177-3AD203B41FA5}">
-                      <a16:colId xmlns:a16="http://schemas.microsoft.com/office/drawing/2014/main" val="20000"/>
-                    </a:ext>
-                  </a:extLst>
-                </a:gridCol>
-                <a:gridCol w="2094137">
-                  <a:extLst>
-                    <a:ext uri="{9D8B030D-6E8A-4147-A177-3AD203B41FA5}">
-                      <a16:colId xmlns:a16="http://schemas.microsoft.com/office/drawing/2014/main" val="20001"/>
-                    </a:ext>
-                  </a:extLst>
-                </a:gridCol>
-                <a:gridCol w="2251988">
-                  <a:extLst>
-                    <a:ext uri="{9D8B030D-6E8A-4147-A177-3AD203B41FA5}">
-                      <a16:colId xmlns:a16="http://schemas.microsoft.com/office/drawing/2014/main" val="20002"/>
-                    </a:ext>
-                  </a:extLst>
-                </a:gridCol>
-                <a:gridCol w="2346697">
-                  <a:extLst>
-                    <a:ext uri="{9D8B030D-6E8A-4147-A177-3AD203B41FA5}">
-                      <a16:colId xmlns:a16="http://schemas.microsoft.com/office/drawing/2014/main" val="20003"/>
-                    </a:ext>
-                  </a:extLst>
-                </a:gridCol>
+                <a:gridCol w="1841578"/>
+                <a:gridCol w="2094137"/>
+                <a:gridCol w="2251988"/>
+                <a:gridCol w="2346697"/>
               </a:tblGrid>
               <a:tr h="423130">
                 <a:tc>
@@ -16982,24 +15289,24 @@
                       <a:r>
                         <a:rPr lang="zh-CN" altLang="en-US" sz="1300" b="1" dirty="0">
                           <a:effectLst/>
-                          <a:latin typeface="Microsoft YaHei" panose="020B0503020204020204" pitchFamily="34" charset="-122"/>
-                          <a:ea typeface="Microsoft YaHei" panose="020B0503020204020204" pitchFamily="34" charset="-122"/>
+                          <a:latin typeface="微软雅黑" panose="020B0503020204020204" charset="-122"/>
+                          <a:ea typeface="微软雅黑" panose="020B0503020204020204" charset="-122"/>
                         </a:rPr>
                         <a:t>客观因素</a:t>
                       </a:r>
                       <a:r>
                         <a:rPr lang="en-US" altLang="zh-CN" sz="1300" b="1" dirty="0">
                           <a:effectLst/>
-                          <a:latin typeface="Microsoft YaHei" panose="020B0503020204020204" pitchFamily="34" charset="-122"/>
-                          <a:ea typeface="Microsoft YaHei" panose="020B0503020204020204" pitchFamily="34" charset="-122"/>
+                          <a:latin typeface="微软雅黑" panose="020B0503020204020204" charset="-122"/>
+                          <a:ea typeface="微软雅黑" panose="020B0503020204020204" charset="-122"/>
                         </a:rPr>
                         <a:t>\</a:t>
                       </a:r>
                       <a:r>
                         <a:rPr lang="zh-CN" altLang="en-US" sz="1300" b="1" dirty="0">
                           <a:effectLst/>
-                          <a:latin typeface="Microsoft YaHei" panose="020B0503020204020204" pitchFamily="34" charset="-122"/>
-                          <a:ea typeface="Microsoft YaHei" panose="020B0503020204020204" pitchFamily="34" charset="-122"/>
+                          <a:latin typeface="微软雅黑" panose="020B0503020204020204" charset="-122"/>
+                          <a:ea typeface="微软雅黑" panose="020B0503020204020204" charset="-122"/>
                         </a:rPr>
                         <a:t>最适用方式</a:t>
                       </a:r>
@@ -17053,24 +15360,24 @@
                       <a:r>
                         <a:rPr lang="zh-CN" altLang="en-US" sz="1300" b="1">
                           <a:effectLst/>
-                          <a:latin typeface="Microsoft YaHei" panose="020B0503020204020204" pitchFamily="34" charset="-122"/>
-                          <a:ea typeface="Microsoft YaHei" panose="020B0503020204020204" pitchFamily="34" charset="-122"/>
+                          <a:latin typeface="微软雅黑" panose="020B0503020204020204" charset="-122"/>
+                          <a:ea typeface="微软雅黑" panose="020B0503020204020204" charset="-122"/>
                         </a:rPr>
                         <a:t>敏捷 </a:t>
                       </a:r>
                       <a:r>
                         <a:rPr lang="en-US" altLang="zh-CN" sz="1300" b="1">
                           <a:effectLst/>
-                          <a:latin typeface="Microsoft YaHei" panose="020B0503020204020204" pitchFamily="34" charset="-122"/>
-                          <a:ea typeface="Microsoft YaHei" panose="020B0503020204020204" pitchFamily="34" charset="-122"/>
+                          <a:latin typeface="微软雅黑" panose="020B0503020204020204" charset="-122"/>
+                          <a:ea typeface="微软雅黑" panose="020B0503020204020204" charset="-122"/>
                         </a:rPr>
                         <a:t>(</a:t>
                       </a:r>
                       <a:r>
                         <a:rPr lang="en-US" sz="1300" b="1">
                           <a:effectLst/>
-                          <a:latin typeface="Microsoft YaHei" panose="020B0503020204020204" pitchFamily="34" charset="-122"/>
-                          <a:ea typeface="Microsoft YaHei" panose="020B0503020204020204" pitchFamily="34" charset="-122"/>
+                          <a:latin typeface="微软雅黑" panose="020B0503020204020204" charset="-122"/>
+                          <a:ea typeface="微软雅黑" panose="020B0503020204020204" charset="-122"/>
                         </a:rPr>
                         <a:t>Agile)</a:t>
                       </a:r>
@@ -17124,24 +15431,24 @@
                       <a:r>
                         <a:rPr lang="zh-CN" altLang="en-US" sz="1300" b="1">
                           <a:effectLst/>
-                          <a:latin typeface="Microsoft YaHei" panose="020B0503020204020204" pitchFamily="34" charset="-122"/>
-                          <a:ea typeface="Microsoft YaHei" panose="020B0503020204020204" pitchFamily="34" charset="-122"/>
+                          <a:latin typeface="微软雅黑" panose="020B0503020204020204" charset="-122"/>
+                          <a:ea typeface="微软雅黑" panose="020B0503020204020204" charset="-122"/>
                         </a:rPr>
                         <a:t>计划驱动 </a:t>
                       </a:r>
                       <a:r>
                         <a:rPr lang="en-US" altLang="zh-CN" sz="1300" b="1">
                           <a:effectLst/>
-                          <a:latin typeface="Microsoft YaHei" panose="020B0503020204020204" pitchFamily="34" charset="-122"/>
-                          <a:ea typeface="Microsoft YaHei" panose="020B0503020204020204" pitchFamily="34" charset="-122"/>
+                          <a:latin typeface="微软雅黑" panose="020B0503020204020204" charset="-122"/>
+                          <a:ea typeface="微软雅黑" panose="020B0503020204020204" charset="-122"/>
                         </a:rPr>
                         <a:t>(</a:t>
                       </a:r>
                       <a:r>
                         <a:rPr lang="en-US" sz="1300" b="1">
                           <a:effectLst/>
-                          <a:latin typeface="Microsoft YaHei" panose="020B0503020204020204" pitchFamily="34" charset="-122"/>
-                          <a:ea typeface="Microsoft YaHei" panose="020B0503020204020204" pitchFamily="34" charset="-122"/>
+                          <a:latin typeface="微软雅黑" panose="020B0503020204020204" charset="-122"/>
+                          <a:ea typeface="微软雅黑" panose="020B0503020204020204" charset="-122"/>
                         </a:rPr>
                         <a:t>Plan-driven)</a:t>
                       </a:r>
@@ -17195,24 +15502,24 @@
                       <a:r>
                         <a:rPr lang="zh-CN" altLang="en-US" sz="1300" b="1">
                           <a:effectLst/>
-                          <a:latin typeface="Microsoft YaHei" panose="020B0503020204020204" pitchFamily="34" charset="-122"/>
-                          <a:ea typeface="Microsoft YaHei" panose="020B0503020204020204" pitchFamily="34" charset="-122"/>
+                          <a:latin typeface="微软雅黑" panose="020B0503020204020204" charset="-122"/>
+                          <a:ea typeface="微软雅黑" panose="020B0503020204020204" charset="-122"/>
                         </a:rPr>
                         <a:t>形式化的开发方法 </a:t>
                       </a:r>
                       <a:r>
                         <a:rPr lang="en-US" altLang="zh-CN" sz="1300" b="1">
                           <a:effectLst/>
-                          <a:latin typeface="Microsoft YaHei" panose="020B0503020204020204" pitchFamily="34" charset="-122"/>
-                          <a:ea typeface="Microsoft YaHei" panose="020B0503020204020204" pitchFamily="34" charset="-122"/>
+                          <a:latin typeface="微软雅黑" panose="020B0503020204020204" charset="-122"/>
+                          <a:ea typeface="微软雅黑" panose="020B0503020204020204" charset="-122"/>
                         </a:rPr>
                         <a:t>(</a:t>
                       </a:r>
                       <a:r>
                         <a:rPr lang="en-US" sz="1300" b="1">
                           <a:effectLst/>
-                          <a:latin typeface="Microsoft YaHei" panose="020B0503020204020204" pitchFamily="34" charset="-122"/>
-                          <a:ea typeface="Microsoft YaHei" panose="020B0503020204020204" pitchFamily="34" charset="-122"/>
+                          <a:latin typeface="微软雅黑" panose="020B0503020204020204" charset="-122"/>
+                          <a:ea typeface="微软雅黑" panose="020B0503020204020204" charset="-122"/>
                         </a:rPr>
                         <a:t>Formal Method)</a:t>
                       </a:r>
@@ -17258,11 +15565,6 @@
                     </a:lnB>
                   </a:tcPr>
                 </a:tc>
-                <a:extLst>
-                  <a:ext uri="{0D108BD9-81ED-4DB2-BD59-A6C34878D82A}">
-                    <a16:rowId xmlns:a16="http://schemas.microsoft.com/office/drawing/2014/main" val="10000"/>
-                  </a:ext>
-                </a:extLst>
               </a:tr>
               <a:tr h="423130">
                 <a:tc>
@@ -17273,8 +15575,8 @@
                       <a:r>
                         <a:rPr lang="zh-CN" altLang="en-US" sz="1300">
                           <a:effectLst/>
-                          <a:latin typeface="Microsoft YaHei" panose="020B0503020204020204" pitchFamily="34" charset="-122"/>
-                          <a:ea typeface="Microsoft YaHei" panose="020B0503020204020204" pitchFamily="34" charset="-122"/>
+                          <a:latin typeface="微软雅黑" panose="020B0503020204020204" charset="-122"/>
+                          <a:ea typeface="微软雅黑" panose="020B0503020204020204" charset="-122"/>
                         </a:rPr>
                         <a:t>产品可靠性要求</a:t>
                       </a:r>
@@ -17328,24 +15630,24 @@
                       <a:r>
                         <a:rPr lang="zh-CN" altLang="en-US" sz="1300" dirty="0">
                           <a:effectLst/>
-                          <a:latin typeface="Microsoft YaHei" panose="020B0503020204020204" pitchFamily="34" charset="-122"/>
-                          <a:ea typeface="Microsoft YaHei" panose="020B0503020204020204" pitchFamily="34" charset="-122"/>
+                          <a:latin typeface="微软雅黑" panose="020B0503020204020204" charset="-122"/>
+                          <a:ea typeface="微软雅黑" panose="020B0503020204020204" charset="-122"/>
                         </a:rPr>
                         <a:t>不高</a:t>
                       </a:r>
                       <a:r>
                         <a:rPr lang="en-US" altLang="zh-CN" sz="1300" dirty="0">
                           <a:effectLst/>
-                          <a:latin typeface="Microsoft YaHei" panose="020B0503020204020204" pitchFamily="34" charset="-122"/>
-                          <a:ea typeface="Microsoft YaHei" panose="020B0503020204020204" pitchFamily="34" charset="-122"/>
+                          <a:latin typeface="微软雅黑" panose="020B0503020204020204" charset="-122"/>
+                          <a:ea typeface="微软雅黑" panose="020B0503020204020204" charset="-122"/>
                         </a:rPr>
                         <a:t>, </a:t>
                       </a:r>
                       <a:r>
                         <a:rPr lang="zh-CN" altLang="en-US" sz="1300" dirty="0">
                           <a:effectLst/>
-                          <a:latin typeface="Microsoft YaHei" panose="020B0503020204020204" pitchFamily="34" charset="-122"/>
-                          <a:ea typeface="Microsoft YaHei" panose="020B0503020204020204" pitchFamily="34" charset="-122"/>
+                          <a:latin typeface="微软雅黑" panose="020B0503020204020204" charset="-122"/>
+                          <a:ea typeface="微软雅黑" panose="020B0503020204020204" charset="-122"/>
                         </a:rPr>
                         <a:t>容忍经常出错</a:t>
                       </a:r>
@@ -17399,8 +15701,8 @@
                       <a:r>
                         <a:rPr lang="zh-CN" altLang="en-US" sz="1300">
                           <a:effectLst/>
-                          <a:latin typeface="Microsoft YaHei" panose="020B0503020204020204" pitchFamily="34" charset="-122"/>
-                          <a:ea typeface="Microsoft YaHei" panose="020B0503020204020204" pitchFamily="34" charset="-122"/>
+                          <a:latin typeface="微软雅黑" panose="020B0503020204020204" charset="-122"/>
+                          <a:ea typeface="微软雅黑" panose="020B0503020204020204" charset="-122"/>
                         </a:rPr>
                         <a:t>必须有较高可靠性</a:t>
                       </a:r>
@@ -17454,8 +15756,8 @@
                       <a:r>
                         <a:rPr lang="zh-CN" altLang="en-US" sz="1300">
                           <a:effectLst/>
-                          <a:latin typeface="Microsoft YaHei" panose="020B0503020204020204" pitchFamily="34" charset="-122"/>
-                          <a:ea typeface="Microsoft YaHei" panose="020B0503020204020204" pitchFamily="34" charset="-122"/>
+                          <a:latin typeface="微软雅黑" panose="020B0503020204020204" charset="-122"/>
+                          <a:ea typeface="微软雅黑" panose="020B0503020204020204" charset="-122"/>
                         </a:rPr>
                         <a:t>有极高的可靠性和质量要求</a:t>
                       </a:r>
@@ -17501,11 +15803,6 @@
                     </a:lnB>
                   </a:tcPr>
                 </a:tc>
-                <a:extLst>
-                  <a:ext uri="{0D108BD9-81ED-4DB2-BD59-A6C34878D82A}">
-                    <a16:rowId xmlns:a16="http://schemas.microsoft.com/office/drawing/2014/main" val="10001"/>
-                  </a:ext>
-                </a:extLst>
               </a:tr>
               <a:tr h="423130">
                 <a:tc>
@@ -17516,8 +15813,8 @@
                       <a:r>
                         <a:rPr lang="zh-CN" altLang="en-US" sz="1300">
                           <a:effectLst/>
-                          <a:latin typeface="Microsoft YaHei" panose="020B0503020204020204" pitchFamily="34" charset="-122"/>
-                          <a:ea typeface="Microsoft YaHei" panose="020B0503020204020204" pitchFamily="34" charset="-122"/>
+                          <a:latin typeface="微软雅黑" panose="020B0503020204020204" charset="-122"/>
+                          <a:ea typeface="微软雅黑" panose="020B0503020204020204" charset="-122"/>
                         </a:rPr>
                         <a:t>需求变化</a:t>
                       </a:r>
@@ -17571,8 +15868,8 @@
                       <a:r>
                         <a:rPr lang="zh-CN" altLang="en-US" sz="1300" dirty="0">
                           <a:effectLst/>
-                          <a:latin typeface="Microsoft YaHei" panose="020B0503020204020204" pitchFamily="34" charset="-122"/>
-                          <a:ea typeface="Microsoft YaHei" panose="020B0503020204020204" pitchFamily="34" charset="-122"/>
+                          <a:latin typeface="微软雅黑" panose="020B0503020204020204" charset="-122"/>
+                          <a:ea typeface="微软雅黑" panose="020B0503020204020204" charset="-122"/>
                         </a:rPr>
                         <a:t>经常变化</a:t>
                       </a:r>
@@ -17626,8 +15923,8 @@
                       <a:r>
                         <a:rPr lang="zh-CN" altLang="en-US" sz="1300">
                           <a:effectLst/>
-                          <a:latin typeface="Microsoft YaHei" panose="020B0503020204020204" pitchFamily="34" charset="-122"/>
-                          <a:ea typeface="Microsoft YaHei" panose="020B0503020204020204" pitchFamily="34" charset="-122"/>
+                          <a:latin typeface="微软雅黑" panose="020B0503020204020204" charset="-122"/>
+                          <a:ea typeface="微软雅黑" panose="020B0503020204020204" charset="-122"/>
                         </a:rPr>
                         <a:t>不经常变化</a:t>
                       </a:r>
@@ -17681,8 +15978,8 @@
                       <a:r>
                         <a:rPr lang="zh-CN" altLang="en-US" sz="1300">
                           <a:effectLst/>
-                          <a:latin typeface="Microsoft YaHei" panose="020B0503020204020204" pitchFamily="34" charset="-122"/>
-                          <a:ea typeface="Microsoft YaHei" panose="020B0503020204020204" pitchFamily="34" charset="-122"/>
+                          <a:latin typeface="微软雅黑" panose="020B0503020204020204" charset="-122"/>
+                          <a:ea typeface="微软雅黑" panose="020B0503020204020204" charset="-122"/>
                         </a:rPr>
                         <a:t>固定的需求，需求可以建模</a:t>
                       </a:r>
@@ -17728,11 +16025,6 @@
                     </a:lnB>
                   </a:tcPr>
                 </a:tc>
-                <a:extLst>
-                  <a:ext uri="{0D108BD9-81ED-4DB2-BD59-A6C34878D82A}">
-                    <a16:rowId xmlns:a16="http://schemas.microsoft.com/office/drawing/2014/main" val="10002"/>
-                  </a:ext>
-                </a:extLst>
               </a:tr>
               <a:tr h="225303">
                 <a:tc>
@@ -17743,8 +16035,8 @@
                       <a:r>
                         <a:rPr lang="zh-CN" altLang="en-US" sz="1300">
                           <a:effectLst/>
-                          <a:latin typeface="Microsoft YaHei" panose="020B0503020204020204" pitchFamily="34" charset="-122"/>
-                          <a:ea typeface="Microsoft YaHei" panose="020B0503020204020204" pitchFamily="34" charset="-122"/>
+                          <a:latin typeface="微软雅黑" panose="020B0503020204020204" charset="-122"/>
+                          <a:ea typeface="微软雅黑" panose="020B0503020204020204" charset="-122"/>
                         </a:rPr>
                         <a:t>团队人员数量</a:t>
                       </a:r>
@@ -17798,8 +16090,8 @@
                       <a:r>
                         <a:rPr lang="zh-CN" altLang="en-US" sz="1300">
                           <a:effectLst/>
-                          <a:latin typeface="Microsoft YaHei" panose="020B0503020204020204" pitchFamily="34" charset="-122"/>
-                          <a:ea typeface="Microsoft YaHei" panose="020B0503020204020204" pitchFamily="34" charset="-122"/>
+                          <a:latin typeface="微软雅黑" panose="020B0503020204020204" charset="-122"/>
+                          <a:ea typeface="微软雅黑" panose="020B0503020204020204" charset="-122"/>
                         </a:rPr>
                         <a:t>不多</a:t>
                       </a:r>
@@ -17853,8 +16145,8 @@
                       <a:r>
                         <a:rPr lang="zh-CN" altLang="en-US" sz="1300">
                           <a:effectLst/>
-                          <a:latin typeface="Microsoft YaHei" panose="020B0503020204020204" pitchFamily="34" charset="-122"/>
-                          <a:ea typeface="Microsoft YaHei" panose="020B0503020204020204" pitchFamily="34" charset="-122"/>
+                          <a:latin typeface="微软雅黑" panose="020B0503020204020204" charset="-122"/>
+                          <a:ea typeface="微软雅黑" panose="020B0503020204020204" charset="-122"/>
                         </a:rPr>
                         <a:t>较多</a:t>
                       </a:r>
@@ -17908,8 +16200,8 @@
                       <a:r>
                         <a:rPr lang="zh-CN" altLang="en-US" sz="1300">
                           <a:effectLst/>
-                          <a:latin typeface="Microsoft YaHei" panose="020B0503020204020204" pitchFamily="34" charset="-122"/>
-                          <a:ea typeface="Microsoft YaHei" panose="020B0503020204020204" pitchFamily="34" charset="-122"/>
+                          <a:latin typeface="微软雅黑" panose="020B0503020204020204" charset="-122"/>
+                          <a:ea typeface="微软雅黑" panose="020B0503020204020204" charset="-122"/>
                         </a:rPr>
                         <a:t>不多</a:t>
                       </a:r>
@@ -17955,11 +16247,6 @@
                     </a:lnB>
                   </a:tcPr>
                 </a:tc>
-                <a:extLst>
-                  <a:ext uri="{0D108BD9-81ED-4DB2-BD59-A6C34878D82A}">
-                    <a16:rowId xmlns:a16="http://schemas.microsoft.com/office/drawing/2014/main" val="10003"/>
-                  </a:ext>
-                </a:extLst>
               </a:tr>
               <a:tr h="423130">
                 <a:tc>
@@ -17970,8 +16257,8 @@
                       <a:r>
                         <a:rPr lang="zh-CN" altLang="en-US" sz="1300">
                           <a:effectLst/>
-                          <a:latin typeface="Microsoft YaHei" panose="020B0503020204020204" pitchFamily="34" charset="-122"/>
-                          <a:ea typeface="Microsoft YaHei" panose="020B0503020204020204" pitchFamily="34" charset="-122"/>
+                          <a:latin typeface="微软雅黑" panose="020B0503020204020204" charset="-122"/>
+                          <a:ea typeface="微软雅黑" panose="020B0503020204020204" charset="-122"/>
                         </a:rPr>
                         <a:t>人员经验</a:t>
                       </a:r>
@@ -18025,8 +16312,8 @@
                       <a:r>
                         <a:rPr lang="zh-CN" altLang="en-US" sz="1300">
                           <a:effectLst/>
-                          <a:latin typeface="Microsoft YaHei" panose="020B0503020204020204" pitchFamily="34" charset="-122"/>
-                          <a:ea typeface="Microsoft YaHei" panose="020B0503020204020204" pitchFamily="34" charset="-122"/>
+                          <a:latin typeface="微软雅黑" panose="020B0503020204020204" charset="-122"/>
+                          <a:ea typeface="微软雅黑" panose="020B0503020204020204" charset="-122"/>
                         </a:rPr>
                         <a:t>有资深程序员带队</a:t>
                       </a:r>
@@ -18080,8 +16367,8 @@
                       <a:r>
                         <a:rPr lang="zh-CN" altLang="en-US" sz="1300">
                           <a:effectLst/>
-                          <a:latin typeface="Microsoft YaHei" panose="020B0503020204020204" pitchFamily="34" charset="-122"/>
-                          <a:ea typeface="Microsoft YaHei" panose="020B0503020204020204" pitchFamily="34" charset="-122"/>
+                          <a:latin typeface="微软雅黑" panose="020B0503020204020204" charset="-122"/>
+                          <a:ea typeface="微软雅黑" panose="020B0503020204020204" charset="-122"/>
                         </a:rPr>
                         <a:t>以中层技术人员为主</a:t>
                       </a:r>
@@ -18135,8 +16422,8 @@
                       <a:r>
                         <a:rPr lang="zh-CN" altLang="en-US" sz="1300">
                           <a:effectLst/>
-                          <a:latin typeface="Microsoft YaHei" panose="020B0503020204020204" pitchFamily="34" charset="-122"/>
-                          <a:ea typeface="Microsoft YaHei" panose="020B0503020204020204" pitchFamily="34" charset="-122"/>
+                          <a:latin typeface="微软雅黑" panose="020B0503020204020204" charset="-122"/>
+                          <a:ea typeface="微软雅黑" panose="020B0503020204020204" charset="-122"/>
                         </a:rPr>
                         <a:t>资深专家</a:t>
                       </a:r>
@@ -18182,11 +16469,6 @@
                     </a:lnB>
                   </a:tcPr>
                 </a:tc>
-                <a:extLst>
-                  <a:ext uri="{0D108BD9-81ED-4DB2-BD59-A6C34878D82A}">
-                    <a16:rowId xmlns:a16="http://schemas.microsoft.com/office/drawing/2014/main" val="10004"/>
-                  </a:ext>
-                </a:extLst>
               </a:tr>
               <a:tr h="423130">
                 <a:tc>
@@ -18197,8 +16479,8 @@
                       <a:r>
                         <a:rPr lang="zh-CN" altLang="en-US" sz="1300">
                           <a:effectLst/>
-                          <a:latin typeface="Microsoft YaHei" panose="020B0503020204020204" pitchFamily="34" charset="-122"/>
-                          <a:ea typeface="Microsoft YaHei" panose="020B0503020204020204" pitchFamily="34" charset="-122"/>
+                          <a:latin typeface="微软雅黑" panose="020B0503020204020204" charset="-122"/>
+                          <a:ea typeface="微软雅黑" panose="020B0503020204020204" charset="-122"/>
                         </a:rPr>
                         <a:t>公司文化</a:t>
                       </a:r>
@@ -18252,24 +16534,24 @@
                       <a:r>
                         <a:rPr lang="zh-CN" altLang="en-US" sz="1300">
                           <a:effectLst/>
-                          <a:latin typeface="Microsoft YaHei" panose="020B0503020204020204" pitchFamily="34" charset="-122"/>
-                          <a:ea typeface="Microsoft YaHei" panose="020B0503020204020204" pitchFamily="34" charset="-122"/>
+                          <a:latin typeface="微软雅黑" panose="020B0503020204020204" charset="-122"/>
+                          <a:ea typeface="微软雅黑" panose="020B0503020204020204" charset="-122"/>
                         </a:rPr>
                         <a:t>鼓励变化</a:t>
                       </a:r>
                       <a:r>
                         <a:rPr lang="en-US" altLang="zh-CN" sz="1300">
                           <a:effectLst/>
-                          <a:latin typeface="Microsoft YaHei" panose="020B0503020204020204" pitchFamily="34" charset="-122"/>
-                          <a:ea typeface="Microsoft YaHei" panose="020B0503020204020204" pitchFamily="34" charset="-122"/>
+                          <a:latin typeface="微软雅黑" panose="020B0503020204020204" charset="-122"/>
+                          <a:ea typeface="微软雅黑" panose="020B0503020204020204" charset="-122"/>
                         </a:rPr>
                         <a:t>, </a:t>
                       </a:r>
                       <a:r>
                         <a:rPr lang="zh-CN" altLang="en-US" sz="1300">
                           <a:effectLst/>
-                          <a:latin typeface="Microsoft YaHei" panose="020B0503020204020204" pitchFamily="34" charset="-122"/>
-                          <a:ea typeface="Microsoft YaHei" panose="020B0503020204020204" pitchFamily="34" charset="-122"/>
+                          <a:latin typeface="微软雅黑" panose="020B0503020204020204" charset="-122"/>
+                          <a:ea typeface="微软雅黑" panose="020B0503020204020204" charset="-122"/>
                         </a:rPr>
                         <a:t>行业充满变数</a:t>
                       </a:r>
@@ -18323,24 +16605,24 @@
                       <a:r>
                         <a:rPr lang="zh-CN" altLang="en-US" sz="1300">
                           <a:effectLst/>
-                          <a:latin typeface="Microsoft YaHei" panose="020B0503020204020204" pitchFamily="34" charset="-122"/>
-                          <a:ea typeface="Microsoft YaHei" panose="020B0503020204020204" pitchFamily="34" charset="-122"/>
+                          <a:latin typeface="微软雅黑" panose="020B0503020204020204" charset="-122"/>
+                          <a:ea typeface="微软雅黑" panose="020B0503020204020204" charset="-122"/>
                         </a:rPr>
                         <a:t>崇尚秩序</a:t>
                       </a:r>
                       <a:r>
                         <a:rPr lang="en-US" altLang="zh-CN" sz="1300">
                           <a:effectLst/>
-                          <a:latin typeface="Microsoft YaHei" panose="020B0503020204020204" pitchFamily="34" charset="-122"/>
-                          <a:ea typeface="Microsoft YaHei" panose="020B0503020204020204" pitchFamily="34" charset="-122"/>
+                          <a:latin typeface="微软雅黑" panose="020B0503020204020204" charset="-122"/>
+                          <a:ea typeface="微软雅黑" panose="020B0503020204020204" charset="-122"/>
                         </a:rPr>
                         <a:t>, </a:t>
                       </a:r>
                       <a:r>
                         <a:rPr lang="zh-CN" altLang="en-US" sz="1300">
                           <a:effectLst/>
-                          <a:latin typeface="Microsoft YaHei" panose="020B0503020204020204" pitchFamily="34" charset="-122"/>
-                          <a:ea typeface="Microsoft YaHei" panose="020B0503020204020204" pitchFamily="34" charset="-122"/>
+                          <a:latin typeface="微软雅黑" panose="020B0503020204020204" charset="-122"/>
+                          <a:ea typeface="微软雅黑" panose="020B0503020204020204" charset="-122"/>
                         </a:rPr>
                         <a:t>按时交付</a:t>
                       </a:r>
@@ -18394,8 +16676,8 @@
                       <a:r>
                         <a:rPr lang="zh-CN" altLang="en-US" sz="1300">
                           <a:effectLst/>
-                          <a:latin typeface="Microsoft YaHei" panose="020B0503020204020204" pitchFamily="34" charset="-122"/>
-                          <a:ea typeface="Microsoft YaHei" panose="020B0503020204020204" pitchFamily="34" charset="-122"/>
+                          <a:latin typeface="微软雅黑" panose="020B0503020204020204" charset="-122"/>
+                          <a:ea typeface="微软雅黑" panose="020B0503020204020204" charset="-122"/>
                         </a:rPr>
                         <a:t>精益求精</a:t>
                       </a:r>
@@ -18441,11 +16723,6 @@
                     </a:lnB>
                   </a:tcPr>
                 </a:tc>
-                <a:extLst>
-                  <a:ext uri="{0D108BD9-81ED-4DB2-BD59-A6C34878D82A}">
-                    <a16:rowId xmlns:a16="http://schemas.microsoft.com/office/drawing/2014/main" val="10005"/>
-                  </a:ext>
-                </a:extLst>
               </a:tr>
               <a:tr h="818784">
                 <a:tc>
@@ -18456,8 +16733,8 @@
                       <a:r>
                         <a:rPr lang="zh-CN" altLang="en-US" sz="1300" b="1">
                           <a:effectLst/>
-                          <a:latin typeface="Microsoft YaHei" panose="020B0503020204020204" pitchFamily="34" charset="-122"/>
-                          <a:ea typeface="Microsoft YaHei" panose="020B0503020204020204" pitchFamily="34" charset="-122"/>
+                          <a:latin typeface="微软雅黑" panose="020B0503020204020204" charset="-122"/>
+                          <a:ea typeface="微软雅黑" panose="020B0503020204020204" charset="-122"/>
                         </a:rPr>
                         <a:t>实际的例子</a:t>
                       </a:r>
@@ -18511,32 +16788,32 @@
                       <a:r>
                         <a:rPr lang="zh-CN" altLang="en-US" sz="1300" b="1" dirty="0">
                           <a:effectLst/>
-                          <a:latin typeface="Microsoft YaHei" panose="020B0503020204020204" pitchFamily="34" charset="-122"/>
-                          <a:ea typeface="Microsoft YaHei" panose="020B0503020204020204" pitchFamily="34" charset="-122"/>
+                          <a:latin typeface="微软雅黑" panose="020B0503020204020204" charset="-122"/>
+                          <a:ea typeface="微软雅黑" panose="020B0503020204020204" charset="-122"/>
                         </a:rPr>
                         <a:t>写一个微博网站</a:t>
                       </a:r>
                       <a:r>
                         <a:rPr lang="en-US" altLang="zh-CN" sz="1300" b="1" dirty="0">
                           <a:effectLst/>
-                          <a:latin typeface="Microsoft YaHei" panose="020B0503020204020204" pitchFamily="34" charset="-122"/>
-                          <a:ea typeface="Microsoft YaHei" panose="020B0503020204020204" pitchFamily="34" charset="-122"/>
+                          <a:latin typeface="微软雅黑" panose="020B0503020204020204" charset="-122"/>
+                          <a:ea typeface="微软雅黑" panose="020B0503020204020204" charset="-122"/>
                         </a:rPr>
                         <a:t>; </a:t>
                       </a:r>
                       <a:r>
                         <a:rPr lang="zh-CN" altLang="en-US" sz="1300" b="1" dirty="0">
                           <a:effectLst/>
-                          <a:latin typeface="Microsoft YaHei" panose="020B0503020204020204" pitchFamily="34" charset="-122"/>
-                          <a:ea typeface="Microsoft YaHei" panose="020B0503020204020204" pitchFamily="34" charset="-122"/>
+                          <a:latin typeface="微软雅黑" panose="020B0503020204020204" charset="-122"/>
+                          <a:ea typeface="微软雅黑" panose="020B0503020204020204" charset="-122"/>
                         </a:rPr>
                         <a:t>面向消费者的</a:t>
                       </a:r>
                       <a:r>
                         <a:rPr lang="en-US" altLang="zh-CN" sz="1300" b="1" dirty="0">
                           <a:effectLst/>
-                          <a:latin typeface="Microsoft YaHei" panose="020B0503020204020204" pitchFamily="34" charset="-122"/>
-                          <a:ea typeface="Microsoft YaHei" panose="020B0503020204020204" pitchFamily="34" charset="-122"/>
+                          <a:latin typeface="微软雅黑" panose="020B0503020204020204" charset="-122"/>
+                          <a:ea typeface="微软雅黑" panose="020B0503020204020204" charset="-122"/>
                         </a:rPr>
                         <a:t>APP </a:t>
                       </a:r>
@@ -18590,24 +16867,24 @@
                       <a:r>
                         <a:rPr lang="zh-CN" altLang="en-US" sz="1300" b="1">
                           <a:effectLst/>
-                          <a:latin typeface="Microsoft YaHei" panose="020B0503020204020204" pitchFamily="34" charset="-122"/>
-                          <a:ea typeface="Microsoft YaHei" panose="020B0503020204020204" pitchFamily="34" charset="-122"/>
+                          <a:latin typeface="微软雅黑" panose="020B0503020204020204" charset="-122"/>
+                          <a:ea typeface="微软雅黑" panose="020B0503020204020204" charset="-122"/>
                         </a:rPr>
                         <a:t>开发下一版本的办公软件</a:t>
                       </a:r>
                       <a:r>
                         <a:rPr lang="en-US" altLang="zh-CN" sz="1300" b="1">
                           <a:effectLst/>
-                          <a:latin typeface="Microsoft YaHei" panose="020B0503020204020204" pitchFamily="34" charset="-122"/>
-                          <a:ea typeface="Microsoft YaHei" panose="020B0503020204020204" pitchFamily="34" charset="-122"/>
+                          <a:latin typeface="微软雅黑" panose="020B0503020204020204" charset="-122"/>
+                          <a:ea typeface="微软雅黑" panose="020B0503020204020204" charset="-122"/>
                         </a:rPr>
                         <a:t>; </a:t>
                       </a:r>
                       <a:r>
                         <a:rPr lang="zh-CN" altLang="en-US" sz="1300" b="1">
                           <a:effectLst/>
-                          <a:latin typeface="Microsoft YaHei" panose="020B0503020204020204" pitchFamily="34" charset="-122"/>
-                          <a:ea typeface="Microsoft YaHei" panose="020B0503020204020204" pitchFamily="34" charset="-122"/>
+                          <a:latin typeface="微软雅黑" panose="020B0503020204020204" charset="-122"/>
+                          <a:ea typeface="微软雅黑" panose="020B0503020204020204" charset="-122"/>
                         </a:rPr>
                         <a:t>给商业用户开发软件</a:t>
                       </a:r>
@@ -18661,47 +16938,47 @@
                       <a:r>
                         <a:rPr lang="zh-CN" altLang="en-US" sz="1300" b="1">
                           <a:effectLst/>
-                          <a:latin typeface="Microsoft YaHei" panose="020B0503020204020204" pitchFamily="34" charset="-122"/>
-                          <a:ea typeface="Microsoft YaHei" panose="020B0503020204020204" pitchFamily="34" charset="-122"/>
+                          <a:latin typeface="微软雅黑" panose="020B0503020204020204" charset="-122"/>
+                          <a:ea typeface="微软雅黑" panose="020B0503020204020204" charset="-122"/>
                         </a:rPr>
                         <a:t>开发底层正则表达式解析模块</a:t>
                       </a:r>
                       <a:r>
                         <a:rPr lang="en-US" altLang="zh-CN" sz="1300" b="1">
                           <a:effectLst/>
-                          <a:latin typeface="Microsoft YaHei" panose="020B0503020204020204" pitchFamily="34" charset="-122"/>
-                          <a:ea typeface="Microsoft YaHei" panose="020B0503020204020204" pitchFamily="34" charset="-122"/>
+                          <a:latin typeface="微软雅黑" panose="020B0503020204020204" charset="-122"/>
+                          <a:ea typeface="微软雅黑" panose="020B0503020204020204" charset="-122"/>
                         </a:rPr>
                         <a:t>; </a:t>
                       </a:r>
                       <a:br>
                         <a:rPr lang="en-US" altLang="zh-CN" sz="1300" b="1">
                           <a:effectLst/>
-                          <a:latin typeface="Microsoft YaHei" panose="020B0503020204020204" pitchFamily="34" charset="-122"/>
-                          <a:ea typeface="Microsoft YaHei" panose="020B0503020204020204" pitchFamily="34" charset="-122"/>
+                          <a:latin typeface="微软雅黑" panose="020B0503020204020204" charset="-122"/>
+                          <a:ea typeface="微软雅黑" panose="020B0503020204020204" charset="-122"/>
                         </a:rPr>
                       </a:br>
                       <a:r>
                         <a:rPr lang="zh-CN" altLang="en-US" sz="1300" b="1">
                           <a:effectLst/>
-                          <a:latin typeface="Microsoft YaHei" panose="020B0503020204020204" pitchFamily="34" charset="-122"/>
-                          <a:ea typeface="Microsoft YaHei" panose="020B0503020204020204" pitchFamily="34" charset="-122"/>
+                          <a:latin typeface="微软雅黑" panose="020B0503020204020204" charset="-122"/>
+                          <a:ea typeface="微软雅黑" panose="020B0503020204020204" charset="-122"/>
                         </a:rPr>
                         <a:t>科学计算</a:t>
                       </a:r>
                       <a:r>
                         <a:rPr lang="en-US" altLang="zh-CN" sz="1300" b="1">
                           <a:effectLst/>
-                          <a:latin typeface="Microsoft YaHei" panose="020B0503020204020204" pitchFamily="34" charset="-122"/>
-                          <a:ea typeface="Microsoft YaHei" panose="020B0503020204020204" pitchFamily="34" charset="-122"/>
+                          <a:latin typeface="微软雅黑" panose="020B0503020204020204" charset="-122"/>
+                          <a:ea typeface="微软雅黑" panose="020B0503020204020204" charset="-122"/>
                         </a:rPr>
                         <a:t>; </a:t>
                       </a:r>
                       <a:r>
                         <a:rPr lang="zh-CN" altLang="en-US" sz="1300" b="1">
                           <a:effectLst/>
-                          <a:latin typeface="Microsoft YaHei" panose="020B0503020204020204" pitchFamily="34" charset="-122"/>
-                          <a:ea typeface="Microsoft YaHei" panose="020B0503020204020204" pitchFamily="34" charset="-122"/>
+                          <a:latin typeface="微软雅黑" panose="020B0503020204020204" charset="-122"/>
+                          <a:ea typeface="微软雅黑" panose="020B0503020204020204" charset="-122"/>
                         </a:rPr>
                         <a:t>复杂系统的核心组件 </a:t>
                       </a:r>
@@ -18747,11 +17024,6 @@
                     </a:lnB>
                   </a:tcPr>
                 </a:tc>
-                <a:extLst>
-                  <a:ext uri="{0D108BD9-81ED-4DB2-BD59-A6C34878D82A}">
-                    <a16:rowId xmlns:a16="http://schemas.microsoft.com/office/drawing/2014/main" val="10006"/>
-                  </a:ext>
-                </a:extLst>
               </a:tr>
               <a:tr h="1412264">
                 <a:tc>
@@ -18762,8 +17034,8 @@
                       <a:r>
                         <a:rPr lang="zh-CN" altLang="en-US" sz="1300">
                           <a:effectLst/>
-                          <a:latin typeface="Microsoft YaHei" panose="020B0503020204020204" pitchFamily="34" charset="-122"/>
-                          <a:ea typeface="Microsoft YaHei" panose="020B0503020204020204" pitchFamily="34" charset="-122"/>
+                          <a:latin typeface="微软雅黑" panose="020B0503020204020204" charset="-122"/>
+                          <a:ea typeface="微软雅黑" panose="020B0503020204020204" charset="-122"/>
                         </a:rPr>
                         <a:t>用错方式的后果</a:t>
                       </a:r>
@@ -18817,40 +17089,40 @@
                       <a:r>
                         <a:rPr lang="zh-CN" altLang="en-US" sz="1300">
                           <a:effectLst/>
-                          <a:latin typeface="Microsoft YaHei" panose="020B0503020204020204" pitchFamily="34" charset="-122"/>
-                          <a:ea typeface="Microsoft YaHei" panose="020B0503020204020204" pitchFamily="34" charset="-122"/>
+                          <a:latin typeface="微软雅黑" panose="020B0503020204020204" charset="-122"/>
+                          <a:ea typeface="微软雅黑" panose="020B0503020204020204" charset="-122"/>
                         </a:rPr>
                         <a:t>用敏捷的方法开发登月火箭控制程序</a:t>
                       </a:r>
                       <a:r>
                         <a:rPr lang="en-US" altLang="zh-CN" sz="1300">
                           <a:effectLst/>
-                          <a:latin typeface="Microsoft YaHei" panose="020B0503020204020204" pitchFamily="34" charset="-122"/>
-                          <a:ea typeface="Microsoft YaHei" panose="020B0503020204020204" pitchFamily="34" charset="-122"/>
+                          <a:latin typeface="微软雅黑" panose="020B0503020204020204" charset="-122"/>
+                          <a:ea typeface="微软雅黑" panose="020B0503020204020204" charset="-122"/>
                         </a:rPr>
                         <a:t>,  </a:t>
                       </a:r>
                       <a:r>
                         <a:rPr lang="zh-CN" altLang="en-US" sz="1300">
                           <a:effectLst/>
-                          <a:latin typeface="Microsoft YaHei" panose="020B0503020204020204" pitchFamily="34" charset="-122"/>
-                          <a:ea typeface="Microsoft YaHei" panose="020B0503020204020204" pitchFamily="34" charset="-122"/>
+                          <a:latin typeface="微软雅黑" panose="020B0503020204020204" charset="-122"/>
+                          <a:ea typeface="微软雅黑" panose="020B0503020204020204" charset="-122"/>
                         </a:rPr>
                         <a:t>前</a:t>
                       </a:r>
                       <a:r>
                         <a:rPr lang="en-US" altLang="zh-CN" sz="1300">
                           <a:effectLst/>
-                          <a:latin typeface="Microsoft YaHei" panose="020B0503020204020204" pitchFamily="34" charset="-122"/>
-                          <a:ea typeface="Microsoft YaHei" panose="020B0503020204020204" pitchFamily="34" charset="-122"/>
+                          <a:latin typeface="微软雅黑" panose="020B0503020204020204" charset="-122"/>
+                          <a:ea typeface="微软雅黑" panose="020B0503020204020204" charset="-122"/>
                         </a:rPr>
                         <a:t>N </a:t>
                       </a:r>
                       <a:r>
                         <a:rPr lang="zh-CN" altLang="en-US" sz="1300">
                           <a:effectLst/>
-                          <a:latin typeface="Microsoft YaHei" panose="020B0503020204020204" pitchFamily="34" charset="-122"/>
-                          <a:ea typeface="Microsoft YaHei" panose="020B0503020204020204" pitchFamily="34" charset="-122"/>
+                          <a:latin typeface="微软雅黑" panose="020B0503020204020204" charset="-122"/>
+                          <a:ea typeface="微软雅黑" panose="020B0503020204020204" charset="-122"/>
                         </a:rPr>
                         <a:t>批宇航员都挂了。 </a:t>
                       </a:r>
@@ -18904,48 +17176,48 @@
                       <a:r>
                         <a:rPr lang="zh-CN" altLang="en-US" sz="1300">
                           <a:effectLst/>
-                          <a:latin typeface="Microsoft YaHei" panose="020B0503020204020204" pitchFamily="34" charset="-122"/>
-                          <a:ea typeface="Microsoft YaHei" panose="020B0503020204020204" pitchFamily="34" charset="-122"/>
+                          <a:latin typeface="微软雅黑" panose="020B0503020204020204" charset="-122"/>
+                          <a:ea typeface="微软雅黑" panose="020B0503020204020204" charset="-122"/>
                         </a:rPr>
                         <a:t>部分方法还是有效的；</a:t>
                       </a:r>
                       <a:r>
                         <a:rPr lang="zh-CN" altLang="en-US" sz="1300" baseline="0">
                           <a:effectLst/>
-                          <a:latin typeface="Microsoft YaHei" panose="020B0503020204020204" pitchFamily="34" charset="-122"/>
-                          <a:ea typeface="Microsoft YaHei" panose="020B0503020204020204" pitchFamily="34" charset="-122"/>
+                          <a:latin typeface="微软雅黑" panose="020B0503020204020204" charset="-122"/>
+                          <a:ea typeface="微软雅黑" panose="020B0503020204020204" charset="-122"/>
                         </a:rPr>
                         <a:t> 但是，</a:t>
                       </a:r>
                       <a:r>
                         <a:rPr lang="zh-CN" altLang="en-US" sz="1300">
                           <a:effectLst/>
-                          <a:latin typeface="Microsoft YaHei" panose="020B0503020204020204" pitchFamily="34" charset="-122"/>
-                          <a:ea typeface="Microsoft YaHei" panose="020B0503020204020204" pitchFamily="34" charset="-122"/>
+                          <a:latin typeface="微软雅黑" panose="020B0503020204020204" charset="-122"/>
+                          <a:ea typeface="微软雅黑" panose="020B0503020204020204" charset="-122"/>
                         </a:rPr>
                         <a:t>用全套敏</a:t>
                       </a:r>
                       <a:r>
                         <a:rPr lang="zh-CN" altLang="en-US" sz="1300" dirty="0">
                           <a:effectLst/>
-                          <a:latin typeface="Microsoft YaHei" panose="020B0503020204020204" pitchFamily="34" charset="-122"/>
-                          <a:ea typeface="Microsoft YaHei" panose="020B0503020204020204" pitchFamily="34" charset="-122"/>
+                          <a:latin typeface="微软雅黑" panose="020B0503020204020204" charset="-122"/>
+                          <a:ea typeface="微软雅黑" panose="020B0503020204020204" charset="-122"/>
                         </a:rPr>
                         <a:t>捷方法</a:t>
                       </a:r>
                       <a:r>
                         <a:rPr lang="en-US" altLang="zh-CN" sz="1300" dirty="0">
                           <a:effectLst/>
-                          <a:latin typeface="Microsoft YaHei" panose="020B0503020204020204" pitchFamily="34" charset="-122"/>
-                          <a:ea typeface="Microsoft YaHei" panose="020B0503020204020204" pitchFamily="34" charset="-122"/>
+                          <a:latin typeface="微软雅黑" panose="020B0503020204020204" charset="-122"/>
+                          <a:ea typeface="微软雅黑" panose="020B0503020204020204" charset="-122"/>
                         </a:rPr>
                         <a:t>,  </a:t>
                       </a:r>
                       <a:r>
                         <a:rPr lang="zh-CN" altLang="en-US" sz="1300" dirty="0">
                           <a:effectLst/>
-                          <a:latin typeface="Microsoft YaHei" panose="020B0503020204020204" pitchFamily="34" charset="-122"/>
-                          <a:ea typeface="Microsoft YaHei" panose="020B0503020204020204" pitchFamily="34" charset="-122"/>
+                          <a:latin typeface="微软雅黑" panose="020B0503020204020204" charset="-122"/>
+                          <a:ea typeface="微软雅黑" panose="020B0503020204020204" charset="-122"/>
                         </a:rPr>
                         <a:t>商业用户未必受得了两周一次更新的频率。 </a:t>
                       </a:r>
@@ -18999,64 +17271,64 @@
                       <a:r>
                         <a:rPr lang="zh-CN" altLang="en-US" sz="1300" dirty="0">
                           <a:effectLst/>
-                          <a:latin typeface="Microsoft YaHei" panose="020B0503020204020204" pitchFamily="34" charset="-122"/>
-                          <a:ea typeface="Microsoft YaHei" panose="020B0503020204020204" pitchFamily="34" charset="-122"/>
+                          <a:latin typeface="微软雅黑" panose="020B0503020204020204" charset="-122"/>
+                          <a:ea typeface="微软雅黑" panose="020B0503020204020204" charset="-122"/>
                         </a:rPr>
                         <a:t>敏捷方法的大部分招数都和这类用户无关</a:t>
                       </a:r>
                       <a:r>
                         <a:rPr lang="en-US" altLang="zh-CN" sz="1300" dirty="0">
                           <a:effectLst/>
-                          <a:latin typeface="Microsoft YaHei" panose="020B0503020204020204" pitchFamily="34" charset="-122"/>
-                          <a:ea typeface="Microsoft YaHei" panose="020B0503020204020204" pitchFamily="34" charset="-122"/>
+                          <a:latin typeface="微软雅黑" panose="020B0503020204020204" charset="-122"/>
+                          <a:ea typeface="微软雅黑" panose="020B0503020204020204" charset="-122"/>
                         </a:rPr>
                         <a:t>, </a:t>
                       </a:r>
                       <a:r>
                         <a:rPr lang="zh-CN" altLang="en-US" sz="1300" dirty="0">
                           <a:effectLst/>
-                          <a:latin typeface="Microsoft YaHei" panose="020B0503020204020204" pitchFamily="34" charset="-122"/>
-                          <a:ea typeface="Microsoft YaHei" panose="020B0503020204020204" pitchFamily="34" charset="-122"/>
+                          <a:latin typeface="微软雅黑" panose="020B0503020204020204" charset="-122"/>
+                          <a:ea typeface="微软雅黑" panose="020B0503020204020204" charset="-122"/>
                         </a:rPr>
                         <a:t>用户关心的是</a:t>
                       </a:r>
                       <a:r>
                         <a:rPr lang="en-US" altLang="zh-CN" sz="1300" dirty="0">
                           <a:effectLst/>
-                          <a:latin typeface="Microsoft YaHei" panose="020B0503020204020204" pitchFamily="34" charset="-122"/>
-                          <a:ea typeface="Microsoft YaHei" panose="020B0503020204020204" pitchFamily="34" charset="-122"/>
+                          <a:latin typeface="微软雅黑" panose="020B0503020204020204" charset="-122"/>
+                          <a:ea typeface="微软雅黑" panose="020B0503020204020204" charset="-122"/>
                         </a:rPr>
                         <a:t>:  </a:t>
                       </a:r>
                       <a:r>
                         <a:rPr lang="zh-CN" altLang="en-US" sz="1300" dirty="0">
                           <a:effectLst/>
-                          <a:latin typeface="Microsoft YaHei" panose="020B0503020204020204" pitchFamily="34" charset="-122"/>
-                          <a:ea typeface="Microsoft YaHei" panose="020B0503020204020204" pitchFamily="34" charset="-122"/>
+                          <a:latin typeface="微软雅黑" panose="020B0503020204020204" charset="-122"/>
+                          <a:ea typeface="微软雅黑" panose="020B0503020204020204" charset="-122"/>
                         </a:rPr>
                         <a:t>把可靠性提高到 </a:t>
                       </a:r>
                       <a:r>
                         <a:rPr lang="en-US" altLang="zh-CN" sz="1300" dirty="0">
                           <a:effectLst/>
-                          <a:latin typeface="Microsoft YaHei" panose="020B0503020204020204" pitchFamily="34" charset="-122"/>
-                          <a:ea typeface="Microsoft YaHei" panose="020B0503020204020204" pitchFamily="34" charset="-122"/>
+                          <a:latin typeface="微软雅黑" panose="020B0503020204020204" charset="-122"/>
+                          <a:ea typeface="微软雅黑" panose="020B0503020204020204" charset="-122"/>
                         </a:rPr>
                         <a:t>99.99%,  </a:t>
                       </a:r>
                       <a:r>
                         <a:rPr lang="zh-CN" altLang="en-US" sz="1300" dirty="0">
                           <a:effectLst/>
-                          <a:latin typeface="Microsoft YaHei" panose="020B0503020204020204" pitchFamily="34" charset="-122"/>
-                          <a:ea typeface="Microsoft YaHei" panose="020B0503020204020204" pitchFamily="34" charset="-122"/>
+                          <a:latin typeface="微软雅黑" panose="020B0503020204020204" charset="-122"/>
+                          <a:ea typeface="微软雅黑" panose="020B0503020204020204" charset="-122"/>
                         </a:rPr>
                         <a:t>不要让微小的错误把系统搞崩溃</a:t>
                       </a:r>
                       <a:r>
                         <a:rPr lang="en-US" altLang="zh-CN" sz="1300" dirty="0">
                           <a:effectLst/>
-                          <a:latin typeface="Microsoft YaHei" panose="020B0503020204020204" pitchFamily="34" charset="-122"/>
-                          <a:ea typeface="Microsoft YaHei" panose="020B0503020204020204" pitchFamily="34" charset="-122"/>
+                          <a:latin typeface="微软雅黑" panose="020B0503020204020204" charset="-122"/>
+                          <a:ea typeface="微软雅黑" panose="020B0503020204020204" charset="-122"/>
                         </a:rPr>
                         <a:t>!  </a:t>
                       </a:r>
@@ -19102,22 +17374,12 @@
                     </a:lnB>
                   </a:tcPr>
                 </a:tc>
-                <a:extLst>
-                  <a:ext uri="{0D108BD9-81ED-4DB2-BD59-A6C34878D82A}">
-                    <a16:rowId xmlns:a16="http://schemas.microsoft.com/office/drawing/2014/main" val="10007"/>
-                  </a:ext>
-                </a:extLst>
               </a:tr>
             </a:tbl>
           </a:graphicData>
         </a:graphic>
       </p:graphicFrame>
     </p:spTree>
-    <p:extLst>
-      <p:ext uri="{BB962C8B-B14F-4D97-AF65-F5344CB8AC3E}">
-        <p14:creationId xmlns:p14="http://schemas.microsoft.com/office/powerpoint/2010/main" val="3111464202"/>
-      </p:ext>
-    </p:extLst>
   </p:cSld>
   <p:clrMapOvr>
     <a:masterClrMapping/>
@@ -19144,13 +17406,7 @@
       </p:grpSpPr>
       <p:sp>
         <p:nvSpPr>
-          <p:cNvPr id="2" name="Title 1">
-            <a:extLst>
-              <a:ext uri="{FF2B5EF4-FFF2-40B4-BE49-F238E27FC236}">
-                <a16:creationId xmlns:a16="http://schemas.microsoft.com/office/drawing/2014/main" id="{045D195B-DABF-440D-9BFD-646AEE5D0429}"/>
-              </a:ext>
-            </a:extLst>
-          </p:cNvPr>
+          <p:cNvPr id="2" name="Title 1"/>
           <p:cNvSpPr>
             <a:spLocks noGrp="1"/>
           </p:cNvSpPr>
@@ -19195,13 +17451,7 @@
       </p:sp>
       <p:pic>
         <p:nvPicPr>
-          <p:cNvPr id="4" name="Content Placeholder 3">
-            <a:extLst>
-              <a:ext uri="{FF2B5EF4-FFF2-40B4-BE49-F238E27FC236}">
-                <a16:creationId xmlns:a16="http://schemas.microsoft.com/office/drawing/2014/main" id="{19C916C6-FF60-406D-ADA3-88D0A4A7810C}"/>
-              </a:ext>
-            </a:extLst>
-          </p:cNvPr>
+          <p:cNvPr id="4" name="Content Placeholder 3"/>
           <p:cNvPicPr>
             <a:picLocks noGrp="1" noChangeAspect="1"/>
           </p:cNvPicPr>
@@ -19210,7 +17460,7 @@
           </p:nvPr>
         </p:nvPicPr>
         <p:blipFill>
-          <a:blip r:embed="rId2"/>
+          <a:blip r:embed="rId1"/>
           <a:stretch>
             <a:fillRect/>
           </a:stretch>
@@ -19226,11 +17476,6 @@
         </p:spPr>
       </p:pic>
     </p:spTree>
-    <p:extLst>
-      <p:ext uri="{BB962C8B-B14F-4D97-AF65-F5344CB8AC3E}">
-        <p14:creationId xmlns:p14="http://schemas.microsoft.com/office/powerpoint/2010/main" val="2905683820"/>
-      </p:ext>
-    </p:extLst>
   </p:cSld>
   <p:clrMapOvr>
     <a:masterClrMapping/>
@@ -19257,13 +17502,7 @@
       </p:grpSpPr>
       <p:sp>
         <p:nvSpPr>
-          <p:cNvPr id="2" name="Title 1">
-            <a:extLst>
-              <a:ext uri="{FF2B5EF4-FFF2-40B4-BE49-F238E27FC236}">
-                <a16:creationId xmlns:a16="http://schemas.microsoft.com/office/drawing/2014/main" id="{B617A536-759C-4F5E-8AD0-42D2F41B845A}"/>
-              </a:ext>
-            </a:extLst>
-          </p:cNvPr>
+          <p:cNvPr id="2" name="Title 1"/>
           <p:cNvSpPr>
             <a:spLocks noGrp="1"/>
           </p:cNvSpPr>
@@ -19286,13 +17525,7 @@
       </p:sp>
       <p:pic>
         <p:nvPicPr>
-          <p:cNvPr id="4" name="Content Placeholder 3">
-            <a:extLst>
-              <a:ext uri="{FF2B5EF4-FFF2-40B4-BE49-F238E27FC236}">
-                <a16:creationId xmlns:a16="http://schemas.microsoft.com/office/drawing/2014/main" id="{AAA9864F-4E8A-4458-8175-43FBAF48BDC2}"/>
-              </a:ext>
-            </a:extLst>
-          </p:cNvPr>
+          <p:cNvPr id="4" name="Content Placeholder 3"/>
           <p:cNvPicPr>
             <a:picLocks noGrp="1" noChangeAspect="1"/>
           </p:cNvPicPr>
@@ -19301,7 +17534,7 @@
           </p:nvPr>
         </p:nvPicPr>
         <p:blipFill>
-          <a:blip r:embed="rId2"/>
+          <a:blip r:embed="rId1"/>
           <a:stretch>
             <a:fillRect/>
           </a:stretch>
@@ -19317,11 +17550,6 @@
         </p:spPr>
       </p:pic>
     </p:spTree>
-    <p:extLst>
-      <p:ext uri="{BB962C8B-B14F-4D97-AF65-F5344CB8AC3E}">
-        <p14:creationId xmlns:p14="http://schemas.microsoft.com/office/powerpoint/2010/main" val="33026678"/>
-      </p:ext>
-    </p:extLst>
   </p:cSld>
   <p:clrMapOvr>
     <a:masterClrMapping/>
@@ -19396,20 +17624,21 @@
             </a:pPr>
             <a:r>
               <a:rPr lang="en-US" dirty="0">
-                <a:hlinkClick r:id="rId2"/>
+                <a:hlinkClick r:id="rId1"/>
               </a:rPr>
               <a:t>http://www.cnblogs.com/xinz/p/3852390.html</a:t>
             </a:r>
             <a:endParaRPr lang="en-US" dirty="0"/>
           </a:p>
           <a:p>
-            <a:pPr marL="118872" indent="0">
+            <a:pPr marL="118745" indent="0">
               <a:buNone/>
             </a:pPr>
             <a:r>
               <a:rPr lang="en-US" dirty="0"/>
               <a:t>	</a:t>
             </a:r>
+            <a:endParaRPr lang="en-US" dirty="0"/>
           </a:p>
           <a:p>
             <a:r>
@@ -19424,7 +17653,7 @@
             </a:pPr>
             <a:r>
               <a:rPr lang="en-US" dirty="0">
-                <a:hlinkClick r:id="rId2"/>
+                <a:hlinkClick r:id="rId1"/>
               </a:rPr>
               <a:t>http://www.cnblogs.com/xinz/p/3852390.html</a:t>
             </a:r>
@@ -19434,7 +17663,7 @@
             <a:endParaRPr lang="en-US" dirty="0"/>
           </a:p>
           <a:p>
-            <a:pPr marL="118872" indent="0">
+            <a:pPr marL="118745" indent="0">
               <a:buNone/>
             </a:pPr>
             <a:endParaRPr lang="en-US" dirty="0"/>
@@ -19442,11 +17671,6 @@
         </p:txBody>
       </p:sp>
     </p:spTree>
-    <p:extLst>
-      <p:ext uri="{BB962C8B-B14F-4D97-AF65-F5344CB8AC3E}">
-        <p14:creationId xmlns:p14="http://schemas.microsoft.com/office/powerpoint/2010/main" val="2073316975"/>
-      </p:ext>
-    </p:extLst>
   </p:cSld>
   <p:clrMapOvr>
     <a:masterClrMapping/>
@@ -19480,7 +17704,7 @@
         <p:spPr>
           <a:xfrm>
             <a:off x="2971800" y="4724400"/>
-            <a:ext cx="1257300" cy="747847"/>
+            <a:ext cx="1257300" cy="830580"/>
           </a:xfrm>
           <a:prstGeom prst="ellipse">
             <a:avLst/>
@@ -19615,8 +17839,8 @@
         </p:nvCxnSpPr>
         <p:spPr>
           <a:xfrm flipH="1">
-            <a:off x="6591300" y="3505200"/>
-            <a:ext cx="495300" cy="990600"/>
+            <a:off x="6632575" y="3505200"/>
+            <a:ext cx="454025" cy="685800"/>
           </a:xfrm>
           <a:prstGeom prst="line">
             <a:avLst/>
@@ -19653,8 +17877,8 @@
         </p:nvCxnSpPr>
         <p:spPr>
           <a:xfrm>
-            <a:off x="5588000" y="3505200"/>
-            <a:ext cx="1003300" cy="990600"/>
+            <a:off x="5511165" y="3505200"/>
+            <a:ext cx="1121410" cy="685800"/>
           </a:xfrm>
           <a:prstGeom prst="line">
             <a:avLst/>
@@ -19876,6 +18100,11 @@
               </a:rPr>
               <a:t>Scrum</a:t>
             </a:r>
+            <a:endParaRPr lang="en-US" sz="1400" dirty="0">
+              <a:solidFill>
+                <a:schemeClr val="tx1"/>
+              </a:solidFill>
+            </a:endParaRPr>
           </a:p>
         </p:txBody>
       </p:sp>
@@ -20067,6 +18296,11 @@
               </a:rPr>
               <a:t>Others</a:t>
             </a:r>
+            <a:endParaRPr lang="en-US" sz="1400" dirty="0">
+              <a:solidFill>
+                <a:schemeClr val="tx1"/>
+              </a:solidFill>
+            </a:endParaRPr>
           </a:p>
         </p:txBody>
       </p:sp>
@@ -20363,8 +18597,8 @@
         </p:nvSpPr>
         <p:spPr>
           <a:xfrm>
-            <a:off x="6248400" y="4495800"/>
-            <a:ext cx="834369" cy="455285"/>
+            <a:off x="6224905" y="4191000"/>
+            <a:ext cx="815340" cy="455295"/>
           </a:xfrm>
           <a:prstGeom prst="ellipse">
             <a:avLst/>
@@ -20431,8 +18665,8 @@
         </p:nvSpPr>
         <p:spPr>
           <a:xfrm>
-            <a:off x="3833486" y="4800599"/>
-            <a:ext cx="762000" cy="381000"/>
+            <a:off x="3833495" y="4191000"/>
+            <a:ext cx="889635" cy="533400"/>
           </a:xfrm>
           <a:prstGeom prst="ellipse">
             <a:avLst/>
@@ -20567,8 +18801,8 @@
         </p:nvSpPr>
         <p:spPr>
           <a:xfrm>
-            <a:off x="4519286" y="4176848"/>
-            <a:ext cx="1119514" cy="471352"/>
+            <a:off x="4756785" y="4177030"/>
+            <a:ext cx="881380" cy="601980"/>
           </a:xfrm>
           <a:prstGeom prst="ellipse">
             <a:avLst/>
@@ -20750,8 +18984,8 @@
         </p:nvSpPr>
         <p:spPr>
           <a:xfrm>
-            <a:off x="2286000" y="5181600"/>
-            <a:ext cx="914400" cy="381000"/>
+            <a:off x="2169160" y="5105400"/>
+            <a:ext cx="802640" cy="609600"/>
           </a:xfrm>
           <a:prstGeom prst="ellipse">
             <a:avLst/>
@@ -20888,9 +19122,9 @@
           <p:nvPr/>
         </p:nvCxnSpPr>
         <p:spPr>
-          <a:xfrm rot="5400000">
-            <a:off x="1790700" y="3848100"/>
-            <a:ext cx="1143000" cy="457200"/>
+          <a:xfrm flipH="1">
+            <a:off x="2087880" y="3505200"/>
+            <a:ext cx="337820" cy="855345"/>
           </a:xfrm>
           <a:prstGeom prst="line">
             <a:avLst/>
@@ -20926,9 +19160,9 @@
           <p:nvPr/>
         </p:nvCxnSpPr>
         <p:spPr>
-          <a:xfrm rot="16200000" flipV="1">
-            <a:off x="1828800" y="4267200"/>
-            <a:ext cx="1676400" cy="152400"/>
+          <a:xfrm flipH="1" flipV="1">
+            <a:off x="2425700" y="3505200"/>
+            <a:ext cx="144780" cy="1600200"/>
           </a:xfrm>
           <a:prstGeom prst="line">
             <a:avLst/>
@@ -20965,8 +19199,8 @@
         </p:nvCxnSpPr>
         <p:spPr>
           <a:xfrm flipH="1" flipV="1">
-            <a:off x="2590800" y="3505200"/>
-            <a:ext cx="939800" cy="1219200"/>
+            <a:off x="2425700" y="3505200"/>
+            <a:ext cx="1174750" cy="1219200"/>
           </a:xfrm>
           <a:prstGeom prst="line">
             <a:avLst/>
@@ -21003,8 +19237,8 @@
         </p:nvCxnSpPr>
         <p:spPr>
           <a:xfrm flipH="1">
-            <a:off x="3530600" y="3505200"/>
-            <a:ext cx="558800" cy="1219200"/>
+            <a:off x="3600450" y="3505200"/>
+            <a:ext cx="387350" cy="1219200"/>
           </a:xfrm>
           <a:prstGeom prst="line">
             <a:avLst/>
@@ -21041,8 +19275,8 @@
         </p:nvCxnSpPr>
         <p:spPr>
           <a:xfrm>
-            <a:off x="4089400" y="3505201"/>
-            <a:ext cx="125086" cy="1295399"/>
+            <a:off x="3987800" y="3505201"/>
+            <a:ext cx="290830" cy="685800"/>
           </a:xfrm>
           <a:prstGeom prst="line">
             <a:avLst/>
@@ -21079,8 +19313,8 @@
         </p:nvCxnSpPr>
         <p:spPr>
           <a:xfrm>
-            <a:off x="4089400" y="3505200"/>
-            <a:ext cx="1168400" cy="762000"/>
+            <a:off x="3987800" y="3505200"/>
+            <a:ext cx="1209675" cy="671830"/>
           </a:xfrm>
           <a:prstGeom prst="line">
             <a:avLst/>
@@ -21116,9 +19350,9 @@
           <p:nvPr/>
         </p:nvCxnSpPr>
         <p:spPr>
-          <a:xfrm rot="5400000">
-            <a:off x="5041900" y="3721100"/>
-            <a:ext cx="762000" cy="330200"/>
+          <a:xfrm flipH="1">
+            <a:off x="5197475" y="3505200"/>
+            <a:ext cx="313690" cy="671830"/>
           </a:xfrm>
           <a:prstGeom prst="line">
             <a:avLst/>
@@ -21365,6 +19599,7 @@
               <a:rPr lang="en-US" dirty="0"/>
               <a:t>.</a:t>
             </a:r>
+            <a:endParaRPr lang="en-US" dirty="0"/>
           </a:p>
         </p:txBody>
       </p:sp>
@@ -21414,8 +19649,8 @@
         </p:nvSpPr>
         <p:spPr>
           <a:xfrm>
-            <a:off x="1524000" y="5336177"/>
-            <a:ext cx="1066799" cy="531223"/>
+            <a:off x="1143000" y="5335905"/>
+            <a:ext cx="1066800" cy="676910"/>
           </a:xfrm>
           <a:prstGeom prst="ellipse">
             <a:avLst/>
@@ -21485,8 +19720,8 @@
         </p:nvCxnSpPr>
         <p:spPr>
           <a:xfrm flipH="1">
-            <a:off x="2057400" y="3505200"/>
-            <a:ext cx="533401" cy="1830976"/>
+            <a:off x="1676401" y="3505200"/>
+            <a:ext cx="749300" cy="1830705"/>
           </a:xfrm>
           <a:prstGeom prst="line">
             <a:avLst/>
@@ -21520,8 +19755,8 @@
         </p:nvSpPr>
         <p:spPr>
           <a:xfrm>
-            <a:off x="1676400" y="4648200"/>
-            <a:ext cx="914400" cy="381000"/>
+            <a:off x="1584325" y="4360545"/>
+            <a:ext cx="1006475" cy="668655"/>
           </a:xfrm>
           <a:prstGeom prst="ellipse">
             <a:avLst/>
@@ -21581,11 +19816,6 @@
         </p:txBody>
       </p:sp>
     </p:spTree>
-    <p:extLst>
-      <p:ext uri="{BB962C8B-B14F-4D97-AF65-F5344CB8AC3E}">
-        <p14:creationId xmlns:p14="http://schemas.microsoft.com/office/powerpoint/2010/main" val="3997051158"/>
-      </p:ext>
-    </p:extLst>
   </p:cSld>
   <p:clrMapOvr>
     <a:masterClrMapping/>
@@ -21612,13 +19842,7 @@
       </p:grpSpPr>
       <p:sp>
         <p:nvSpPr>
-          <p:cNvPr id="2" name="Title 1">
-            <a:extLst>
-              <a:ext uri="{FF2B5EF4-FFF2-40B4-BE49-F238E27FC236}">
-                <a16:creationId xmlns:a16="http://schemas.microsoft.com/office/drawing/2014/main" id="{24577D88-E090-464B-BC87-D60EE9128A0F}"/>
-              </a:ext>
-            </a:extLst>
-          </p:cNvPr>
+          <p:cNvPr id="2" name="Title 1"/>
           <p:cNvSpPr>
             <a:spLocks noGrp="1"/>
           </p:cNvSpPr>
@@ -21635,18 +19859,13 @@
               <a:rPr lang="en-US" dirty="0"/>
               <a:t>appendix</a:t>
             </a:r>
-          </a:p>
-        </p:txBody>
-      </p:sp>
-      <p:sp>
-        <p:nvSpPr>
-          <p:cNvPr id="3" name="Content Placeholder 2">
-            <a:extLst>
-              <a:ext uri="{FF2B5EF4-FFF2-40B4-BE49-F238E27FC236}">
-                <a16:creationId xmlns:a16="http://schemas.microsoft.com/office/drawing/2014/main" id="{3402149D-B9D8-49F7-8135-09433B6F86C7}"/>
-              </a:ext>
-            </a:extLst>
-          </p:cNvPr>
+            <a:endParaRPr lang="en-US" dirty="0"/>
+          </a:p>
+        </p:txBody>
+      </p:sp>
+      <p:sp>
+        <p:nvSpPr>
+          <p:cNvPr id="3" name="Content Placeholder 2"/>
           <p:cNvSpPr>
             <a:spLocks noGrp="1"/>
           </p:cNvSpPr>
@@ -21664,11 +19883,6 @@
         </p:txBody>
       </p:sp>
     </p:spTree>
-    <p:extLst>
-      <p:ext uri="{BB962C8B-B14F-4D97-AF65-F5344CB8AC3E}">
-        <p14:creationId xmlns:p14="http://schemas.microsoft.com/office/powerpoint/2010/main" val="161325156"/>
-      </p:ext>
-    </p:extLst>
   </p:cSld>
   <p:clrMapOvr>
     <a:masterClrMapping/>
@@ -21733,7 +19947,7 @@
           </a:bodyPr>
           <a:lstStyle/>
           <a:p>
-            <a:pPr marL="118872" indent="0" eaLnBrk="0" hangingPunct="0">
+            <a:pPr marL="118745" indent="0" eaLnBrk="0" hangingPunct="0">
               <a:lnSpc>
                 <a:spcPct val="120000"/>
               </a:lnSpc>
@@ -21836,11 +20050,6 @@
         </p:txBody>
       </p:sp>
     </p:spTree>
-    <p:extLst>
-      <p:ext uri="{BB962C8B-B14F-4D97-AF65-F5344CB8AC3E}">
-        <p14:creationId xmlns:p14="http://schemas.microsoft.com/office/powerpoint/2010/main" val="2744199388"/>
-      </p:ext>
-    </p:extLst>
   </p:cSld>
   <p:clrMapOvr>
     <a:masterClrMapping/>
@@ -21928,13 +20137,7 @@
           <p:cNvGraphicFramePr>
             <a:graphicFrameLocks noGrp="1"/>
           </p:cNvGraphicFramePr>
-          <p:nvPr>
-            <p:extLst>
-              <p:ext uri="{D42A27DB-BD31-4B8C-83A1-F6EECF244321}">
-                <p14:modId xmlns:p14="http://schemas.microsoft.com/office/powerpoint/2010/main" val="1552074302"/>
-              </p:ext>
-            </p:extLst>
-          </p:nvPr>
+          <p:nvPr/>
         </p:nvGraphicFramePr>
         <p:xfrm>
           <a:off x="2514600" y="3962401"/>
@@ -21947,20 +20150,8 @@
                 <a:tableStyleId>{5C22544A-7EE6-4342-B048-85BDC9FD1C3A}</a:tableStyleId>
               </a:tblPr>
               <a:tblGrid>
-                <a:gridCol w="3471176">
-                  <a:extLst>
-                    <a:ext uri="{9D8B030D-6E8A-4147-A177-3AD203B41FA5}">
-                      <a16:colId xmlns:a16="http://schemas.microsoft.com/office/drawing/2014/main" val="1489047712"/>
-                    </a:ext>
-                  </a:extLst>
-                </a:gridCol>
-                <a:gridCol w="3463024">
-                  <a:extLst>
-                    <a:ext uri="{9D8B030D-6E8A-4147-A177-3AD203B41FA5}">
-                      <a16:colId xmlns:a16="http://schemas.microsoft.com/office/drawing/2014/main" val="365489092"/>
-                    </a:ext>
-                  </a:extLst>
-                </a:gridCol>
+                <a:gridCol w="3471176"/>
+                <a:gridCol w="3463024"/>
               </a:tblGrid>
               <a:tr h="515415">
                 <a:tc>
@@ -22019,11 +20210,6 @@
                   </a:txBody>
                   <a:tcPr marL="0" marR="0" marT="0" marB="0"/>
                 </a:tc>
-                <a:extLst>
-                  <a:ext uri="{0D108BD9-81ED-4DB2-BD59-A6C34878D82A}">
-                    <a16:rowId xmlns:a16="http://schemas.microsoft.com/office/drawing/2014/main" val="3290944774"/>
-                  </a:ext>
-                </a:extLst>
               </a:tr>
               <a:tr h="499796">
                 <a:tc>
@@ -22082,11 +20268,6 @@
                   </a:txBody>
                   <a:tcPr marL="0" marR="0" marT="0" marB="0"/>
                 </a:tc>
-                <a:extLst>
-                  <a:ext uri="{0D108BD9-81ED-4DB2-BD59-A6C34878D82A}">
-                    <a16:rowId xmlns:a16="http://schemas.microsoft.com/office/drawing/2014/main" val="4266132925"/>
-                  </a:ext>
-                </a:extLst>
               </a:tr>
               <a:tr h="499796">
                 <a:tc>
@@ -22145,11 +20326,6 @@
                   </a:txBody>
                   <a:tcPr marL="0" marR="0" marT="0" marB="0"/>
                 </a:tc>
-                <a:extLst>
-                  <a:ext uri="{0D108BD9-81ED-4DB2-BD59-A6C34878D82A}">
-                    <a16:rowId xmlns:a16="http://schemas.microsoft.com/office/drawing/2014/main" val="143652907"/>
-                  </a:ext>
-                </a:extLst>
               </a:tr>
               <a:tr h="499796">
                 <a:tc>
@@ -22208,11 +20384,6 @@
                   </a:txBody>
                   <a:tcPr marL="0" marR="0" marT="0" marB="0"/>
                 </a:tc>
-                <a:extLst>
-                  <a:ext uri="{0D108BD9-81ED-4DB2-BD59-A6C34878D82A}">
-                    <a16:rowId xmlns:a16="http://schemas.microsoft.com/office/drawing/2014/main" val="3466404985"/>
-                  </a:ext>
-                </a:extLst>
               </a:tr>
               <a:tr h="499796">
                 <a:tc>
@@ -22271,11 +20442,6 @@
                   </a:txBody>
                   <a:tcPr marL="0" marR="0" marT="0" marB="0"/>
                 </a:tc>
-                <a:extLst>
-                  <a:ext uri="{0D108BD9-81ED-4DB2-BD59-A6C34878D82A}">
-                    <a16:rowId xmlns:a16="http://schemas.microsoft.com/office/drawing/2014/main" val="3084262899"/>
-                  </a:ext>
-                </a:extLst>
               </a:tr>
             </a:tbl>
           </a:graphicData>
@@ -22333,9 +20499,6 @@
         </p:spPr>
         <p:txBody>
           <a:bodyPr vert="horz" wrap="square" lIns="91440" tIns="45720" rIns="91440" bIns="45720" numCol="1" anchor="ctr" anchorCtr="0" compatLnSpc="1">
-            <a:prstTxWarp prst="textNoShape">
-              <a:avLst/>
-            </a:prstTxWarp>
             <a:spAutoFit/>
           </a:bodyPr>
           <a:lstStyle/>
@@ -22345,11 +20508,6 @@
         </p:txBody>
       </p:sp>
     </p:spTree>
-    <p:extLst>
-      <p:ext uri="{BB962C8B-B14F-4D97-AF65-F5344CB8AC3E}">
-        <p14:creationId xmlns:p14="http://schemas.microsoft.com/office/powerpoint/2010/main" val="2935768527"/>
-      </p:ext>
-    </p:extLst>
   </p:cSld>
   <p:clrMapOvr>
     <a:masterClrMapping/>
@@ -22400,6 +20558,7 @@
               <a:rPr lang="en-US" dirty="0"/>
               <a:t>Agile Software Development</a:t>
             </a:r>
+            <a:endParaRPr lang="en-US" dirty="0"/>
           </a:p>
         </p:txBody>
       </p:sp>
@@ -22411,7 +20570,6 @@
           </p:cNvGraphicFramePr>
           <p:nvPr>
             <p:ph idx="1"/>
-            <p:extLst/>
           </p:nvPr>
         </p:nvGraphicFramePr>
         <p:xfrm>
@@ -22425,20 +20583,8 @@
                 <a:tableStyleId>{5C22544A-7EE6-4342-B048-85BDC9FD1C3A}</a:tableStyleId>
               </a:tblPr>
               <a:tblGrid>
-                <a:gridCol w="3962400">
-                  <a:extLst>
-                    <a:ext uri="{9D8B030D-6E8A-4147-A177-3AD203B41FA5}">
-                      <a16:colId xmlns:a16="http://schemas.microsoft.com/office/drawing/2014/main" val="20000"/>
-                    </a:ext>
-                  </a:extLst>
-                </a:gridCol>
-                <a:gridCol w="3962400">
-                  <a:extLst>
-                    <a:ext uri="{9D8B030D-6E8A-4147-A177-3AD203B41FA5}">
-                      <a16:colId xmlns:a16="http://schemas.microsoft.com/office/drawing/2014/main" val="20001"/>
-                    </a:ext>
-                  </a:extLst>
-                </a:gridCol>
+                <a:gridCol w="3962400"/>
+                <a:gridCol w="3962400"/>
               </a:tblGrid>
               <a:tr h="528706">
                 <a:tc>
@@ -22468,15 +20614,11 @@
                         <a:rPr lang="en-US" sz="2400" dirty="0"/>
                         <a:t>Agile Approach</a:t>
                       </a:r>
+                      <a:endParaRPr lang="en-US" sz="2400" dirty="0"/>
                     </a:p>
                   </a:txBody>
                   <a:tcPr/>
                 </a:tc>
-                <a:extLst>
-                  <a:ext uri="{0D108BD9-81ED-4DB2-BD59-A6C34878D82A}">
-                    <a16:rowId xmlns:a16="http://schemas.microsoft.com/office/drawing/2014/main" val="10000"/>
-                  </a:ext>
-                </a:extLst>
               </a:tr>
               <a:tr h="951670">
                 <a:tc>
@@ -22488,6 +20630,7 @@
                         <a:rPr lang="en-US" sz="2400" dirty="0"/>
                         <a:t>Processes and Tools</a:t>
                       </a:r>
+                      <a:endParaRPr lang="en-US" sz="2400" dirty="0"/>
                     </a:p>
                   </a:txBody>
                   <a:tcPr/>
@@ -22501,15 +20644,11 @@
                         <a:rPr lang="en-US" sz="2400" dirty="0"/>
                         <a:t>Individual and Interaction</a:t>
                       </a:r>
+                      <a:endParaRPr lang="en-US" sz="2400" dirty="0"/>
                     </a:p>
                   </a:txBody>
                   <a:tcPr/>
                 </a:tc>
-                <a:extLst>
-                  <a:ext uri="{0D108BD9-81ED-4DB2-BD59-A6C34878D82A}">
-                    <a16:rowId xmlns:a16="http://schemas.microsoft.com/office/drawing/2014/main" val="10001"/>
-                  </a:ext>
-                </a:extLst>
               </a:tr>
               <a:tr h="951670">
                 <a:tc>
@@ -22521,6 +20660,7 @@
                         <a:rPr lang="en-US" sz="2400" dirty="0"/>
                         <a:t>Comprehensive Documentation</a:t>
                       </a:r>
+                      <a:endParaRPr lang="en-US" sz="2400" dirty="0"/>
                     </a:p>
                   </a:txBody>
                   <a:tcPr/>
@@ -22534,15 +20674,11 @@
                         <a:rPr lang="en-US" sz="2400" dirty="0"/>
                         <a:t>Working Software</a:t>
                       </a:r>
+                      <a:endParaRPr lang="en-US" sz="2400" dirty="0"/>
                     </a:p>
                   </a:txBody>
                   <a:tcPr/>
                 </a:tc>
-                <a:extLst>
-                  <a:ext uri="{0D108BD9-81ED-4DB2-BD59-A6C34878D82A}">
-                    <a16:rowId xmlns:a16="http://schemas.microsoft.com/office/drawing/2014/main" val="10002"/>
-                  </a:ext>
-                </a:extLst>
               </a:tr>
               <a:tr h="849248">
                 <a:tc>
@@ -22572,15 +20708,11 @@
                         <a:rPr lang="en-US" sz="2400" dirty="0"/>
                         <a:t>Customer Collaboration</a:t>
                       </a:r>
+                      <a:endParaRPr lang="en-US" sz="2400" dirty="0"/>
                     </a:p>
                   </a:txBody>
                   <a:tcPr/>
                 </a:tc>
-                <a:extLst>
-                  <a:ext uri="{0D108BD9-81ED-4DB2-BD59-A6C34878D82A}">
-                    <a16:rowId xmlns:a16="http://schemas.microsoft.com/office/drawing/2014/main" val="10003"/>
-                  </a:ext>
-                </a:extLst>
               </a:tr>
               <a:tr h="528706">
                 <a:tc>
@@ -22619,11 +20751,6 @@
                   </a:txBody>
                   <a:tcPr/>
                 </a:tc>
-                <a:extLst>
-                  <a:ext uri="{0D108BD9-81ED-4DB2-BD59-A6C34878D82A}">
-                    <a16:rowId xmlns:a16="http://schemas.microsoft.com/office/drawing/2014/main" val="10004"/>
-                  </a:ext>
-                </a:extLst>
               </a:tr>
             </a:tbl>
           </a:graphicData>
@@ -22655,15 +20782,11 @@
               <a:rPr lang="en-US" dirty="0"/>
               <a:t>While there is value in existing practices, we value the agile approaches more.  </a:t>
             </a:r>
+            <a:endParaRPr lang="en-US" dirty="0"/>
           </a:p>
         </p:txBody>
       </p:sp>
     </p:spTree>
-    <p:extLst>
-      <p:ext uri="{BB962C8B-B14F-4D97-AF65-F5344CB8AC3E}">
-        <p14:creationId xmlns:p14="http://schemas.microsoft.com/office/powerpoint/2010/main" val="2184172224"/>
-      </p:ext>
-    </p:extLst>
   </p:cSld>
   <p:clrMapOvr>
     <a:masterClrMapping/>
@@ -22707,6 +20830,7 @@
               <a:rPr lang="en-US" dirty="0"/>
               <a:t>Agile Principles (set 1) </a:t>
             </a:r>
+            <a:endParaRPr lang="en-US" dirty="0"/>
           </a:p>
         </p:txBody>
       </p:sp>
@@ -22738,6 +20862,7 @@
               <a:rPr lang="en-US" b="0" dirty="0"/>
               <a:t>through early and continuous delivery of valuable software.</a:t>
             </a:r>
+            <a:endParaRPr lang="en-US" b="0" dirty="0"/>
           </a:p>
           <a:p>
             <a:r>
@@ -22748,6 +20873,7 @@
               <a:rPr lang="en-US" b="0" dirty="0"/>
               <a:t> </a:t>
             </a:r>
+            <a:endParaRPr lang="en-US" b="0" dirty="0"/>
           </a:p>
           <a:p>
             <a:endParaRPr lang="en-US" b="0" dirty="0"/>
@@ -22764,6 +20890,7 @@
               <a:rPr lang="en-US" b="0" dirty="0"/>
               <a:t>development. Agile processes harness change for the customer's competitive advantage. </a:t>
             </a:r>
+            <a:endParaRPr lang="en-US" b="0" dirty="0"/>
           </a:p>
           <a:p>
             <a:r>
@@ -22802,12 +20929,14 @@
               <a:rPr lang="en-US" b="0" dirty="0"/>
               <a:t>preference to the shorter timescale. </a:t>
             </a:r>
+            <a:endParaRPr lang="en-US" b="0" dirty="0"/>
           </a:p>
           <a:p>
             <a:r>
               <a:rPr lang="zh-CN" altLang="en-US" b="0" dirty="0"/>
               <a:t>经常发布可用的软件，发布间隔可以从几周到几个月，能短则短。 </a:t>
             </a:r>
+            <a:endParaRPr lang="zh-CN" altLang="en-US" b="0" dirty="0"/>
           </a:p>
           <a:p>
             <a:endParaRPr lang="en-US" b="0" dirty="0"/>
@@ -22815,11 +20944,6 @@
         </p:txBody>
       </p:sp>
     </p:spTree>
-    <p:extLst>
-      <p:ext uri="{BB962C8B-B14F-4D97-AF65-F5344CB8AC3E}">
-        <p14:creationId xmlns:p14="http://schemas.microsoft.com/office/powerpoint/2010/main" val="4203371887"/>
-      </p:ext>
-    </p:extLst>
   </p:cSld>
   <p:clrMapOvr>
     <a:masterClrMapping/>
@@ -22863,6 +20987,7 @@
               <a:rPr lang="en-US" dirty="0"/>
               <a:t>Agile Process (set 2)</a:t>
             </a:r>
+            <a:endParaRPr lang="en-US" dirty="0"/>
           </a:p>
         </p:txBody>
       </p:sp>
@@ -22894,6 +21019,7 @@
               <a:rPr lang="en-US" b="0" dirty="0"/>
               <a:t>together daily throughout the project. </a:t>
             </a:r>
+            <a:endParaRPr lang="en-US" b="0" dirty="0"/>
           </a:p>
           <a:p>
             <a:r>
@@ -22917,6 +21043,7 @@
               <a:rPr lang="en-US" b="0" dirty="0"/>
               <a:t>Give them the environment and support they need, and trust them to get the job done. </a:t>
             </a:r>
+            <a:endParaRPr lang="en-US" b="0" dirty="0"/>
           </a:p>
           <a:p>
             <a:r>
@@ -22940,6 +21067,7 @@
               <a:rPr lang="en-US" b="0" dirty="0"/>
               <a:t>conveying information to and within a development team is face-to-face conversation. </a:t>
             </a:r>
+            <a:endParaRPr lang="en-US" b="0" dirty="0"/>
           </a:p>
           <a:p>
             <a:r>
@@ -22951,11 +21079,6 @@
         </p:txBody>
       </p:sp>
     </p:spTree>
-    <p:extLst>
-      <p:ext uri="{BB962C8B-B14F-4D97-AF65-F5344CB8AC3E}">
-        <p14:creationId xmlns:p14="http://schemas.microsoft.com/office/powerpoint/2010/main" val="3543497223"/>
-      </p:ext>
-    </p:extLst>
   </p:cSld>
   <p:clrMapOvr>
     <a:masterClrMapping/>
@@ -23154,11 +21277,9 @@
       </a:bgFillStyleLst>
     </a:fmtScheme>
   </a:themeElements>
-  <a:objectDefaults/>
-  <a:extraClrSchemeLst/>
   <a:extLst>
     <a:ext uri="{05A4C25C-085E-4340-85A3-A5531E510DB2}">
-      <thm15:themeFamily xmlns:thm15="http://schemas.microsoft.com/office/thememl/2012/main" name="Depth" id="{7BEAFC2A-325C-49C4-AC08-2B765DA903F9}" vid="{1735E755-43E6-43AA-ABA2-C989ECC79AF5}"/>
+      <thm15:themeFamily xmlns:thm15="http://schemas.microsoft.com/office/thememl/2012/main" name="Office Theme" id="{62F939B6-93AF-4DB8-9C6B-D6C7DFDC589F}" vid="{4A3C46E8-61CC-4603-A589-7422A47A8E4A}"/>
     </a:ext>
   </a:extLst>
 </a:theme>
@@ -23207,7 +21328,7 @@
     </a:clrScheme>
     <a:fontScheme name="Office">
       <a:majorFont>
-        <a:latin typeface="Calibri Light" panose="020F0302020204030204"/>
+        <a:latin typeface="Calibri Light"/>
         <a:ea typeface=""/>
         <a:cs typeface=""/>
         <a:font script="Jpan" typeface="游ゴシック Light"/>
@@ -23242,7 +21363,7 @@
         <a:font script="Geor" typeface="Sylfaen"/>
       </a:majorFont>
       <a:minorFont>
-        <a:latin typeface="Calibri" panose="020F0502020204030204"/>
+        <a:latin typeface="Calibri"/>
         <a:ea typeface=""/>
         <a:cs typeface=""/>
         <a:font script="Jpan" typeface="游ゴシック"/>
@@ -23415,8 +21536,6 @@
       </a:bgFillStyleLst>
     </a:fmtScheme>
   </a:themeElements>
-  <a:objectDefaults/>
-  <a:extraClrSchemeLst/>
   <a:extLst>
     <a:ext uri="{05A4C25C-085E-4340-85A3-A5531E510DB2}">
       <thm15:themeFamily xmlns:thm15="http://schemas.microsoft.com/office/thememl/2012/main" name="Office Theme" id="{62F939B6-93AF-4DB8-9C6B-D6C7DFDC589F}" vid="{4A3C46E8-61CC-4603-A589-7422A47A8E4A}"/>
@@ -23556,33 +21675,18 @@
 
 <file path=customXml/itemProps1.xml><?xml version="1.0" encoding="utf-8"?>
 <ds:datastoreItem xmlns:ds="http://schemas.openxmlformats.org/officeDocument/2006/customXml" ds:itemID="{444F3FC5-B4DC-43CA-867D-26958C1124A8}">
-  <ds:schemaRefs>
-    <ds:schemaRef ds:uri="http://schemas.microsoft.com/sharepoint/v3/contenttype/forms"/>
-  </ds:schemaRefs>
+  <ds:schemaRefs/>
 </ds:datastoreItem>
 </file>
 
 <file path=customXml/itemProps2.xml><?xml version="1.0" encoding="utf-8"?>
 <ds:datastoreItem xmlns:ds="http://schemas.openxmlformats.org/officeDocument/2006/customXml" ds:itemID="{D1338F41-E937-409A-A4FB-E2FBFEFE32FF}">
-  <ds:schemaRefs>
-    <ds:schemaRef ds:uri="http://schemas.microsoft.com/office/2006/metadata/contentType"/>
-    <ds:schemaRef ds:uri="http://schemas.microsoft.com/office/2006/metadata/properties/metaAttributes"/>
-    <ds:schemaRef ds:uri="http://www.w3.org/2001/XMLSchema"/>
-    <ds:schemaRef ds:uri="http://schemas.microsoft.com/office/2006/metadata/properties"/>
-    <ds:schemaRef ds:uri="http://schemas.openxmlformats.org/package/2006/metadata/core-properties"/>
-    <ds:schemaRef ds:uri="http://purl.org/dc/elements/1.1/"/>
-    <ds:schemaRef ds:uri="http://purl.org/dc/terms/"/>
-    <ds:schemaRef ds:uri="http://schemas.microsoft.com/internal/obd"/>
-    <ds:schemaRef ds:uri="http://schemas.microsoft.com/office/infopath/2007/PartnerControls"/>
-  </ds:schemaRefs>
+  <ds:schemaRefs/>
 </ds:datastoreItem>
 </file>
 
 <file path=customXml/itemProps3.xml><?xml version="1.0" encoding="utf-8"?>
 <ds:datastoreItem xmlns:ds="http://schemas.openxmlformats.org/officeDocument/2006/customXml" ds:itemID="{E1395F39-3CC7-4A6D-9DEB-C35DFE747533}">
-  <ds:schemaRefs>
-    <ds:schemaRef ds:uri="http://schemas.microsoft.com/office/2006/metadata/properties"/>
-    <ds:schemaRef ds:uri="http://schemas.microsoft.com/office/infopath/2007/PartnerControls"/>
-  </ds:schemaRefs>
+  <ds:schemaRefs/>
 </ds:datastoreItem>
 </file>